--- a/Projects/Childcare_Affordability/Tableau/KarthikaVellingiri_TermProject_FinalSubmission_Medium-1_Powerpoint.pptx
+++ b/Projects/Childcare_Affordability/Tableau/KarthikaVellingiri_TermProject_FinalSubmission_Medium-1_Powerpoint.pptx
@@ -124,3512 +124,30 @@
 </p:presentation>
 </file>
 
-<file path=ppt/revisionInfo.xml><?xml version="1.0" encoding="utf-8"?>
-<p1510:revInfo xmlns:a="http://schemas.openxmlformats.org/drawingml/2006/main" xmlns:r="http://schemas.openxmlformats.org/officeDocument/2006/relationships" xmlns:p1510="http://schemas.microsoft.com/office/powerpoint/2015/10/main">
-  <p1510:revLst>
-    <p1510:client id="{272279B0-242C-4D01-9A5D-29699CA56103}" v="124" dt="2025-08-10T15:24:57.992"/>
-  </p1510:revLst>
-</p1510:revInfo>
-</file>
-
 <file path=ppt/changesInfos/changesInfo1.xml><?xml version="1.0" encoding="utf-8"?>
 <pc:chgInfo xmlns:a="http://schemas.openxmlformats.org/drawingml/2006/main" xmlns:r="http://schemas.openxmlformats.org/officeDocument/2006/relationships" xmlns:ac="http://schemas.microsoft.com/office/drawing/2013/main/command" xmlns:pc="http://schemas.microsoft.com/office/powerpoint/2013/main/command">
   <pc:docChgLst>
-    <pc:chgData name="Karthika Vellingiri" userId="2f791443-b2b6-40db-8581-89f0c0794d11" providerId="ADAL" clId="{272279B0-242C-4D01-9A5D-29699CA56103}"/>
-    <pc:docChg chg="undo redo custSel addSld delSld modSld modMainMaster">
-      <pc:chgData name="Karthika Vellingiri" userId="2f791443-b2b6-40db-8581-89f0c0794d11" providerId="ADAL" clId="{272279B0-242C-4D01-9A5D-29699CA56103}" dt="2025-08-10T15:25:20.532" v="660" actId="6549"/>
+    <pc:chgData name="Karthika Vellingiri" userId="2f791443-b2b6-40db-8581-89f0c0794d11" providerId="ADAL" clId="{55E25AE7-AA8E-4538-B779-72A04E739CB9}"/>
+    <pc:docChg chg="modSld">
+      <pc:chgData name="Karthika Vellingiri" userId="2f791443-b2b6-40db-8581-89f0c0794d11" providerId="ADAL" clId="{55E25AE7-AA8E-4538-B779-72A04E739CB9}" dt="2026-03-07T03:44:27.061" v="0" actId="6549"/>
       <pc:docMkLst>
         <pc:docMk/>
       </pc:docMkLst>
-      <pc:sldChg chg="addSp delSp modSp mod setBg addAnim delAnim modAnim delDesignElem">
-        <pc:chgData name="Karthika Vellingiri" userId="2f791443-b2b6-40db-8581-89f0c0794d11" providerId="ADAL" clId="{272279B0-242C-4D01-9A5D-29699CA56103}" dt="2025-08-10T14:52:03.775" v="348" actId="26606"/>
+      <pc:sldChg chg="modSp mod">
+        <pc:chgData name="Karthika Vellingiri" userId="2f791443-b2b6-40db-8581-89f0c0794d11" providerId="ADAL" clId="{55E25AE7-AA8E-4538-B779-72A04E739CB9}" dt="2026-03-07T03:44:27.061" v="0" actId="6549"/>
         <pc:sldMkLst>
           <pc:docMk/>
           <pc:sldMk cId="1466995318" sldId="256"/>
         </pc:sldMkLst>
         <pc:spChg chg="mod">
-          <ac:chgData name="Karthika Vellingiri" userId="2f791443-b2b6-40db-8581-89f0c0794d11" providerId="ADAL" clId="{272279B0-242C-4D01-9A5D-29699CA56103}" dt="2025-08-10T14:52:03.775" v="348" actId="26606"/>
-          <ac:spMkLst>
-            <pc:docMk/>
-            <pc:sldMk cId="1466995318" sldId="256"/>
-            <ac:spMk id="7" creationId="{B40B2299-7549-3C0A-A88F-006CC54C7445}"/>
-          </ac:spMkLst>
-        </pc:spChg>
-        <pc:spChg chg="mod">
-          <ac:chgData name="Karthika Vellingiri" userId="2f791443-b2b6-40db-8581-89f0c0794d11" providerId="ADAL" clId="{272279B0-242C-4D01-9A5D-29699CA56103}" dt="2025-08-10T14:52:03.775" v="348" actId="26606"/>
+          <ac:chgData name="Karthika Vellingiri" userId="2f791443-b2b6-40db-8581-89f0c0794d11" providerId="ADAL" clId="{55E25AE7-AA8E-4538-B779-72A04E739CB9}" dt="2026-03-07T03:44:27.061" v="0" actId="6549"/>
           <ac:spMkLst>
             <pc:docMk/>
             <pc:sldMk cId="1466995318" sldId="256"/>
             <ac:spMk id="8" creationId="{D7C1E1C7-6B0F-81DA-396C-FE32341723D6}"/>
           </ac:spMkLst>
         </pc:spChg>
-        <pc:spChg chg="add del">
-          <ac:chgData name="Karthika Vellingiri" userId="2f791443-b2b6-40db-8581-89f0c0794d11" providerId="ADAL" clId="{272279B0-242C-4D01-9A5D-29699CA56103}" dt="2025-08-10T14:20:35.624" v="131" actId="26606"/>
-          <ac:spMkLst>
-            <pc:docMk/>
-            <pc:sldMk cId="1466995318" sldId="256"/>
-            <ac:spMk id="12" creationId="{6D356F1A-690D-401E-8CF3-E4686CDFEC30}"/>
-          </ac:spMkLst>
-        </pc:spChg>
-        <pc:spChg chg="add del">
-          <ac:chgData name="Karthika Vellingiri" userId="2f791443-b2b6-40db-8581-89f0c0794d11" providerId="ADAL" clId="{272279B0-242C-4D01-9A5D-29699CA56103}" dt="2025-08-10T14:20:19.147" v="123" actId="26606"/>
-          <ac:spMkLst>
-            <pc:docMk/>
-            <pc:sldMk cId="1466995318" sldId="256"/>
-            <ac:spMk id="15" creationId="{6D356F1A-690D-401E-8CF3-E4686CDFEC30}"/>
-          </ac:spMkLst>
-        </pc:spChg>
-        <pc:spChg chg="add del">
-          <ac:chgData name="Karthika Vellingiri" userId="2f791443-b2b6-40db-8581-89f0c0794d11" providerId="ADAL" clId="{272279B0-242C-4D01-9A5D-29699CA56103}" dt="2025-08-10T14:20:35.624" v="131" actId="26606"/>
-          <ac:spMkLst>
-            <pc:docMk/>
-            <pc:sldMk cId="1466995318" sldId="256"/>
-            <ac:spMk id="16" creationId="{8841A10E-0F0E-4596-8888-870D709254A7}"/>
-          </ac:spMkLst>
-        </pc:spChg>
-        <pc:spChg chg="add del">
-          <ac:chgData name="Karthika Vellingiri" userId="2f791443-b2b6-40db-8581-89f0c0794d11" providerId="ADAL" clId="{272279B0-242C-4D01-9A5D-29699CA56103}" dt="2025-08-10T14:52:03.771" v="347" actId="26606"/>
-          <ac:spMkLst>
-            <pc:docMk/>
-            <pc:sldMk cId="1466995318" sldId="256"/>
-            <ac:spMk id="18" creationId="{A9286AD2-18A9-4868-A4E3-7A2097A20810}"/>
-          </ac:spMkLst>
-        </pc:spChg>
-        <pc:spChg chg="add">
-          <ac:chgData name="Karthika Vellingiri" userId="2f791443-b2b6-40db-8581-89f0c0794d11" providerId="ADAL" clId="{272279B0-242C-4D01-9A5D-29699CA56103}" dt="2025-08-10T14:52:03.775" v="348" actId="26606"/>
-          <ac:spMkLst>
-            <pc:docMk/>
-            <pc:sldMk cId="1466995318" sldId="256"/>
-            <ac:spMk id="21" creationId="{F452A527-3631-41ED-858D-3777A7D1496A}"/>
-          </ac:spMkLst>
-        </pc:spChg>
-        <pc:spChg chg="add del">
-          <ac:chgData name="Karthika Vellingiri" userId="2f791443-b2b6-40db-8581-89f0c0794d11" providerId="ADAL" clId="{272279B0-242C-4D01-9A5D-29699CA56103}" dt="2025-08-10T14:20:35.624" v="131" actId="26606"/>
-          <ac:spMkLst>
-            <pc:docMk/>
-            <pc:sldMk cId="1466995318" sldId="256"/>
-            <ac:spMk id="30" creationId="{29B1E55C-E51F-4093-A2A8-137C3E9014D7}"/>
-          </ac:spMkLst>
-        </pc:spChg>
-        <pc:spChg chg="add del">
-          <ac:chgData name="Karthika Vellingiri" userId="2f791443-b2b6-40db-8581-89f0c0794d11" providerId="ADAL" clId="{272279B0-242C-4D01-9A5D-29699CA56103}" dt="2025-08-10T14:21:14.843" v="146"/>
-          <ac:spMkLst>
-            <pc:docMk/>
-            <pc:sldMk cId="1466995318" sldId="256"/>
-            <ac:spMk id="44" creationId="{6D356F1A-690D-401E-8CF3-E4686CDFEC30}"/>
-          </ac:spMkLst>
-        </pc:spChg>
-        <pc:spChg chg="add del">
-          <ac:chgData name="Karthika Vellingiri" userId="2f791443-b2b6-40db-8581-89f0c0794d11" providerId="ADAL" clId="{272279B0-242C-4D01-9A5D-29699CA56103}" dt="2025-08-10T14:20:19.147" v="123" actId="26606"/>
-          <ac:spMkLst>
-            <pc:docMk/>
-            <pc:sldMk cId="1466995318" sldId="256"/>
-            <ac:spMk id="45" creationId="{8841A10E-0F0E-4596-8888-870D709254A7}"/>
-          </ac:spMkLst>
-        </pc:spChg>
-        <pc:spChg chg="add del">
-          <ac:chgData name="Karthika Vellingiri" userId="2f791443-b2b6-40db-8581-89f0c0794d11" providerId="ADAL" clId="{272279B0-242C-4D01-9A5D-29699CA56103}" dt="2025-08-10T14:20:41.713" v="133" actId="26606"/>
-          <ac:spMkLst>
-            <pc:docMk/>
-            <pc:sldMk cId="1466995318" sldId="256"/>
-            <ac:spMk id="46" creationId="{1FF9CEF5-A50D-4B8B-9852-D76F7037867E}"/>
-          </ac:spMkLst>
-        </pc:spChg>
-        <pc:spChg chg="add del">
-          <ac:chgData name="Karthika Vellingiri" userId="2f791443-b2b6-40db-8581-89f0c0794d11" providerId="ADAL" clId="{272279B0-242C-4D01-9A5D-29699CA56103}" dt="2025-08-10T14:20:19.147" v="123" actId="26606"/>
-          <ac:spMkLst>
-            <pc:docMk/>
-            <pc:sldMk cId="1466995318" sldId="256"/>
-            <ac:spMk id="47" creationId="{29B1E55C-E51F-4093-A2A8-137C3E9014D7}"/>
-          </ac:spMkLst>
-        </pc:spChg>
-        <pc:spChg chg="add del">
-          <ac:chgData name="Karthika Vellingiri" userId="2f791443-b2b6-40db-8581-89f0c0794d11" providerId="ADAL" clId="{272279B0-242C-4D01-9A5D-29699CA56103}" dt="2025-08-10T14:21:14.843" v="146"/>
-          <ac:spMkLst>
-            <pc:docMk/>
-            <pc:sldMk cId="1466995318" sldId="256"/>
-            <ac:spMk id="51" creationId="{8841A10E-0F0E-4596-8888-870D709254A7}"/>
-          </ac:spMkLst>
-        </pc:spChg>
-        <pc:spChg chg="add del">
-          <ac:chgData name="Karthika Vellingiri" userId="2f791443-b2b6-40db-8581-89f0c0794d11" providerId="ADAL" clId="{272279B0-242C-4D01-9A5D-29699CA56103}" dt="2025-08-10T14:21:14.843" v="146"/>
-          <ac:spMkLst>
-            <pc:docMk/>
-            <pc:sldMk cId="1466995318" sldId="256"/>
-            <ac:spMk id="52" creationId="{29B1E55C-E51F-4093-A2A8-137C3E9014D7}"/>
-          </ac:spMkLst>
-        </pc:spChg>
-        <pc:spChg chg="add del">
-          <ac:chgData name="Karthika Vellingiri" userId="2f791443-b2b6-40db-8581-89f0c0794d11" providerId="ADAL" clId="{272279B0-242C-4D01-9A5D-29699CA56103}" dt="2025-08-10T14:19:22.757" v="110"/>
-          <ac:spMkLst>
-            <pc:docMk/>
-            <pc:sldMk cId="1466995318" sldId="256"/>
-            <ac:spMk id="59" creationId="{CD46EC51-3B76-46E4-BE89-8C8E596DBFA4}"/>
-          </ac:spMkLst>
-        </pc:spChg>
-        <pc:spChg chg="add del">
-          <ac:chgData name="Karthika Vellingiri" userId="2f791443-b2b6-40db-8581-89f0c0794d11" providerId="ADAL" clId="{272279B0-242C-4D01-9A5D-29699CA56103}" dt="2025-08-10T14:19:22.757" v="110"/>
-          <ac:spMkLst>
-            <pc:docMk/>
-            <pc:sldMk cId="1466995318" sldId="256"/>
-            <ac:spMk id="60" creationId="{875485B9-8EE1-447A-9C08-F7D6B532A8CF}"/>
-          </ac:spMkLst>
-        </pc:spChg>
-        <pc:spChg chg="add del">
-          <ac:chgData name="Karthika Vellingiri" userId="2f791443-b2b6-40db-8581-89f0c0794d11" providerId="ADAL" clId="{272279B0-242C-4D01-9A5D-29699CA56103}" dt="2025-08-10T14:19:22.757" v="110"/>
-          <ac:spMkLst>
-            <pc:docMk/>
-            <pc:sldMk cId="1466995318" sldId="256"/>
-            <ac:spMk id="61" creationId="{919AC6FC-179B-4A36-87D7-DCE1FC55DC63}"/>
-          </ac:spMkLst>
-        </pc:spChg>
-        <pc:spChg chg="add del">
-          <ac:chgData name="Karthika Vellingiri" userId="2f791443-b2b6-40db-8581-89f0c0794d11" providerId="ADAL" clId="{272279B0-242C-4D01-9A5D-29699CA56103}" dt="2025-08-10T14:19:22.757" v="110"/>
-          <ac:spMkLst>
-            <pc:docMk/>
-            <pc:sldMk cId="1466995318" sldId="256"/>
-            <ac:spMk id="62" creationId="{9A180D45-F46B-4484-A254-575E30AFF4FA}"/>
-          </ac:spMkLst>
-        </pc:spChg>
-        <pc:spChg chg="add del">
-          <ac:chgData name="Karthika Vellingiri" userId="2f791443-b2b6-40db-8581-89f0c0794d11" providerId="ADAL" clId="{272279B0-242C-4D01-9A5D-29699CA56103}" dt="2025-08-10T14:19:22.757" v="110"/>
-          <ac:spMkLst>
-            <pc:docMk/>
-            <pc:sldMk cId="1466995318" sldId="256"/>
-            <ac:spMk id="63" creationId="{B963707F-B98C-4143-AFCF-D6B56C975C5A}"/>
-          </ac:spMkLst>
-        </pc:spChg>
-        <pc:spChg chg="add del">
-          <ac:chgData name="Karthika Vellingiri" userId="2f791443-b2b6-40db-8581-89f0c0794d11" providerId="ADAL" clId="{272279B0-242C-4D01-9A5D-29699CA56103}" dt="2025-08-10T14:20:41.713" v="133" actId="26606"/>
-          <ac:spMkLst>
-            <pc:docMk/>
-            <pc:sldMk cId="1466995318" sldId="256"/>
-            <ac:spMk id="66" creationId="{30684D86-C9D1-40C3-A9B6-EC935C7312E3}"/>
-          </ac:spMkLst>
-        </pc:spChg>
-        <pc:spChg chg="add del">
-          <ac:chgData name="Karthika Vellingiri" userId="2f791443-b2b6-40db-8581-89f0c0794d11" providerId="ADAL" clId="{272279B0-242C-4D01-9A5D-29699CA56103}" dt="2025-08-10T14:20:41.713" v="133" actId="26606"/>
-          <ac:spMkLst>
-            <pc:docMk/>
-            <pc:sldMk cId="1466995318" sldId="256"/>
-            <ac:spMk id="67" creationId="{1EDF7896-F56A-49DA-90F3-F5CE8B9833AD}"/>
-          </ac:spMkLst>
-        </pc:spChg>
-        <pc:grpChg chg="add del">
-          <ac:chgData name="Karthika Vellingiri" userId="2f791443-b2b6-40db-8581-89f0c0794d11" providerId="ADAL" clId="{272279B0-242C-4D01-9A5D-29699CA56103}" dt="2025-08-10T14:20:35.624" v="131" actId="26606"/>
-          <ac:grpSpMkLst>
-            <pc:docMk/>
-            <pc:sldMk cId="1466995318" sldId="256"/>
-            <ac:grpSpMk id="13" creationId="{F398A7BA-9279-4363-9D59-238782AB6BB5}"/>
-          </ac:grpSpMkLst>
-        </pc:grpChg>
-        <pc:grpChg chg="add del">
-          <ac:chgData name="Karthika Vellingiri" userId="2f791443-b2b6-40db-8581-89f0c0794d11" providerId="ADAL" clId="{272279B0-242C-4D01-9A5D-29699CA56103}" dt="2025-08-10T14:20:35.624" v="131" actId="26606"/>
-          <ac:grpSpMkLst>
-            <pc:docMk/>
-            <pc:sldMk cId="1466995318" sldId="256"/>
-            <ac:grpSpMk id="14" creationId="{3B88DAD3-AF6F-4D6C-8512-7239A69A40DD}"/>
-          </ac:grpSpMkLst>
-        </pc:grpChg>
-        <pc:grpChg chg="add del">
-          <ac:chgData name="Karthika Vellingiri" userId="2f791443-b2b6-40db-8581-89f0c0794d11" providerId="ADAL" clId="{272279B0-242C-4D01-9A5D-29699CA56103}" dt="2025-08-10T14:20:19.147" v="123" actId="26606"/>
-          <ac:grpSpMkLst>
-            <pc:docMk/>
-            <pc:sldMk cId="1466995318" sldId="256"/>
-            <ac:grpSpMk id="17" creationId="{F398A7BA-9279-4363-9D59-238782AB6BB5}"/>
-          </ac:grpSpMkLst>
-        </pc:grpChg>
-        <pc:grpChg chg="add del">
-          <ac:chgData name="Karthika Vellingiri" userId="2f791443-b2b6-40db-8581-89f0c0794d11" providerId="ADAL" clId="{272279B0-242C-4D01-9A5D-29699CA56103}" dt="2025-08-10T14:20:19.147" v="123" actId="26606"/>
-          <ac:grpSpMkLst>
-            <pc:docMk/>
-            <pc:sldMk cId="1466995318" sldId="256"/>
-            <ac:grpSpMk id="31" creationId="{3B88DAD3-AF6F-4D6C-8512-7239A69A40DD}"/>
-          </ac:grpSpMkLst>
-        </pc:grpChg>
-        <pc:grpChg chg="add del">
-          <ac:chgData name="Karthika Vellingiri" userId="2f791443-b2b6-40db-8581-89f0c0794d11" providerId="ADAL" clId="{272279B0-242C-4D01-9A5D-29699CA56103}" dt="2025-08-10T14:20:41.713" v="133" actId="26606"/>
-          <ac:grpSpMkLst>
-            <pc:docMk/>
-            <pc:sldMk cId="1466995318" sldId="256"/>
-            <ac:grpSpMk id="48" creationId="{065753F1-EEE2-45ED-88A1-ECB4A495D0AD}"/>
-          </ac:grpSpMkLst>
-        </pc:grpChg>
-        <pc:grpChg chg="add del">
-          <ac:chgData name="Karthika Vellingiri" userId="2f791443-b2b6-40db-8581-89f0c0794d11" providerId="ADAL" clId="{272279B0-242C-4D01-9A5D-29699CA56103}" dt="2025-08-10T14:21:14.843" v="146"/>
-          <ac:grpSpMkLst>
-            <pc:docMk/>
-            <pc:sldMk cId="1466995318" sldId="256"/>
-            <ac:grpSpMk id="49" creationId="{F398A7BA-9279-4363-9D59-238782AB6BB5}"/>
-          </ac:grpSpMkLst>
-        </pc:grpChg>
-        <pc:grpChg chg="add del">
-          <ac:chgData name="Karthika Vellingiri" userId="2f791443-b2b6-40db-8581-89f0c0794d11" providerId="ADAL" clId="{272279B0-242C-4D01-9A5D-29699CA56103}" dt="2025-08-10T14:21:14.843" v="146"/>
-          <ac:grpSpMkLst>
-            <pc:docMk/>
-            <pc:sldMk cId="1466995318" sldId="256"/>
-            <ac:grpSpMk id="50" creationId="{3B88DAD3-AF6F-4D6C-8512-7239A69A40DD}"/>
-          </ac:grpSpMkLst>
-        </pc:grpChg>
-        <pc:picChg chg="mod ord">
-          <ac:chgData name="Karthika Vellingiri" userId="2f791443-b2b6-40db-8581-89f0c0794d11" providerId="ADAL" clId="{272279B0-242C-4D01-9A5D-29699CA56103}" dt="2025-08-10T14:52:03.775" v="348" actId="26606"/>
-          <ac:picMkLst>
-            <pc:docMk/>
-            <pc:sldMk cId="1466995318" sldId="256"/>
-            <ac:picMk id="10" creationId="{BB309A9B-16B6-B575-6D38-BA97558DE936}"/>
-          </ac:picMkLst>
-        </pc:picChg>
-        <pc:cxnChg chg="add del">
-          <ac:chgData name="Karthika Vellingiri" userId="2f791443-b2b6-40db-8581-89f0c0794d11" providerId="ADAL" clId="{272279B0-242C-4D01-9A5D-29699CA56103}" dt="2025-08-10T14:52:03.771" v="347" actId="26606"/>
-          <ac:cxnSpMkLst>
-            <pc:docMk/>
-            <pc:sldMk cId="1466995318" sldId="256"/>
-            <ac:cxnSpMk id="19" creationId="{E7A7CD63-7EC3-44F3-95D0-595C4019FF24}"/>
-          </ac:cxnSpMkLst>
-        </pc:cxnChg>
-        <pc:cxnChg chg="add">
-          <ac:chgData name="Karthika Vellingiri" userId="2f791443-b2b6-40db-8581-89f0c0794d11" providerId="ADAL" clId="{272279B0-242C-4D01-9A5D-29699CA56103}" dt="2025-08-10T14:52:03.775" v="348" actId="26606"/>
-          <ac:cxnSpMkLst>
-            <pc:docMk/>
-            <pc:sldMk cId="1466995318" sldId="256"/>
-            <ac:cxnSpMk id="22" creationId="{D28A9C89-B313-458F-9C85-515930A51A93}"/>
-          </ac:cxnSpMkLst>
-        </pc:cxnChg>
       </pc:sldChg>
-      <pc:sldChg chg="del">
-        <pc:chgData name="Karthika Vellingiri" userId="2f791443-b2b6-40db-8581-89f0c0794d11" providerId="ADAL" clId="{272279B0-242C-4D01-9A5D-29699CA56103}" dt="2025-08-10T13:59:49.213" v="0" actId="47"/>
-        <pc:sldMkLst>
-          <pc:docMk/>
-          <pc:sldMk cId="1411014157" sldId="257"/>
-        </pc:sldMkLst>
-      </pc:sldChg>
-      <pc:sldChg chg="del">
-        <pc:chgData name="Karthika Vellingiri" userId="2f791443-b2b6-40db-8581-89f0c0794d11" providerId="ADAL" clId="{272279B0-242C-4D01-9A5D-29699CA56103}" dt="2025-08-10T13:59:50.797" v="2" actId="47"/>
-        <pc:sldMkLst>
-          <pc:docMk/>
-          <pc:sldMk cId="242291883" sldId="259"/>
-        </pc:sldMkLst>
-      </pc:sldChg>
-      <pc:sldChg chg="addSp delSp modSp add del delDesignElem">
-        <pc:chgData name="Karthika Vellingiri" userId="2f791443-b2b6-40db-8581-89f0c0794d11" providerId="ADAL" clId="{272279B0-242C-4D01-9A5D-29699CA56103}" dt="2025-08-10T14:51:48.791" v="343"/>
-        <pc:sldMkLst>
-          <pc:docMk/>
-          <pc:sldMk cId="1055927350" sldId="260"/>
-        </pc:sldMkLst>
-        <pc:spChg chg="mod">
-          <ac:chgData name="Karthika Vellingiri" userId="2f791443-b2b6-40db-8581-89f0c0794d11" providerId="ADAL" clId="{272279B0-242C-4D01-9A5D-29699CA56103}" dt="2025-08-10T14:51:48.791" v="343"/>
-          <ac:spMkLst>
-            <pc:docMk/>
-            <pc:sldMk cId="1055927350" sldId="260"/>
-            <ac:spMk id="5" creationId="{33FF3D1B-726A-A88F-A4FC-95B95ECE1EAB}"/>
-          </ac:spMkLst>
-        </pc:spChg>
-        <pc:spChg chg="add del">
-          <ac:chgData name="Karthika Vellingiri" userId="2f791443-b2b6-40db-8581-89f0c0794d11" providerId="ADAL" clId="{272279B0-242C-4D01-9A5D-29699CA56103}" dt="2025-08-10T14:19:22.757" v="110"/>
-          <ac:spMkLst>
-            <pc:docMk/>
-            <pc:sldMk cId="1055927350" sldId="260"/>
-            <ac:spMk id="12" creationId="{BFABBCE0-E08C-4BBE-9FD2-E2B253D4D5F2}"/>
-          </ac:spMkLst>
-        </pc:spChg>
-        <pc:spChg chg="add del">
-          <ac:chgData name="Karthika Vellingiri" userId="2f791443-b2b6-40db-8581-89f0c0794d11" providerId="ADAL" clId="{272279B0-242C-4D01-9A5D-29699CA56103}" dt="2025-08-10T14:19:22.757" v="110"/>
-          <ac:spMkLst>
-            <pc:docMk/>
-            <pc:sldMk cId="1055927350" sldId="260"/>
-            <ac:spMk id="14" creationId="{FF426BAC-43D6-468E-B6FF-167034D5CE43}"/>
-          </ac:spMkLst>
-        </pc:spChg>
-        <pc:spChg chg="add del">
-          <ac:chgData name="Karthika Vellingiri" userId="2f791443-b2b6-40db-8581-89f0c0794d11" providerId="ADAL" clId="{272279B0-242C-4D01-9A5D-29699CA56103}" dt="2025-08-10T14:19:22.757" v="110"/>
-          <ac:spMkLst>
-            <pc:docMk/>
-            <pc:sldMk cId="1055927350" sldId="260"/>
-            <ac:spMk id="16" creationId="{FB02D80E-5995-4C54-8387-5893C2C89473}"/>
-          </ac:spMkLst>
-        </pc:spChg>
-        <pc:spChg chg="add del">
-          <ac:chgData name="Karthika Vellingiri" userId="2f791443-b2b6-40db-8581-89f0c0794d11" providerId="ADAL" clId="{272279B0-242C-4D01-9A5D-29699CA56103}" dt="2025-08-10T14:19:22.757" v="110"/>
-          <ac:spMkLst>
-            <pc:docMk/>
-            <pc:sldMk cId="1055927350" sldId="260"/>
-            <ac:spMk id="18" creationId="{896083C8-1401-4950-AF56-E2FAFE42D656}"/>
-          </ac:spMkLst>
-        </pc:spChg>
-      </pc:sldChg>
-      <pc:sldChg chg="addSp delSp modSp mod setBg setClrOvrMap delDesignElem modNotesTx">
-        <pc:chgData name="Karthika Vellingiri" userId="2f791443-b2b6-40db-8581-89f0c0794d11" providerId="ADAL" clId="{272279B0-242C-4D01-9A5D-29699CA56103}" dt="2025-08-10T15:24:46.864" v="636" actId="20577"/>
-        <pc:sldMkLst>
-          <pc:docMk/>
-          <pc:sldMk cId="99664021" sldId="261"/>
-        </pc:sldMkLst>
-        <pc:spChg chg="add">
-          <ac:chgData name="Karthika Vellingiri" userId="2f791443-b2b6-40db-8581-89f0c0794d11" providerId="ADAL" clId="{272279B0-242C-4D01-9A5D-29699CA56103}" dt="2025-08-10T14:17:59.009" v="74"/>
-          <ac:spMkLst>
-            <pc:docMk/>
-            <pc:sldMk cId="99664021" sldId="261"/>
-            <ac:spMk id="2" creationId="{F445E638-403A-1B25-0774-53C93D362260}"/>
-          </ac:spMkLst>
-        </pc:spChg>
-        <pc:spChg chg="add del mod ord">
-          <ac:chgData name="Karthika Vellingiri" userId="2f791443-b2b6-40db-8581-89f0c0794d11" providerId="ADAL" clId="{272279B0-242C-4D01-9A5D-29699CA56103}" dt="2025-08-10T15:17:48.757" v="469" actId="478"/>
-          <ac:spMkLst>
-            <pc:docMk/>
-            <pc:sldMk cId="99664021" sldId="261"/>
-            <ac:spMk id="3" creationId="{0532819D-010F-27F3-A570-5B1F330E9E6B}"/>
-          </ac:spMkLst>
-        </pc:spChg>
-        <pc:spChg chg="add">
-          <ac:chgData name="Karthika Vellingiri" userId="2f791443-b2b6-40db-8581-89f0c0794d11" providerId="ADAL" clId="{272279B0-242C-4D01-9A5D-29699CA56103}" dt="2025-08-10T15:17:34.065" v="464"/>
-          <ac:spMkLst>
-            <pc:docMk/>
-            <pc:sldMk cId="99664021" sldId="261"/>
-            <ac:spMk id="4" creationId="{60B7A3AB-637F-DE55-5E62-9BDC341D5D45}"/>
-          </ac:spMkLst>
-        </pc:spChg>
-        <pc:spChg chg="mod ord">
-          <ac:chgData name="Karthika Vellingiri" userId="2f791443-b2b6-40db-8581-89f0c0794d11" providerId="ADAL" clId="{272279B0-242C-4D01-9A5D-29699CA56103}" dt="2025-08-10T15:19:20.442" v="505" actId="26606"/>
-          <ac:spMkLst>
-            <pc:docMk/>
-            <pc:sldMk cId="99664021" sldId="261"/>
-            <ac:spMk id="5" creationId="{681960BE-0913-F7A0-6CBC-5F5C9821BE6B}"/>
-          </ac:spMkLst>
-        </pc:spChg>
-        <pc:spChg chg="add">
-          <ac:chgData name="Karthika Vellingiri" userId="2f791443-b2b6-40db-8581-89f0c0794d11" providerId="ADAL" clId="{272279B0-242C-4D01-9A5D-29699CA56103}" dt="2025-08-10T15:17:34.065" v="464"/>
-          <ac:spMkLst>
-            <pc:docMk/>
-            <pc:sldMk cId="99664021" sldId="261"/>
-            <ac:spMk id="6" creationId="{D832B686-778F-A45E-A1B6-CEF2ADC66611}"/>
-          </ac:spMkLst>
-        </pc:spChg>
-        <pc:spChg chg="del mod">
-          <ac:chgData name="Karthika Vellingiri" userId="2f791443-b2b6-40db-8581-89f0c0794d11" providerId="ADAL" clId="{272279B0-242C-4D01-9A5D-29699CA56103}" dt="2025-08-10T14:18:12.872" v="76"/>
-          <ac:spMkLst>
-            <pc:docMk/>
-            <pc:sldMk cId="99664021" sldId="261"/>
-            <ac:spMk id="7" creationId="{BB8596C5-2DB0-0CBE-B08B-DCB8BF4293FC}"/>
-          </ac:spMkLst>
-        </pc:spChg>
-        <pc:spChg chg="add">
-          <ac:chgData name="Karthika Vellingiri" userId="2f791443-b2b6-40db-8581-89f0c0794d11" providerId="ADAL" clId="{272279B0-242C-4D01-9A5D-29699CA56103}" dt="2025-08-10T15:17:34.065" v="464"/>
-          <ac:spMkLst>
-            <pc:docMk/>
-            <pc:sldMk cId="99664021" sldId="261"/>
-            <ac:spMk id="8" creationId="{B4164E8E-2569-3D6D-FEC0-7C7174DAE6BA}"/>
-          </ac:spMkLst>
-        </pc:spChg>
-        <pc:spChg chg="add">
-          <ac:chgData name="Karthika Vellingiri" userId="2f791443-b2b6-40db-8581-89f0c0794d11" providerId="ADAL" clId="{272279B0-242C-4D01-9A5D-29699CA56103}" dt="2025-08-10T15:17:36.526" v="466"/>
-          <ac:spMkLst>
-            <pc:docMk/>
-            <pc:sldMk cId="99664021" sldId="261"/>
-            <ac:spMk id="9" creationId="{90478B09-FF9D-6324-0F4A-E3A6A97B4848}"/>
-          </ac:spMkLst>
-        </pc:spChg>
-        <pc:spChg chg="add">
-          <ac:chgData name="Karthika Vellingiri" userId="2f791443-b2b6-40db-8581-89f0c0794d11" providerId="ADAL" clId="{272279B0-242C-4D01-9A5D-29699CA56103}" dt="2025-08-10T15:17:36.526" v="466"/>
-          <ac:spMkLst>
-            <pc:docMk/>
-            <pc:sldMk cId="99664021" sldId="261"/>
-            <ac:spMk id="11" creationId="{1BAECD4B-BBB6-F7E5-C1D8-B200A2A21729}"/>
-          </ac:spMkLst>
-        </pc:spChg>
-        <pc:spChg chg="add del">
-          <ac:chgData name="Karthika Vellingiri" userId="2f791443-b2b6-40db-8581-89f0c0794d11" providerId="ADAL" clId="{272279B0-242C-4D01-9A5D-29699CA56103}" dt="2025-08-10T14:19:22.757" v="110"/>
-          <ac:spMkLst>
-            <pc:docMk/>
-            <pc:sldMk cId="99664021" sldId="261"/>
-            <ac:spMk id="12" creationId="{504BED40-EAF7-4E55-AFF7-2CD840EBD3AA}"/>
-          </ac:spMkLst>
-        </pc:spChg>
-        <pc:spChg chg="add del">
-          <ac:chgData name="Karthika Vellingiri" userId="2f791443-b2b6-40db-8581-89f0c0794d11" providerId="ADAL" clId="{272279B0-242C-4D01-9A5D-29699CA56103}" dt="2025-08-10T14:19:22.757" v="110"/>
-          <ac:spMkLst>
-            <pc:docMk/>
-            <pc:sldMk cId="99664021" sldId="261"/>
-            <ac:spMk id="13" creationId="{F367CCF1-BB1E-41CF-8499-94A870C33EFA}"/>
-          </ac:spMkLst>
-        </pc:spChg>
-        <pc:spChg chg="add del">
-          <ac:chgData name="Karthika Vellingiri" userId="2f791443-b2b6-40db-8581-89f0c0794d11" providerId="ADAL" clId="{272279B0-242C-4D01-9A5D-29699CA56103}" dt="2025-08-10T14:19:35.224" v="114"/>
-          <ac:spMkLst>
-            <pc:docMk/>
-            <pc:sldMk cId="99664021" sldId="261"/>
-            <ac:spMk id="14" creationId="{38ABDB68-E3D5-448E-97D3-06FFEF680193}"/>
-          </ac:spMkLst>
-        </pc:spChg>
-        <pc:spChg chg="add del">
-          <ac:chgData name="Karthika Vellingiri" userId="2f791443-b2b6-40db-8581-89f0c0794d11" providerId="ADAL" clId="{272279B0-242C-4D01-9A5D-29699CA56103}" dt="2025-08-10T14:19:00.480" v="99" actId="26606"/>
-          <ac:spMkLst>
-            <pc:docMk/>
-            <pc:sldMk cId="99664021" sldId="261"/>
-            <ac:spMk id="15" creationId="{FBB53F82-F191-4EEB-AB7B-F69E634FA3E8}"/>
-          </ac:spMkLst>
-        </pc:spChg>
-        <pc:spChg chg="add del">
-          <ac:chgData name="Karthika Vellingiri" userId="2f791443-b2b6-40db-8581-89f0c0794d11" providerId="ADAL" clId="{272279B0-242C-4D01-9A5D-29699CA56103}" dt="2025-08-10T14:19:35.224" v="114"/>
-          <ac:spMkLst>
-            <pc:docMk/>
-            <pc:sldMk cId="99664021" sldId="261"/>
-            <ac:spMk id="16" creationId="{B8DD7FEB-D9F3-4F5B-982C-36B0664D0205}"/>
-          </ac:spMkLst>
-        </pc:spChg>
-        <pc:spChg chg="add del">
-          <ac:chgData name="Karthika Vellingiri" userId="2f791443-b2b6-40db-8581-89f0c0794d11" providerId="ADAL" clId="{272279B0-242C-4D01-9A5D-29699CA56103}" dt="2025-08-10T14:19:00.480" v="99" actId="26606"/>
-          <ac:spMkLst>
-            <pc:docMk/>
-            <pc:sldMk cId="99664021" sldId="261"/>
-            <ac:spMk id="17" creationId="{8616AA08-3831-473D-B61B-89484A33CF65}"/>
-          </ac:spMkLst>
-        </pc:spChg>
-        <pc:spChg chg="add del">
-          <ac:chgData name="Karthika Vellingiri" userId="2f791443-b2b6-40db-8581-89f0c0794d11" providerId="ADAL" clId="{272279B0-242C-4D01-9A5D-29699CA56103}" dt="2025-08-10T14:19:35.224" v="114"/>
-          <ac:spMkLst>
-            <pc:docMk/>
-            <pc:sldMk cId="99664021" sldId="261"/>
-            <ac:spMk id="18" creationId="{96BA11E4-0636-4FA9-A836-2A4FB176449A}"/>
-          </ac:spMkLst>
-        </pc:spChg>
-        <pc:spChg chg="add del">
-          <ac:chgData name="Karthika Vellingiri" userId="2f791443-b2b6-40db-8581-89f0c0794d11" providerId="ADAL" clId="{272279B0-242C-4D01-9A5D-29699CA56103}" dt="2025-08-10T14:19:00.480" v="99" actId="26606"/>
-          <ac:spMkLst>
-            <pc:docMk/>
-            <pc:sldMk cId="99664021" sldId="261"/>
-            <ac:spMk id="19" creationId="{8431B918-3A1C-46BA-9430-CAD97D9DA0FC}"/>
-          </ac:spMkLst>
-        </pc:spChg>
-        <pc:spChg chg="add del">
-          <ac:chgData name="Karthika Vellingiri" userId="2f791443-b2b6-40db-8581-89f0c0794d11" providerId="ADAL" clId="{272279B0-242C-4D01-9A5D-29699CA56103}" dt="2025-08-10T14:19:35.224" v="114"/>
-          <ac:spMkLst>
-            <pc:docMk/>
-            <pc:sldMk cId="99664021" sldId="261"/>
-            <ac:spMk id="20" creationId="{5681882E-BDD0-4311-AF62-E8019628524D}"/>
-          </ac:spMkLst>
-        </pc:spChg>
-        <pc:spChg chg="add del">
-          <ac:chgData name="Karthika Vellingiri" userId="2f791443-b2b6-40db-8581-89f0c0794d11" providerId="ADAL" clId="{272279B0-242C-4D01-9A5D-29699CA56103}" dt="2025-08-10T14:19:00.480" v="99" actId="26606"/>
-          <ac:spMkLst>
-            <pc:docMk/>
-            <pc:sldMk cId="99664021" sldId="261"/>
-            <ac:spMk id="21" creationId="{8400935A-2F82-4DC4-A4E1-E12EFB8C2738}"/>
-          </ac:spMkLst>
-        </pc:spChg>
-        <pc:spChg chg="add del">
-          <ac:chgData name="Karthika Vellingiri" userId="2f791443-b2b6-40db-8581-89f0c0794d11" providerId="ADAL" clId="{272279B0-242C-4D01-9A5D-29699CA56103}" dt="2025-08-10T14:19:35.224" v="114"/>
-          <ac:spMkLst>
-            <pc:docMk/>
-            <pc:sldMk cId="99664021" sldId="261"/>
-            <ac:spMk id="22" creationId="{EADD3260-4BDA-459B-A162-5E1B897E38FC}"/>
-          </ac:spMkLst>
-        </pc:spChg>
-        <pc:spChg chg="add del">
-          <ac:chgData name="Karthika Vellingiri" userId="2f791443-b2b6-40db-8581-89f0c0794d11" providerId="ADAL" clId="{272279B0-242C-4D01-9A5D-29699CA56103}" dt="2025-08-10T14:19:00.480" v="99" actId="26606"/>
-          <ac:spMkLst>
-            <pc:docMk/>
-            <pc:sldMk cId="99664021" sldId="261"/>
-            <ac:spMk id="23" creationId="{A3D5D599-1CAE-4C92-B5AE-8E51AF6D47C9}"/>
-          </ac:spMkLst>
-        </pc:spChg>
-        <pc:spChg chg="add del">
-          <ac:chgData name="Karthika Vellingiri" userId="2f791443-b2b6-40db-8581-89f0c0794d11" providerId="ADAL" clId="{272279B0-242C-4D01-9A5D-29699CA56103}" dt="2025-08-10T14:19:35.224" v="114"/>
-          <ac:spMkLst>
-            <pc:docMk/>
-            <pc:sldMk cId="99664021" sldId="261"/>
-            <ac:spMk id="24" creationId="{283DA7DD-CA37-4ED7-8710-48E56B063BA4}"/>
-          </ac:spMkLst>
-        </pc:spChg>
-        <pc:spChg chg="add del">
-          <ac:chgData name="Karthika Vellingiri" userId="2f791443-b2b6-40db-8581-89f0c0794d11" providerId="ADAL" clId="{272279B0-242C-4D01-9A5D-29699CA56103}" dt="2025-08-10T14:19:05.517" v="101" actId="26606"/>
-          <ac:spMkLst>
-            <pc:docMk/>
-            <pc:sldMk cId="99664021" sldId="261"/>
-            <ac:spMk id="25" creationId="{7B055CAA-2668-4929-8202-DBD35A78E8EB}"/>
-          </ac:spMkLst>
-        </pc:spChg>
-        <pc:spChg chg="add del">
-          <ac:chgData name="Karthika Vellingiri" userId="2f791443-b2b6-40db-8581-89f0c0794d11" providerId="ADAL" clId="{272279B0-242C-4D01-9A5D-29699CA56103}" dt="2025-08-10T14:19:05.517" v="101" actId="26606"/>
-          <ac:spMkLst>
-            <pc:docMk/>
-            <pc:sldMk cId="99664021" sldId="261"/>
-            <ac:spMk id="26" creationId="{38F88ED4-721F-4A25-9A68-66C57B1F8D03}"/>
-          </ac:spMkLst>
-        </pc:spChg>
-        <pc:spChg chg="add del">
-          <ac:chgData name="Karthika Vellingiri" userId="2f791443-b2b6-40db-8581-89f0c0794d11" providerId="ADAL" clId="{272279B0-242C-4D01-9A5D-29699CA56103}" dt="2025-08-10T14:19:05.517" v="101" actId="26606"/>
-          <ac:spMkLst>
-            <pc:docMk/>
-            <pc:sldMk cId="99664021" sldId="261"/>
-            <ac:spMk id="27" creationId="{3A5A85F2-11BA-4322-9355-08C0DEC78035}"/>
-          </ac:spMkLst>
-        </pc:spChg>
-        <pc:spChg chg="add del">
-          <ac:chgData name="Karthika Vellingiri" userId="2f791443-b2b6-40db-8581-89f0c0794d11" providerId="ADAL" clId="{272279B0-242C-4D01-9A5D-29699CA56103}" dt="2025-08-10T14:19:05.517" v="101" actId="26606"/>
-          <ac:spMkLst>
-            <pc:docMk/>
-            <pc:sldMk cId="99664021" sldId="261"/>
-            <ac:spMk id="28" creationId="{1A88A0CA-0BDB-4A19-A648-638BE196B2BC}"/>
-          </ac:spMkLst>
-        </pc:spChg>
-        <pc:spChg chg="add del">
-          <ac:chgData name="Karthika Vellingiri" userId="2f791443-b2b6-40db-8581-89f0c0794d11" providerId="ADAL" clId="{272279B0-242C-4D01-9A5D-29699CA56103}" dt="2025-08-10T14:19:35.224" v="114"/>
-          <ac:spMkLst>
-            <pc:docMk/>
-            <pc:sldMk cId="99664021" sldId="261"/>
-            <ac:spMk id="29" creationId="{B92F2E3C-66CD-4DEB-BA14-2A5912B65A21}"/>
-          </ac:spMkLst>
-        </pc:spChg>
-        <pc:spChg chg="add del">
-          <ac:chgData name="Karthika Vellingiri" userId="2f791443-b2b6-40db-8581-89f0c0794d11" providerId="ADAL" clId="{272279B0-242C-4D01-9A5D-29699CA56103}" dt="2025-08-10T14:20:04.384" v="119"/>
-          <ac:spMkLst>
-            <pc:docMk/>
-            <pc:sldMk cId="99664021" sldId="261"/>
-            <ac:spMk id="30" creationId="{E491B121-12B5-4977-A064-636AB0B9B0BD}"/>
-          </ac:spMkLst>
-        </pc:spChg>
-        <pc:spChg chg="add del">
-          <ac:chgData name="Karthika Vellingiri" userId="2f791443-b2b6-40db-8581-89f0c0794d11" providerId="ADAL" clId="{272279B0-242C-4D01-9A5D-29699CA56103}" dt="2025-08-10T14:20:04.384" v="119"/>
-          <ac:spMkLst>
-            <pc:docMk/>
-            <pc:sldMk cId="99664021" sldId="261"/>
-            <ac:spMk id="31" creationId="{2ED05F70-AB3E-4472-B26B-EFE6A5A59BC8}"/>
-          </ac:spMkLst>
-        </pc:spChg>
-        <pc:spChg chg="add del">
-          <ac:chgData name="Karthika Vellingiri" userId="2f791443-b2b6-40db-8581-89f0c0794d11" providerId="ADAL" clId="{272279B0-242C-4D01-9A5D-29699CA56103}" dt="2025-08-10T14:20:04.384" v="119"/>
-          <ac:spMkLst>
-            <pc:docMk/>
-            <pc:sldMk cId="99664021" sldId="261"/>
-            <ac:spMk id="32" creationId="{21F6BE39-9E37-45F0-B10C-92305CFB7C77}"/>
-          </ac:spMkLst>
-        </pc:spChg>
-        <pc:spChg chg="add del">
-          <ac:chgData name="Karthika Vellingiri" userId="2f791443-b2b6-40db-8581-89f0c0794d11" providerId="ADAL" clId="{272279B0-242C-4D01-9A5D-29699CA56103}" dt="2025-08-10T14:25:11.506" v="202" actId="26606"/>
-          <ac:spMkLst>
-            <pc:docMk/>
-            <pc:sldMk cId="99664021" sldId="261"/>
-            <ac:spMk id="33" creationId="{2B258D2B-6AC3-4B3A-A87C-FD7E6517826E}"/>
-          </ac:spMkLst>
-        </pc:spChg>
-        <pc:spChg chg="add del">
-          <ac:chgData name="Karthika Vellingiri" userId="2f791443-b2b6-40db-8581-89f0c0794d11" providerId="ADAL" clId="{272279B0-242C-4D01-9A5D-29699CA56103}" dt="2025-08-10T14:25:11.506" v="202" actId="26606"/>
-          <ac:spMkLst>
-            <pc:docMk/>
-            <pc:sldMk cId="99664021" sldId="261"/>
-            <ac:spMk id="34" creationId="{8D55DD8B-9BF9-4B91-A22D-2D3F2AEFF189}"/>
-          </ac:spMkLst>
-        </pc:spChg>
-        <pc:spChg chg="add del">
-          <ac:chgData name="Karthika Vellingiri" userId="2f791443-b2b6-40db-8581-89f0c0794d11" providerId="ADAL" clId="{272279B0-242C-4D01-9A5D-29699CA56103}" dt="2025-08-10T14:53:05.740" v="358" actId="26606"/>
-          <ac:spMkLst>
-            <pc:docMk/>
-            <pc:sldMk cId="99664021" sldId="261"/>
-            <ac:spMk id="35" creationId="{52ABB703-2B0E-4C3B-B4A2-F3973548E561}"/>
-          </ac:spMkLst>
-        </pc:spChg>
-        <pc:spChg chg="add del">
-          <ac:chgData name="Karthika Vellingiri" userId="2f791443-b2b6-40db-8581-89f0c0794d11" providerId="ADAL" clId="{272279B0-242C-4D01-9A5D-29699CA56103}" dt="2025-08-10T14:50:09.402" v="312"/>
-          <ac:spMkLst>
-            <pc:docMk/>
-            <pc:sldMk cId="99664021" sldId="261"/>
-            <ac:spMk id="36" creationId="{E491B121-12B5-4977-A064-636AB0B9B0BD}"/>
-          </ac:spMkLst>
-        </pc:spChg>
-        <pc:spChg chg="add del">
-          <ac:chgData name="Karthika Vellingiri" userId="2f791443-b2b6-40db-8581-89f0c0794d11" providerId="ADAL" clId="{272279B0-242C-4D01-9A5D-29699CA56103}" dt="2025-08-10T14:50:09.402" v="312"/>
-          <ac:spMkLst>
-            <pc:docMk/>
-            <pc:sldMk cId="99664021" sldId="261"/>
-            <ac:spMk id="37" creationId="{2ED05F70-AB3E-4472-B26B-EFE6A5A59BC8}"/>
-          </ac:spMkLst>
-        </pc:spChg>
-        <pc:spChg chg="add del">
-          <ac:chgData name="Karthika Vellingiri" userId="2f791443-b2b6-40db-8581-89f0c0794d11" providerId="ADAL" clId="{272279B0-242C-4D01-9A5D-29699CA56103}" dt="2025-08-10T14:50:09.402" v="312"/>
-          <ac:spMkLst>
-            <pc:docMk/>
-            <pc:sldMk cId="99664021" sldId="261"/>
-            <ac:spMk id="38" creationId="{21F6BE39-9E37-45F0-B10C-92305CFB7C77}"/>
-          </ac:spMkLst>
-        </pc:spChg>
-        <pc:spChg chg="add del">
-          <ac:chgData name="Karthika Vellingiri" userId="2f791443-b2b6-40db-8581-89f0c0794d11" providerId="ADAL" clId="{272279B0-242C-4D01-9A5D-29699CA56103}" dt="2025-08-10T14:53:05.740" v="358" actId="26606"/>
-          <ac:spMkLst>
-            <pc:docMk/>
-            <pc:sldMk cId="99664021" sldId="261"/>
-            <ac:spMk id="40" creationId="{E95DA498-D9A2-4DA9-B9DA-B3776E08CF7E}"/>
-          </ac:spMkLst>
-        </pc:spChg>
-        <pc:spChg chg="add del">
-          <ac:chgData name="Karthika Vellingiri" userId="2f791443-b2b6-40db-8581-89f0c0794d11" providerId="ADAL" clId="{272279B0-242C-4D01-9A5D-29699CA56103}" dt="2025-08-10T14:53:05.740" v="358" actId="26606"/>
-          <ac:spMkLst>
-            <pc:docMk/>
-            <pc:sldMk cId="99664021" sldId="261"/>
-            <ac:spMk id="41" creationId="{82A73093-4B9D-420D-B17E-52293703A1D4}"/>
-          </ac:spMkLst>
-        </pc:spChg>
-        <pc:spChg chg="add del">
-          <ac:chgData name="Karthika Vellingiri" userId="2f791443-b2b6-40db-8581-89f0c0794d11" providerId="ADAL" clId="{272279B0-242C-4D01-9A5D-29699CA56103}" dt="2025-08-10T14:53:19.009" v="366" actId="26606"/>
-          <ac:spMkLst>
-            <pc:docMk/>
-            <pc:sldMk cId="99664021" sldId="261"/>
-            <ac:spMk id="42" creationId="{311973C2-EB8B-452A-A698-4A252FD3AE28}"/>
-          </ac:spMkLst>
-        </pc:spChg>
-        <pc:spChg chg="add del">
-          <ac:chgData name="Karthika Vellingiri" userId="2f791443-b2b6-40db-8581-89f0c0794d11" providerId="ADAL" clId="{272279B0-242C-4D01-9A5D-29699CA56103}" dt="2025-08-10T14:53:07.707" v="360" actId="26606"/>
-          <ac:spMkLst>
-            <pc:docMk/>
-            <pc:sldMk cId="99664021" sldId="261"/>
-            <ac:spMk id="43" creationId="{10162E77-11AD-44A7-84EC-40C59EEFBD2E}"/>
-          </ac:spMkLst>
-        </pc:spChg>
-        <pc:spChg chg="add del">
-          <ac:chgData name="Karthika Vellingiri" userId="2f791443-b2b6-40db-8581-89f0c0794d11" providerId="ADAL" clId="{272279B0-242C-4D01-9A5D-29699CA56103}" dt="2025-08-10T14:22:36.791" v="170"/>
-          <ac:spMkLst>
-            <pc:docMk/>
-            <pc:sldMk cId="99664021" sldId="261"/>
-            <ac:spMk id="44" creationId="{5F305C72-8769-4E0F-B31D-F4B1C9DC933F}"/>
-          </ac:spMkLst>
-        </pc:spChg>
-        <pc:spChg chg="add del">
-          <ac:chgData name="Karthika Vellingiri" userId="2f791443-b2b6-40db-8581-89f0c0794d11" providerId="ADAL" clId="{272279B0-242C-4D01-9A5D-29699CA56103}" dt="2025-08-10T14:22:36.791" v="170"/>
-          <ac:spMkLst>
-            <pc:docMk/>
-            <pc:sldMk cId="99664021" sldId="261"/>
-            <ac:spMk id="45" creationId="{C5E0C91A-3F1D-43D7-9AB4-5D0A17D5C46F}"/>
-          </ac:spMkLst>
-        </pc:spChg>
-        <pc:spChg chg="add del">
-          <ac:chgData name="Karthika Vellingiri" userId="2f791443-b2b6-40db-8581-89f0c0794d11" providerId="ADAL" clId="{272279B0-242C-4D01-9A5D-29699CA56103}" dt="2025-08-10T14:22:36.791" v="170"/>
-          <ac:spMkLst>
-            <pc:docMk/>
-            <pc:sldMk cId="99664021" sldId="261"/>
-            <ac:spMk id="47" creationId="{3A6C27A1-A438-4EC6-93BF-EC26F29BBF0E}"/>
-          </ac:spMkLst>
-        </pc:spChg>
-        <pc:spChg chg="add del">
-          <ac:chgData name="Karthika Vellingiri" userId="2f791443-b2b6-40db-8581-89f0c0794d11" providerId="ADAL" clId="{272279B0-242C-4D01-9A5D-29699CA56103}" dt="2025-08-10T14:53:07.707" v="360" actId="26606"/>
-          <ac:spMkLst>
-            <pc:docMk/>
-            <pc:sldMk cId="99664021" sldId="261"/>
-            <ac:spMk id="49" creationId="{6329CBCE-21AE-419D-AC1F-8ACF510A6670}"/>
-          </ac:spMkLst>
-        </pc:spChg>
-        <pc:spChg chg="add del">
-          <ac:chgData name="Karthika Vellingiri" userId="2f791443-b2b6-40db-8581-89f0c0794d11" providerId="ADAL" clId="{272279B0-242C-4D01-9A5D-29699CA56103}" dt="2025-08-10T14:53:07.707" v="360" actId="26606"/>
-          <ac:spMkLst>
-            <pc:docMk/>
-            <pc:sldMk cId="99664021" sldId="261"/>
-            <ac:spMk id="50" creationId="{FF2DA012-1414-493D-888F-5D99D0BDA322}"/>
-          </ac:spMkLst>
-        </pc:spChg>
-        <pc:spChg chg="add del">
-          <ac:chgData name="Karthika Vellingiri" userId="2f791443-b2b6-40db-8581-89f0c0794d11" providerId="ADAL" clId="{272279B0-242C-4D01-9A5D-29699CA56103}" dt="2025-08-10T14:53:19.009" v="366" actId="26606"/>
-          <ac:spMkLst>
-            <pc:docMk/>
-            <pc:sldMk cId="99664021" sldId="261"/>
-            <ac:spMk id="51" creationId="{10162E77-11AD-44A7-84EC-40C59EEFBD2E}"/>
-          </ac:spMkLst>
-        </pc:spChg>
-        <pc:spChg chg="add del">
-          <ac:chgData name="Karthika Vellingiri" userId="2f791443-b2b6-40db-8581-89f0c0794d11" providerId="ADAL" clId="{272279B0-242C-4D01-9A5D-29699CA56103}" dt="2025-08-10T15:18:36.689" v="492" actId="26606"/>
-          <ac:spMkLst>
-            <pc:docMk/>
-            <pc:sldMk cId="99664021" sldId="261"/>
-            <ac:spMk id="57" creationId="{311973C2-EB8B-452A-A698-4A252FD3AE28}"/>
-          </ac:spMkLst>
-        </pc:spChg>
-        <pc:spChg chg="add del">
-          <ac:chgData name="Karthika Vellingiri" userId="2f791443-b2b6-40db-8581-89f0c0794d11" providerId="ADAL" clId="{272279B0-242C-4D01-9A5D-29699CA56103}" dt="2025-08-10T15:18:36.689" v="492" actId="26606"/>
-          <ac:spMkLst>
-            <pc:docMk/>
-            <pc:sldMk cId="99664021" sldId="261"/>
-            <ac:spMk id="59" creationId="{10162E77-11AD-44A7-84EC-40C59EEFBD2E}"/>
-          </ac:spMkLst>
-        </pc:spChg>
-        <pc:spChg chg="add">
-          <ac:chgData name="Karthika Vellingiri" userId="2f791443-b2b6-40db-8581-89f0c0794d11" providerId="ADAL" clId="{272279B0-242C-4D01-9A5D-29699CA56103}" dt="2025-08-10T15:17:36.526" v="466"/>
-          <ac:spMkLst>
-            <pc:docMk/>
-            <pc:sldMk cId="99664021" sldId="261"/>
-            <ac:spMk id="62" creationId="{5D813A22-2528-E772-1739-3FBAC381D62F}"/>
-          </ac:spMkLst>
-        </pc:spChg>
-        <pc:spChg chg="add">
-          <ac:chgData name="Karthika Vellingiri" userId="2f791443-b2b6-40db-8581-89f0c0794d11" providerId="ADAL" clId="{272279B0-242C-4D01-9A5D-29699CA56103}" dt="2025-08-10T15:17:39.684" v="467"/>
-          <ac:spMkLst>
-            <pc:docMk/>
-            <pc:sldMk cId="99664021" sldId="261"/>
-            <ac:spMk id="63" creationId="{D8843F36-3EBB-5C00-88CD-274BE9A8755C}"/>
-          </ac:spMkLst>
-        </pc:spChg>
-        <pc:spChg chg="add">
-          <ac:chgData name="Karthika Vellingiri" userId="2f791443-b2b6-40db-8581-89f0c0794d11" providerId="ADAL" clId="{272279B0-242C-4D01-9A5D-29699CA56103}" dt="2025-08-10T15:17:39.684" v="467"/>
-          <ac:spMkLst>
-            <pc:docMk/>
-            <pc:sldMk cId="99664021" sldId="261"/>
-            <ac:spMk id="64" creationId="{E993BCF5-5F5D-F78B-DA5F-FBB523F88718}"/>
-          </ac:spMkLst>
-        </pc:spChg>
-        <pc:spChg chg="add">
-          <ac:chgData name="Karthika Vellingiri" userId="2f791443-b2b6-40db-8581-89f0c0794d11" providerId="ADAL" clId="{272279B0-242C-4D01-9A5D-29699CA56103}" dt="2025-08-10T15:17:39.684" v="467"/>
-          <ac:spMkLst>
-            <pc:docMk/>
-            <pc:sldMk cId="99664021" sldId="261"/>
-            <ac:spMk id="65" creationId="{31623564-090B-AE4C-4F8E-14A03E43C801}"/>
-          </ac:spMkLst>
-        </pc:spChg>
-        <pc:spChg chg="add">
-          <ac:chgData name="Karthika Vellingiri" userId="2f791443-b2b6-40db-8581-89f0c0794d11" providerId="ADAL" clId="{272279B0-242C-4D01-9A5D-29699CA56103}" dt="2025-08-10T15:17:42.143" v="468"/>
-          <ac:spMkLst>
-            <pc:docMk/>
-            <pc:sldMk cId="99664021" sldId="261"/>
-            <ac:spMk id="66" creationId="{FF9EBDD5-497D-4C69-0354-876A6AE72891}"/>
-          </ac:spMkLst>
-        </pc:spChg>
-        <pc:spChg chg="add">
-          <ac:chgData name="Karthika Vellingiri" userId="2f791443-b2b6-40db-8581-89f0c0794d11" providerId="ADAL" clId="{272279B0-242C-4D01-9A5D-29699CA56103}" dt="2025-08-10T15:17:42.143" v="468"/>
-          <ac:spMkLst>
-            <pc:docMk/>
-            <pc:sldMk cId="99664021" sldId="261"/>
-            <ac:spMk id="67" creationId="{406C167D-425A-E9EE-0BEA-378F2A8DB9AE}"/>
-          </ac:spMkLst>
-        </pc:spChg>
-        <pc:spChg chg="add">
-          <ac:chgData name="Karthika Vellingiri" userId="2f791443-b2b6-40db-8581-89f0c0794d11" providerId="ADAL" clId="{272279B0-242C-4D01-9A5D-29699CA56103}" dt="2025-08-10T15:17:42.143" v="468"/>
-          <ac:spMkLst>
-            <pc:docMk/>
-            <pc:sldMk cId="99664021" sldId="261"/>
-            <ac:spMk id="68" creationId="{58F281D6-EECA-DA48-ABA8-AEAC0650E83F}"/>
-          </ac:spMkLst>
-        </pc:spChg>
-        <pc:spChg chg="add del mod">
-          <ac:chgData name="Karthika Vellingiri" userId="2f791443-b2b6-40db-8581-89f0c0794d11" providerId="ADAL" clId="{272279B0-242C-4D01-9A5D-29699CA56103}" dt="2025-08-10T15:18:14.629" v="479" actId="478"/>
-          <ac:spMkLst>
-            <pc:docMk/>
-            <pc:sldMk cId="99664021" sldId="261"/>
-            <ac:spMk id="69" creationId="{BDE936D3-0329-929A-E515-543ED0029DC0}"/>
-          </ac:spMkLst>
-        </pc:spChg>
-        <pc:spChg chg="add del mod">
-          <ac:chgData name="Karthika Vellingiri" userId="2f791443-b2b6-40db-8581-89f0c0794d11" providerId="ADAL" clId="{272279B0-242C-4D01-9A5D-29699CA56103}" dt="2025-08-10T15:18:03.193" v="476" actId="478"/>
-          <ac:spMkLst>
-            <pc:docMk/>
-            <pc:sldMk cId="99664021" sldId="261"/>
-            <ac:spMk id="70" creationId="{8BCC4D99-43EC-522A-20CF-FD4B8DF10238}"/>
-          </ac:spMkLst>
-        </pc:spChg>
-        <pc:spChg chg="add del mod">
-          <ac:chgData name="Karthika Vellingiri" userId="2f791443-b2b6-40db-8581-89f0c0794d11" providerId="ADAL" clId="{272279B0-242C-4D01-9A5D-29699CA56103}" dt="2025-08-10T15:18:14.633" v="481"/>
-          <ac:spMkLst>
-            <pc:docMk/>
-            <pc:sldMk cId="99664021" sldId="261"/>
-            <ac:spMk id="71" creationId="{F4808260-8ED3-99ED-5D7E-CE2393717729}"/>
-          </ac:spMkLst>
-        </pc:spChg>
-        <pc:spChg chg="add del mod">
-          <ac:chgData name="Karthika Vellingiri" userId="2f791443-b2b6-40db-8581-89f0c0794d11" providerId="ADAL" clId="{272279B0-242C-4D01-9A5D-29699CA56103}" dt="2025-08-10T15:19:20.442" v="505" actId="26606"/>
-          <ac:spMkLst>
-            <pc:docMk/>
-            <pc:sldMk cId="99664021" sldId="261"/>
-            <ac:spMk id="73" creationId="{048920EC-4281-B51D-8530-9996ACBDC3D1}"/>
-          </ac:spMkLst>
-        </pc:spChg>
-        <pc:spChg chg="add del">
-          <ac:chgData name="Karthika Vellingiri" userId="2f791443-b2b6-40db-8581-89f0c0794d11" providerId="ADAL" clId="{272279B0-242C-4D01-9A5D-29699CA56103}" dt="2025-08-10T15:19:11.869" v="503" actId="26606"/>
-          <ac:spMkLst>
-            <pc:docMk/>
-            <pc:sldMk cId="99664021" sldId="261"/>
-            <ac:spMk id="75" creationId="{82A73093-4B9D-420D-B17E-52293703A1D4}"/>
-          </ac:spMkLst>
-        </pc:spChg>
-        <pc:spChg chg="add del">
-          <ac:chgData name="Karthika Vellingiri" userId="2f791443-b2b6-40db-8581-89f0c0794d11" providerId="ADAL" clId="{272279B0-242C-4D01-9A5D-29699CA56103}" dt="2025-08-10T15:19:11.869" v="503" actId="26606"/>
-          <ac:spMkLst>
-            <pc:docMk/>
-            <pc:sldMk cId="99664021" sldId="261"/>
-            <ac:spMk id="78" creationId="{52ABB703-2B0E-4C3B-B4A2-F3973548E561}"/>
-          </ac:spMkLst>
-        </pc:spChg>
-        <pc:spChg chg="add del">
-          <ac:chgData name="Karthika Vellingiri" userId="2f791443-b2b6-40db-8581-89f0c0794d11" providerId="ADAL" clId="{272279B0-242C-4D01-9A5D-29699CA56103}" dt="2025-08-10T15:19:11.869" v="503" actId="26606"/>
-          <ac:spMkLst>
-            <pc:docMk/>
-            <pc:sldMk cId="99664021" sldId="261"/>
-            <ac:spMk id="82" creationId="{E95DA498-D9A2-4DA9-B9DA-B3776E08CF7E}"/>
-          </ac:spMkLst>
-        </pc:spChg>
-        <pc:spChg chg="add del">
-          <ac:chgData name="Karthika Vellingiri" userId="2f791443-b2b6-40db-8581-89f0c0794d11" providerId="ADAL" clId="{272279B0-242C-4D01-9A5D-29699CA56103}" dt="2025-08-10T14:18:25.265" v="81" actId="26606"/>
-          <ac:spMkLst>
-            <pc:docMk/>
-            <pc:sldMk cId="99664021" sldId="261"/>
-            <ac:spMk id="83" creationId="{88C97474-5879-4DB5-B4F3-F0357104BC8E}"/>
-          </ac:spMkLst>
-        </pc:spChg>
-        <pc:spChg chg="add del">
-          <ac:chgData name="Karthika Vellingiri" userId="2f791443-b2b6-40db-8581-89f0c0794d11" providerId="ADAL" clId="{272279B0-242C-4D01-9A5D-29699CA56103}" dt="2025-08-10T14:18:25.265" v="81" actId="26606"/>
-          <ac:spMkLst>
-            <pc:docMk/>
-            <pc:sldMk cId="99664021" sldId="261"/>
-            <ac:spMk id="84" creationId="{7D2AF00E-D433-4047-863F-BCB69CEC3C35}"/>
-          </ac:spMkLst>
-        </pc:spChg>
-        <pc:spChg chg="add del">
-          <ac:chgData name="Karthika Vellingiri" userId="2f791443-b2b6-40db-8581-89f0c0794d11" providerId="ADAL" clId="{272279B0-242C-4D01-9A5D-29699CA56103}" dt="2025-08-10T14:18:25.265" v="81" actId="26606"/>
-          <ac:spMkLst>
-            <pc:docMk/>
-            <pc:sldMk cId="99664021" sldId="261"/>
-            <ac:spMk id="85" creationId="{0997DBEA-6DFC-457A-9850-E535053549D6}"/>
-          </ac:spMkLst>
-        </pc:spChg>
-        <pc:spChg chg="add del">
-          <ac:chgData name="Karthika Vellingiri" userId="2f791443-b2b6-40db-8581-89f0c0794d11" providerId="ADAL" clId="{272279B0-242C-4D01-9A5D-29699CA56103}" dt="2025-08-10T14:18:25.265" v="81" actId="26606"/>
-          <ac:spMkLst>
-            <pc:docMk/>
-            <pc:sldMk cId="99664021" sldId="261"/>
-            <ac:spMk id="86" creationId="{79446CF5-953A-4916-BFF4-F5558E5C2359}"/>
-          </ac:spMkLst>
-        </pc:spChg>
-        <pc:spChg chg="add del">
-          <ac:chgData name="Karthika Vellingiri" userId="2f791443-b2b6-40db-8581-89f0c0794d11" providerId="ADAL" clId="{272279B0-242C-4D01-9A5D-29699CA56103}" dt="2025-08-10T14:18:25.265" v="81" actId="26606"/>
-          <ac:spMkLst>
-            <pc:docMk/>
-            <pc:sldMk cId="99664021" sldId="261"/>
-            <ac:spMk id="87" creationId="{477B945C-B433-4DFF-9A67-A5C9257E471C}"/>
-          </ac:spMkLst>
-        </pc:spChg>
-        <pc:spChg chg="add del">
-          <ac:chgData name="Karthika Vellingiri" userId="2f791443-b2b6-40db-8581-89f0c0794d11" providerId="ADAL" clId="{272279B0-242C-4D01-9A5D-29699CA56103}" dt="2025-08-10T15:18:58.256" v="496" actId="26606"/>
-          <ac:spMkLst>
-            <pc:docMk/>
-            <pc:sldMk cId="99664021" sldId="261"/>
-            <ac:spMk id="88" creationId="{52ABB703-2B0E-4C3B-B4A2-F3973548E561}"/>
-          </ac:spMkLst>
-        </pc:spChg>
-        <pc:spChg chg="add del">
-          <ac:chgData name="Karthika Vellingiri" userId="2f791443-b2b6-40db-8581-89f0c0794d11" providerId="ADAL" clId="{272279B0-242C-4D01-9A5D-29699CA56103}" dt="2025-08-10T15:19:20.442" v="505" actId="26606"/>
-          <ac:spMkLst>
-            <pc:docMk/>
-            <pc:sldMk cId="99664021" sldId="261"/>
-            <ac:spMk id="90" creationId="{C33BF9DD-8A45-4EEE-B231-0A14D322E5F9}"/>
-          </ac:spMkLst>
-        </pc:spChg>
-        <pc:spChg chg="add del">
-          <ac:chgData name="Karthika Vellingiri" userId="2f791443-b2b6-40db-8581-89f0c0794d11" providerId="ADAL" clId="{272279B0-242C-4D01-9A5D-29699CA56103}" dt="2025-08-10T15:18:58.256" v="496" actId="26606"/>
-          <ac:spMkLst>
-            <pc:docMk/>
-            <pc:sldMk cId="99664021" sldId="261"/>
-            <ac:spMk id="91" creationId="{E95DA498-D9A2-4DA9-B9DA-B3776E08CF7E}"/>
-          </ac:spMkLst>
-        </pc:spChg>
-        <pc:spChg chg="add del">
-          <ac:chgData name="Karthika Vellingiri" userId="2f791443-b2b6-40db-8581-89f0c0794d11" providerId="ADAL" clId="{272279B0-242C-4D01-9A5D-29699CA56103}" dt="2025-08-10T14:18:20.825" v="78" actId="26606"/>
-          <ac:spMkLst>
-            <pc:docMk/>
-            <pc:sldMk cId="99664021" sldId="261"/>
-            <ac:spMk id="92" creationId="{064D2207-AA67-DAD1-D42E-7A07328CA8EF}"/>
-          </ac:spMkLst>
-        </pc:spChg>
-        <pc:spChg chg="add del">
-          <ac:chgData name="Karthika Vellingiri" userId="2f791443-b2b6-40db-8581-89f0c0794d11" providerId="ADAL" clId="{272279B0-242C-4D01-9A5D-29699CA56103}" dt="2025-08-10T15:18:58.256" v="496" actId="26606"/>
-          <ac:spMkLst>
-            <pc:docMk/>
-            <pc:sldMk cId="99664021" sldId="261"/>
-            <ac:spMk id="93" creationId="{82A73093-4B9D-420D-B17E-52293703A1D4}"/>
-          </ac:spMkLst>
-        </pc:spChg>
-        <pc:spChg chg="add del">
-          <ac:chgData name="Karthika Vellingiri" userId="2f791443-b2b6-40db-8581-89f0c0794d11" providerId="ADAL" clId="{272279B0-242C-4D01-9A5D-29699CA56103}" dt="2025-08-10T14:18:20.825" v="78" actId="26606"/>
-          <ac:spMkLst>
-            <pc:docMk/>
-            <pc:sldMk cId="99664021" sldId="261"/>
-            <ac:spMk id="94" creationId="{BE047182-D574-4420-02BD-B15749636F5A}"/>
-          </ac:spMkLst>
-        </pc:spChg>
-        <pc:spChg chg="add del">
-          <ac:chgData name="Karthika Vellingiri" userId="2f791443-b2b6-40db-8581-89f0c0794d11" providerId="ADAL" clId="{272279B0-242C-4D01-9A5D-29699CA56103}" dt="2025-08-10T15:19:05.001" v="498" actId="26606"/>
-          <ac:spMkLst>
-            <pc:docMk/>
-            <pc:sldMk cId="99664021" sldId="261"/>
-            <ac:spMk id="95" creationId="{52ABB703-2B0E-4C3B-B4A2-F3973548E561}"/>
-          </ac:spMkLst>
-        </pc:spChg>
-        <pc:spChg chg="add del">
-          <ac:chgData name="Karthika Vellingiri" userId="2f791443-b2b6-40db-8581-89f0c0794d11" providerId="ADAL" clId="{272279B0-242C-4D01-9A5D-29699CA56103}" dt="2025-08-10T14:18:20.825" v="78" actId="26606"/>
-          <ac:spMkLst>
-            <pc:docMk/>
-            <pc:sldMk cId="99664021" sldId="261"/>
-            <ac:spMk id="96" creationId="{70F9EDA4-AE82-51D4-9890-D3FD6D2AF0E1}"/>
-          </ac:spMkLst>
-        </pc:spChg>
-        <pc:spChg chg="add del">
-          <ac:chgData name="Karthika Vellingiri" userId="2f791443-b2b6-40db-8581-89f0c0794d11" providerId="ADAL" clId="{272279B0-242C-4D01-9A5D-29699CA56103}" dt="2025-08-10T14:18:20.825" v="78" actId="26606"/>
-          <ac:spMkLst>
-            <pc:docMk/>
-            <pc:sldMk cId="99664021" sldId="261"/>
-            <ac:spMk id="98" creationId="{6832D855-C8B5-8666-2EF6-1D436A827AE3}"/>
-          </ac:spMkLst>
-        </pc:spChg>
-        <pc:spChg chg="add del">
-          <ac:chgData name="Karthika Vellingiri" userId="2f791443-b2b6-40db-8581-89f0c0794d11" providerId="ADAL" clId="{272279B0-242C-4D01-9A5D-29699CA56103}" dt="2025-08-10T15:19:05.001" v="498" actId="26606"/>
-          <ac:spMkLst>
-            <pc:docMk/>
-            <pc:sldMk cId="99664021" sldId="261"/>
-            <ac:spMk id="99" creationId="{E95DA498-D9A2-4DA9-B9DA-B3776E08CF7E}"/>
-          </ac:spMkLst>
-        </pc:spChg>
-        <pc:spChg chg="add del">
-          <ac:chgData name="Karthika Vellingiri" userId="2f791443-b2b6-40db-8581-89f0c0794d11" providerId="ADAL" clId="{272279B0-242C-4D01-9A5D-29699CA56103}" dt="2025-08-10T14:18:25.261" v="80" actId="26606"/>
-          <ac:spMkLst>
-            <pc:docMk/>
-            <pc:sldMk cId="99664021" sldId="261"/>
-            <ac:spMk id="101" creationId="{FBB53F82-F191-4EEB-AB7B-F69E634FA3E8}"/>
-          </ac:spMkLst>
-        </pc:spChg>
-        <pc:spChg chg="add del">
-          <ac:chgData name="Karthika Vellingiri" userId="2f791443-b2b6-40db-8581-89f0c0794d11" providerId="ADAL" clId="{272279B0-242C-4D01-9A5D-29699CA56103}" dt="2025-08-10T14:18:25.261" v="80" actId="26606"/>
-          <ac:spMkLst>
-            <pc:docMk/>
-            <pc:sldMk cId="99664021" sldId="261"/>
-            <ac:spMk id="102" creationId="{8616AA08-3831-473D-B61B-89484A33CF65}"/>
-          </ac:spMkLst>
-        </pc:spChg>
-        <pc:spChg chg="add del">
-          <ac:chgData name="Karthika Vellingiri" userId="2f791443-b2b6-40db-8581-89f0c0794d11" providerId="ADAL" clId="{272279B0-242C-4D01-9A5D-29699CA56103}" dt="2025-08-10T14:18:25.261" v="80" actId="26606"/>
-          <ac:spMkLst>
-            <pc:docMk/>
-            <pc:sldMk cId="99664021" sldId="261"/>
-            <ac:spMk id="103" creationId="{8431B918-3A1C-46BA-9430-CAD97D9DA0FC}"/>
-          </ac:spMkLst>
-        </pc:spChg>
-        <pc:spChg chg="add del">
-          <ac:chgData name="Karthika Vellingiri" userId="2f791443-b2b6-40db-8581-89f0c0794d11" providerId="ADAL" clId="{272279B0-242C-4D01-9A5D-29699CA56103}" dt="2025-08-10T14:18:25.261" v="80" actId="26606"/>
-          <ac:spMkLst>
-            <pc:docMk/>
-            <pc:sldMk cId="99664021" sldId="261"/>
-            <ac:spMk id="104" creationId="{8400935A-2F82-4DC4-A4E1-E12EFB8C2738}"/>
-          </ac:spMkLst>
-        </pc:spChg>
-        <pc:spChg chg="add del">
-          <ac:chgData name="Karthika Vellingiri" userId="2f791443-b2b6-40db-8581-89f0c0794d11" providerId="ADAL" clId="{272279B0-242C-4D01-9A5D-29699CA56103}" dt="2025-08-10T15:19:05.001" v="498" actId="26606"/>
-          <ac:spMkLst>
-            <pc:docMk/>
-            <pc:sldMk cId="99664021" sldId="261"/>
-            <ac:spMk id="105" creationId="{82A73093-4B9D-420D-B17E-52293703A1D4}"/>
-          </ac:spMkLst>
-        </pc:spChg>
-        <pc:spChg chg="add del">
-          <ac:chgData name="Karthika Vellingiri" userId="2f791443-b2b6-40db-8581-89f0c0794d11" providerId="ADAL" clId="{272279B0-242C-4D01-9A5D-29699CA56103}" dt="2025-08-10T15:19:08.020" v="500" actId="26606"/>
-          <ac:spMkLst>
-            <pc:docMk/>
-            <pc:sldMk cId="99664021" sldId="261"/>
-            <ac:spMk id="108" creationId="{5CF81D86-BDBA-477C-B7DD-8D359BB9965B}"/>
-          </ac:spMkLst>
-        </pc:spChg>
-        <pc:spChg chg="add del">
-          <ac:chgData name="Karthika Vellingiri" userId="2f791443-b2b6-40db-8581-89f0c0794d11" providerId="ADAL" clId="{272279B0-242C-4D01-9A5D-29699CA56103}" dt="2025-08-10T15:19:08.020" v="500" actId="26606"/>
-          <ac:spMkLst>
-            <pc:docMk/>
-            <pc:sldMk cId="99664021" sldId="261"/>
-            <ac:spMk id="110" creationId="{048920EC-4281-B51D-8530-9996ACBDC3D1}"/>
-          </ac:spMkLst>
-        </pc:spChg>
-        <pc:spChg chg="add del">
-          <ac:chgData name="Karthika Vellingiri" userId="2f791443-b2b6-40db-8581-89f0c0794d11" providerId="ADAL" clId="{272279B0-242C-4D01-9A5D-29699CA56103}" dt="2025-08-10T15:19:08.020" v="500" actId="26606"/>
-          <ac:spMkLst>
-            <pc:docMk/>
-            <pc:sldMk cId="99664021" sldId="261"/>
-            <ac:spMk id="111" creationId="{88AA064E-5F6E-4024-BC28-EDDC3DFC70E1}"/>
-          </ac:spMkLst>
-        </pc:spChg>
-        <pc:spChg chg="add del">
-          <ac:chgData name="Karthika Vellingiri" userId="2f791443-b2b6-40db-8581-89f0c0794d11" providerId="ADAL" clId="{272279B0-242C-4D01-9A5D-29699CA56103}" dt="2025-08-10T15:19:08.020" v="500" actId="26606"/>
-          <ac:spMkLst>
-            <pc:docMk/>
-            <pc:sldMk cId="99664021" sldId="261"/>
-            <ac:spMk id="112" creationId="{03B29638-4838-4B9B-B9DB-96E542BAF3E6}"/>
-          </ac:spMkLst>
-        </pc:spChg>
-        <pc:spChg chg="add del">
-          <ac:chgData name="Karthika Vellingiri" userId="2f791443-b2b6-40db-8581-89f0c0794d11" providerId="ADAL" clId="{272279B0-242C-4D01-9A5D-29699CA56103}" dt="2025-08-10T15:19:20.442" v="505" actId="26606"/>
-          <ac:spMkLst>
-            <pc:docMk/>
-            <pc:sldMk cId="99664021" sldId="261"/>
-            <ac:spMk id="113" creationId="{D5FBCAC9-BD8B-4F3B-AD74-EF37D4211349}"/>
-          </ac:spMkLst>
-        </pc:spChg>
-        <pc:spChg chg="add del">
-          <ac:chgData name="Karthika Vellingiri" userId="2f791443-b2b6-40db-8581-89f0c0794d11" providerId="ADAL" clId="{272279B0-242C-4D01-9A5D-29699CA56103}" dt="2025-08-10T15:19:10.507" v="502" actId="26606"/>
-          <ac:spMkLst>
-            <pc:docMk/>
-            <pc:sldMk cId="99664021" sldId="261"/>
-            <ac:spMk id="114" creationId="{C33BF9DD-8A45-4EEE-B231-0A14D322E5F9}"/>
-          </ac:spMkLst>
-        </pc:spChg>
-        <pc:spChg chg="add del">
-          <ac:chgData name="Karthika Vellingiri" userId="2f791443-b2b6-40db-8581-89f0c0794d11" providerId="ADAL" clId="{272279B0-242C-4D01-9A5D-29699CA56103}" dt="2025-08-10T15:19:10.507" v="502" actId="26606"/>
-          <ac:spMkLst>
-            <pc:docMk/>
-            <pc:sldMk cId="99664021" sldId="261"/>
-            <ac:spMk id="116" creationId="{048920EC-4281-B51D-8530-9996ACBDC3D1}"/>
-          </ac:spMkLst>
-        </pc:spChg>
-        <pc:spChg chg="add del">
-          <ac:chgData name="Karthika Vellingiri" userId="2f791443-b2b6-40db-8581-89f0c0794d11" providerId="ADAL" clId="{272279B0-242C-4D01-9A5D-29699CA56103}" dt="2025-08-10T15:19:10.507" v="502" actId="26606"/>
-          <ac:spMkLst>
-            <pc:docMk/>
-            <pc:sldMk cId="99664021" sldId="261"/>
-            <ac:spMk id="117" creationId="{D5FBCAC9-BD8B-4F3B-AD74-EF37D4211349}"/>
-          </ac:spMkLst>
-        </pc:spChg>
-        <pc:spChg chg="add del">
-          <ac:chgData name="Karthika Vellingiri" userId="2f791443-b2b6-40db-8581-89f0c0794d11" providerId="ADAL" clId="{272279B0-242C-4D01-9A5D-29699CA56103}" dt="2025-08-10T15:19:10.507" v="502" actId="26606"/>
-          <ac:spMkLst>
-            <pc:docMk/>
-            <pc:sldMk cId="99664021" sldId="261"/>
-            <ac:spMk id="118" creationId="{9556C5A8-AD7E-4CE7-87BE-9EA3B5E1786F}"/>
-          </ac:spMkLst>
-        </pc:spChg>
-        <pc:spChg chg="add del">
-          <ac:chgData name="Karthika Vellingiri" userId="2f791443-b2b6-40db-8581-89f0c0794d11" providerId="ADAL" clId="{272279B0-242C-4D01-9A5D-29699CA56103}" dt="2025-08-10T15:19:20.442" v="505" actId="26606"/>
-          <ac:spMkLst>
-            <pc:docMk/>
-            <pc:sldMk cId="99664021" sldId="261"/>
-            <ac:spMk id="119" creationId="{9556C5A8-AD7E-4CE7-87BE-9EA3B5E1786F}"/>
-          </ac:spMkLst>
-        </pc:spChg>
-        <pc:spChg chg="add">
-          <ac:chgData name="Karthika Vellingiri" userId="2f791443-b2b6-40db-8581-89f0c0794d11" providerId="ADAL" clId="{272279B0-242C-4D01-9A5D-29699CA56103}" dt="2025-08-10T15:19:20.442" v="505" actId="26606"/>
-          <ac:spMkLst>
-            <pc:docMk/>
-            <pc:sldMk cId="99664021" sldId="261"/>
-            <ac:spMk id="124" creationId="{311973C2-EB8B-452A-A698-4A252FD3AE28}"/>
-          </ac:spMkLst>
-        </pc:spChg>
-        <pc:spChg chg="add">
-          <ac:chgData name="Karthika Vellingiri" userId="2f791443-b2b6-40db-8581-89f0c0794d11" providerId="ADAL" clId="{272279B0-242C-4D01-9A5D-29699CA56103}" dt="2025-08-10T15:19:20.442" v="505" actId="26606"/>
-          <ac:spMkLst>
-            <pc:docMk/>
-            <pc:sldMk cId="99664021" sldId="261"/>
-            <ac:spMk id="126" creationId="{10162E77-11AD-44A7-84EC-40C59EEFBD2E}"/>
-          </ac:spMkLst>
-        </pc:spChg>
-        <pc:grpChg chg="add del">
-          <ac:chgData name="Karthika Vellingiri" userId="2f791443-b2b6-40db-8581-89f0c0794d11" providerId="ADAL" clId="{272279B0-242C-4D01-9A5D-29699CA56103}" dt="2025-08-10T14:22:36.791" v="170"/>
-          <ac:grpSpMkLst>
-            <pc:docMk/>
-            <pc:sldMk cId="99664021" sldId="261"/>
-            <ac:grpSpMk id="46" creationId="{72583CFC-05A3-4743-9A2E-7C2095B8D4CD}"/>
-          </ac:grpSpMkLst>
-        </pc:grpChg>
-        <pc:grpChg chg="add del">
-          <ac:chgData name="Karthika Vellingiri" userId="2f791443-b2b6-40db-8581-89f0c0794d11" providerId="ADAL" clId="{272279B0-242C-4D01-9A5D-29699CA56103}" dt="2025-08-10T14:22:36.791" v="170"/>
-          <ac:grpSpMkLst>
-            <pc:docMk/>
-            <pc:sldMk cId="99664021" sldId="261"/>
-            <ac:grpSpMk id="60" creationId="{506F0A57-55BB-457C-9C8C-3DEE71009ADC}"/>
-          </ac:grpSpMkLst>
-        </pc:grpChg>
-        <pc:graphicFrameChg chg="add del">
-          <ac:chgData name="Karthika Vellingiri" userId="2f791443-b2b6-40db-8581-89f0c0794d11" providerId="ADAL" clId="{272279B0-242C-4D01-9A5D-29699CA56103}" dt="2025-08-10T15:19:05.001" v="498" actId="26606"/>
-          <ac:graphicFrameMkLst>
-            <pc:docMk/>
-            <pc:sldMk cId="99664021" sldId="261"/>
-            <ac:graphicFrameMk id="106" creationId="{58A9AC05-E698-5E1B-26A3-60C60110857B}"/>
-          </ac:graphicFrameMkLst>
-        </pc:graphicFrameChg>
-        <pc:picChg chg="mod ord">
-          <ac:chgData name="Karthika Vellingiri" userId="2f791443-b2b6-40db-8581-89f0c0794d11" providerId="ADAL" clId="{272279B0-242C-4D01-9A5D-29699CA56103}" dt="2025-08-10T15:19:25.243" v="506" actId="27614"/>
-          <ac:picMkLst>
-            <pc:docMk/>
-            <pc:sldMk cId="99664021" sldId="261"/>
-            <ac:picMk id="10" creationId="{33972E08-317F-4946-7E05-663D79575765}"/>
-          </ac:picMkLst>
-        </pc:picChg>
-        <pc:cxnChg chg="add del">
-          <ac:chgData name="Karthika Vellingiri" userId="2f791443-b2b6-40db-8581-89f0c0794d11" providerId="ADAL" clId="{272279B0-242C-4D01-9A5D-29699CA56103}" dt="2025-08-10T14:53:05.740" v="358" actId="26606"/>
-          <ac:cxnSpMkLst>
-            <pc:docMk/>
-            <pc:sldMk cId="99664021" sldId="261"/>
-            <ac:cxnSpMk id="39" creationId="{9C21570E-E159-49A6-9891-FA397B7A92D3}"/>
-          </ac:cxnSpMkLst>
-        </pc:cxnChg>
-        <pc:cxnChg chg="add del">
-          <ac:chgData name="Karthika Vellingiri" userId="2f791443-b2b6-40db-8581-89f0c0794d11" providerId="ADAL" clId="{272279B0-242C-4D01-9A5D-29699CA56103}" dt="2025-08-10T14:53:07.707" v="360" actId="26606"/>
-          <ac:cxnSpMkLst>
-            <pc:docMk/>
-            <pc:sldMk cId="99664021" sldId="261"/>
-            <ac:cxnSpMk id="48" creationId="{5AB158E9-1B40-4CD6-95F0-95CA11DF7B7A}"/>
-          </ac:cxnSpMkLst>
-        </pc:cxnChg>
-        <pc:cxnChg chg="add del">
-          <ac:chgData name="Karthika Vellingiri" userId="2f791443-b2b6-40db-8581-89f0c0794d11" providerId="ADAL" clId="{272279B0-242C-4D01-9A5D-29699CA56103}" dt="2025-08-10T14:53:19.009" v="366" actId="26606"/>
-          <ac:cxnSpMkLst>
-            <pc:docMk/>
-            <pc:sldMk cId="99664021" sldId="261"/>
-            <ac:cxnSpMk id="52" creationId="{5AB158E9-1B40-4CD6-95F0-95CA11DF7B7A}"/>
-          </ac:cxnSpMkLst>
-        </pc:cxnChg>
-        <pc:cxnChg chg="add del">
-          <ac:chgData name="Karthika Vellingiri" userId="2f791443-b2b6-40db-8581-89f0c0794d11" providerId="ADAL" clId="{272279B0-242C-4D01-9A5D-29699CA56103}" dt="2025-08-10T15:18:36.689" v="492" actId="26606"/>
-          <ac:cxnSpMkLst>
-            <pc:docMk/>
-            <pc:sldMk cId="99664021" sldId="261"/>
-            <ac:cxnSpMk id="61" creationId="{5AB158E9-1B40-4CD6-95F0-95CA11DF7B7A}"/>
-          </ac:cxnSpMkLst>
-        </pc:cxnChg>
-        <pc:cxnChg chg="add del">
-          <ac:chgData name="Karthika Vellingiri" userId="2f791443-b2b6-40db-8581-89f0c0794d11" providerId="ADAL" clId="{272279B0-242C-4D01-9A5D-29699CA56103}" dt="2025-08-10T15:19:11.869" v="503" actId="26606"/>
-          <ac:cxnSpMkLst>
-            <pc:docMk/>
-            <pc:sldMk cId="99664021" sldId="261"/>
-            <ac:cxnSpMk id="80" creationId="{9C21570E-E159-49A6-9891-FA397B7A92D3}"/>
-          </ac:cxnSpMkLst>
-        </pc:cxnChg>
-        <pc:cxnChg chg="add del">
-          <ac:chgData name="Karthika Vellingiri" userId="2f791443-b2b6-40db-8581-89f0c0794d11" providerId="ADAL" clId="{272279B0-242C-4D01-9A5D-29699CA56103}" dt="2025-08-10T15:18:58.256" v="496" actId="26606"/>
-          <ac:cxnSpMkLst>
-            <pc:docMk/>
-            <pc:sldMk cId="99664021" sldId="261"/>
-            <ac:cxnSpMk id="89" creationId="{9C21570E-E159-49A6-9891-FA397B7A92D3}"/>
-          </ac:cxnSpMkLst>
-        </pc:cxnChg>
-        <pc:cxnChg chg="add del">
-          <ac:chgData name="Karthika Vellingiri" userId="2f791443-b2b6-40db-8581-89f0c0794d11" providerId="ADAL" clId="{272279B0-242C-4D01-9A5D-29699CA56103}" dt="2025-08-10T15:19:05.001" v="498" actId="26606"/>
-          <ac:cxnSpMkLst>
-            <pc:docMk/>
-            <pc:sldMk cId="99664021" sldId="261"/>
-            <ac:cxnSpMk id="97" creationId="{9C21570E-E159-49A6-9891-FA397B7A92D3}"/>
-          </ac:cxnSpMkLst>
-        </pc:cxnChg>
-        <pc:cxnChg chg="del">
-          <ac:chgData name="Karthika Vellingiri" userId="2f791443-b2b6-40db-8581-89f0c0794d11" providerId="ADAL" clId="{272279B0-242C-4D01-9A5D-29699CA56103}" dt="2025-08-10T15:19:20.442" v="505" actId="26606"/>
-          <ac:cxnSpMkLst>
-            <pc:docMk/>
-            <pc:sldMk cId="99664021" sldId="261"/>
-            <ac:cxnSpMk id="107" creationId="{9020DCC9-F851-4562-BB20-1AB3C51BFD08}"/>
-          </ac:cxnSpMkLst>
-        </pc:cxnChg>
-        <pc:cxnChg chg="add">
-          <ac:chgData name="Karthika Vellingiri" userId="2f791443-b2b6-40db-8581-89f0c0794d11" providerId="ADAL" clId="{272279B0-242C-4D01-9A5D-29699CA56103}" dt="2025-08-10T15:19:20.442" v="505" actId="26606"/>
-          <ac:cxnSpMkLst>
-            <pc:docMk/>
-            <pc:sldMk cId="99664021" sldId="261"/>
-            <ac:cxnSpMk id="128" creationId="{5AB158E9-1B40-4CD6-95F0-95CA11DF7B7A}"/>
-          </ac:cxnSpMkLst>
-        </pc:cxnChg>
-      </pc:sldChg>
-      <pc:sldChg chg="modSp">
-        <pc:chgData name="Karthika Vellingiri" userId="2f791443-b2b6-40db-8581-89f0c0794d11" providerId="ADAL" clId="{272279B0-242C-4D01-9A5D-29699CA56103}" dt="2025-08-10T14:51:48.791" v="343"/>
-        <pc:sldMkLst>
-          <pc:docMk/>
-          <pc:sldMk cId="3339959301" sldId="262"/>
-        </pc:sldMkLst>
-        <pc:spChg chg="mod">
-          <ac:chgData name="Karthika Vellingiri" userId="2f791443-b2b6-40db-8581-89f0c0794d11" providerId="ADAL" clId="{272279B0-242C-4D01-9A5D-29699CA56103}" dt="2025-08-10T14:51:48.791" v="343"/>
-          <ac:spMkLst>
-            <pc:docMk/>
-            <pc:sldMk cId="3339959301" sldId="262"/>
-            <ac:spMk id="2" creationId="{46762B97-424A-31C0-8D65-B0DF2D786B76}"/>
-          </ac:spMkLst>
-        </pc:spChg>
-      </pc:sldChg>
-      <pc:sldChg chg="addSp delSp modSp add del mod">
-        <pc:chgData name="Karthika Vellingiri" userId="2f791443-b2b6-40db-8581-89f0c0794d11" providerId="ADAL" clId="{272279B0-242C-4D01-9A5D-29699CA56103}" dt="2025-08-10T14:51:48.791" v="343"/>
-        <pc:sldMkLst>
-          <pc:docMk/>
-          <pc:sldMk cId="764493399" sldId="263"/>
-        </pc:sldMkLst>
-        <pc:spChg chg="mod">
-          <ac:chgData name="Karthika Vellingiri" userId="2f791443-b2b6-40db-8581-89f0c0794d11" providerId="ADAL" clId="{272279B0-242C-4D01-9A5D-29699CA56103}" dt="2025-08-10T14:01:13.178" v="30" actId="20577"/>
-          <ac:spMkLst>
-            <pc:docMk/>
-            <pc:sldMk cId="764493399" sldId="263"/>
-            <ac:spMk id="2" creationId="{92E83C90-3FB7-2966-57D9-988503768DC9}"/>
-          </ac:spMkLst>
-        </pc:spChg>
-        <pc:spChg chg="add del mod">
-          <ac:chgData name="Karthika Vellingiri" userId="2f791443-b2b6-40db-8581-89f0c0794d11" providerId="ADAL" clId="{272279B0-242C-4D01-9A5D-29699CA56103}" dt="2025-08-10T14:00:12.315" v="8" actId="931"/>
-          <ac:spMkLst>
-            <pc:docMk/>
-            <pc:sldMk cId="764493399" sldId="263"/>
-            <ac:spMk id="4" creationId="{4E5E3AF8-8D20-C819-CC99-CB8A977271C1}"/>
-          </ac:spMkLst>
-        </pc:spChg>
-        <pc:picChg chg="del">
-          <ac:chgData name="Karthika Vellingiri" userId="2f791443-b2b6-40db-8581-89f0c0794d11" providerId="ADAL" clId="{272279B0-242C-4D01-9A5D-29699CA56103}" dt="2025-08-10T14:00:00.333" v="7" actId="478"/>
-          <ac:picMkLst>
-            <pc:docMk/>
-            <pc:sldMk cId="764493399" sldId="263"/>
-            <ac:picMk id="5" creationId="{CD8F9DAA-4E53-327A-0761-CE19E30D3098}"/>
-          </ac:picMkLst>
-        </pc:picChg>
-        <pc:picChg chg="add mod ord">
-          <ac:chgData name="Karthika Vellingiri" userId="2f791443-b2b6-40db-8581-89f0c0794d11" providerId="ADAL" clId="{272279B0-242C-4D01-9A5D-29699CA56103}" dt="2025-08-10T14:51:48.791" v="343"/>
-          <ac:picMkLst>
-            <pc:docMk/>
-            <pc:sldMk cId="764493399" sldId="263"/>
-            <ac:picMk id="7" creationId="{BA39879C-A1C8-46B0-B5DD-98E77F69FEBA}"/>
-          </ac:picMkLst>
-        </pc:picChg>
-      </pc:sldChg>
-      <pc:sldChg chg="addSp delSp modTransition modAnim delDesignElem">
-        <pc:chgData name="Karthika Vellingiri" userId="2f791443-b2b6-40db-8581-89f0c0794d11" providerId="ADAL" clId="{272279B0-242C-4D01-9A5D-29699CA56103}" dt="2025-08-10T15:20:02.246" v="507"/>
-        <pc:sldMkLst>
-          <pc:docMk/>
-          <pc:sldMk cId="335060284" sldId="264"/>
-        </pc:sldMkLst>
-        <pc:spChg chg="add del">
-          <ac:chgData name="Karthika Vellingiri" userId="2f791443-b2b6-40db-8581-89f0c0794d11" providerId="ADAL" clId="{272279B0-242C-4D01-9A5D-29699CA56103}" dt="2025-08-10T14:19:22.757" v="110"/>
-          <ac:spMkLst>
-            <pc:docMk/>
-            <pc:sldMk cId="335060284" sldId="264"/>
-            <ac:spMk id="9" creationId="{DCF4EB5C-ED25-4675-8255-2F5B12CFFCF0}"/>
-          </ac:spMkLst>
-        </pc:spChg>
-        <pc:spChg chg="add del">
-          <ac:chgData name="Karthika Vellingiri" userId="2f791443-b2b6-40db-8581-89f0c0794d11" providerId="ADAL" clId="{272279B0-242C-4D01-9A5D-29699CA56103}" dt="2025-08-10T14:19:22.757" v="110"/>
-          <ac:spMkLst>
-            <pc:docMk/>
-            <pc:sldMk cId="335060284" sldId="264"/>
-            <ac:spMk id="11" creationId="{9514EC6E-A557-42A2-BCDC-3ABFFC5E564D}"/>
-          </ac:spMkLst>
-        </pc:spChg>
-        <pc:spChg chg="add del">
-          <ac:chgData name="Karthika Vellingiri" userId="2f791443-b2b6-40db-8581-89f0c0794d11" providerId="ADAL" clId="{272279B0-242C-4D01-9A5D-29699CA56103}" dt="2025-08-10T14:19:22.757" v="110"/>
-          <ac:spMkLst>
-            <pc:docMk/>
-            <pc:sldMk cId="335060284" sldId="264"/>
-            <ac:spMk id="13" creationId="{905482C9-EB42-4BFE-95BF-7FD661F07657}"/>
-          </ac:spMkLst>
-        </pc:spChg>
-        <pc:spChg chg="add del">
-          <ac:chgData name="Karthika Vellingiri" userId="2f791443-b2b6-40db-8581-89f0c0794d11" providerId="ADAL" clId="{272279B0-242C-4D01-9A5D-29699CA56103}" dt="2025-08-10T14:19:22.757" v="110"/>
-          <ac:spMkLst>
-            <pc:docMk/>
-            <pc:sldMk cId="335060284" sldId="264"/>
-            <ac:spMk id="15" creationId="{7539E646-A625-4A26-86ED-BD90EDD329F7}"/>
-          </ac:spMkLst>
-        </pc:spChg>
-        <pc:spChg chg="add del">
-          <ac:chgData name="Karthika Vellingiri" userId="2f791443-b2b6-40db-8581-89f0c0794d11" providerId="ADAL" clId="{272279B0-242C-4D01-9A5D-29699CA56103}" dt="2025-08-10T14:19:22.757" v="110"/>
-          <ac:spMkLst>
-            <pc:docMk/>
-            <pc:sldMk cId="335060284" sldId="264"/>
-            <ac:spMk id="17" creationId="{8E019540-1104-4B12-9F83-45F58674186F}"/>
-          </ac:spMkLst>
-        </pc:spChg>
-        <pc:spChg chg="add del">
-          <ac:chgData name="Karthika Vellingiri" userId="2f791443-b2b6-40db-8581-89f0c0794d11" providerId="ADAL" clId="{272279B0-242C-4D01-9A5D-29699CA56103}" dt="2025-08-10T14:19:22.757" v="110"/>
-          <ac:spMkLst>
-            <pc:docMk/>
-            <pc:sldMk cId="335060284" sldId="264"/>
-            <ac:spMk id="19" creationId="{3580CFD6-E44A-486A-9E73-D8D948F78A34}"/>
-          </ac:spMkLst>
-        </pc:spChg>
-      </pc:sldChg>
-      <pc:sldChg chg="del">
-        <pc:chgData name="Karthika Vellingiri" userId="2f791443-b2b6-40db-8581-89f0c0794d11" providerId="ADAL" clId="{272279B0-242C-4D01-9A5D-29699CA56103}" dt="2025-08-10T13:59:50.396" v="1" actId="47"/>
-        <pc:sldMkLst>
-          <pc:docMk/>
-          <pc:sldMk cId="311824088" sldId="265"/>
-        </pc:sldMkLst>
-      </pc:sldChg>
-      <pc:sldChg chg="addSp delSp modSp new mod setBg modClrScheme setClrOvrMap delDesignElem chgLayout modNotesTx">
-        <pc:chgData name="Karthika Vellingiri" userId="2f791443-b2b6-40db-8581-89f0c0794d11" providerId="ADAL" clId="{272279B0-242C-4D01-9A5D-29699CA56103}" dt="2025-08-10T15:24:38.364" v="633" actId="20577"/>
-        <pc:sldMkLst>
-          <pc:docMk/>
-          <pc:sldMk cId="2970176506" sldId="265"/>
-        </pc:sldMkLst>
-        <pc:spChg chg="mod ord">
-          <ac:chgData name="Karthika Vellingiri" userId="2f791443-b2b6-40db-8581-89f0c0794d11" providerId="ADAL" clId="{272279B0-242C-4D01-9A5D-29699CA56103}" dt="2025-08-10T14:52:39.527" v="355" actId="26606"/>
-          <ac:spMkLst>
-            <pc:docMk/>
-            <pc:sldMk cId="2970176506" sldId="265"/>
-            <ac:spMk id="2" creationId="{889D13D7-1746-FC83-8872-3FB8C85E21A7}"/>
-          </ac:spMkLst>
-        </pc:spChg>
-        <pc:spChg chg="del">
-          <ac:chgData name="Karthika Vellingiri" userId="2f791443-b2b6-40db-8581-89f0c0794d11" providerId="ADAL" clId="{272279B0-242C-4D01-9A5D-29699CA56103}" dt="2025-08-10T14:11:56.781" v="34" actId="931"/>
-          <ac:spMkLst>
-            <pc:docMk/>
-            <pc:sldMk cId="2970176506" sldId="265"/>
-            <ac:spMk id="3" creationId="{6326E7AA-50F5-54FC-A108-1C1EB732A1C9}"/>
-          </ac:spMkLst>
-        </pc:spChg>
-        <pc:spChg chg="add del mod ord">
-          <ac:chgData name="Karthika Vellingiri" userId="2f791443-b2b6-40db-8581-89f0c0794d11" providerId="ADAL" clId="{272279B0-242C-4D01-9A5D-29699CA56103}" dt="2025-08-10T15:04:58.191" v="461" actId="20577"/>
-          <ac:spMkLst>
-            <pc:docMk/>
-            <pc:sldMk cId="2970176506" sldId="265"/>
-            <ac:spMk id="6" creationId="{4C28C6BB-5229-FDD0-17C6-714FA1353630}"/>
-          </ac:spMkLst>
-        </pc:spChg>
-        <pc:spChg chg="add del">
-          <ac:chgData name="Karthika Vellingiri" userId="2f791443-b2b6-40db-8581-89f0c0794d11" providerId="ADAL" clId="{272279B0-242C-4D01-9A5D-29699CA56103}" dt="2025-08-10T14:22:27.298" v="161" actId="26606"/>
-          <ac:spMkLst>
-            <pc:docMk/>
-            <pc:sldMk cId="2970176506" sldId="265"/>
-            <ac:spMk id="8" creationId="{7A5FC171-5EF1-470A-B19B-DB937973D2A7}"/>
-          </ac:spMkLst>
-        </pc:spChg>
-        <pc:spChg chg="add del">
-          <ac:chgData name="Karthika Vellingiri" userId="2f791443-b2b6-40db-8581-89f0c0794d11" providerId="ADAL" clId="{272279B0-242C-4D01-9A5D-29699CA56103}" dt="2025-08-10T14:12:15.440" v="40" actId="26606"/>
-          <ac:spMkLst>
-            <pc:docMk/>
-            <pc:sldMk cId="2970176506" sldId="265"/>
-            <ac:spMk id="9" creationId="{87D2B3DE-D1E3-6237-268B-C587BB064B7B}"/>
-          </ac:spMkLst>
-        </pc:spChg>
-        <pc:spChg chg="add del">
-          <ac:chgData name="Karthika Vellingiri" userId="2f791443-b2b6-40db-8581-89f0c0794d11" providerId="ADAL" clId="{272279B0-242C-4D01-9A5D-29699CA56103}" dt="2025-08-10T14:12:04.045" v="38" actId="26606"/>
-          <ac:spMkLst>
-            <pc:docMk/>
-            <pc:sldMk cId="2970176506" sldId="265"/>
-            <ac:spMk id="10" creationId="{DD651B61-325E-4E73-8445-38B0DE8AAAB6}"/>
-          </ac:spMkLst>
-        </pc:spChg>
-        <pc:spChg chg="add del">
-          <ac:chgData name="Karthika Vellingiri" userId="2f791443-b2b6-40db-8581-89f0c0794d11" providerId="ADAL" clId="{272279B0-242C-4D01-9A5D-29699CA56103}" dt="2025-08-10T14:21:19.589" v="148" actId="26606"/>
-          <ac:spMkLst>
-            <pc:docMk/>
-            <pc:sldMk cId="2970176506" sldId="265"/>
-            <ac:spMk id="11" creationId="{3F4C104D-5F30-4811-9376-566B26E4719A}"/>
-          </ac:spMkLst>
-        </pc:spChg>
-        <pc:spChg chg="add del">
-          <ac:chgData name="Karthika Vellingiri" userId="2f791443-b2b6-40db-8581-89f0c0794d11" providerId="ADAL" clId="{272279B0-242C-4D01-9A5D-29699CA56103}" dt="2025-08-10T14:12:04.045" v="38" actId="26606"/>
-          <ac:spMkLst>
-            <pc:docMk/>
-            <pc:sldMk cId="2970176506" sldId="265"/>
-            <ac:spMk id="12" creationId="{B42E5253-D3AC-4AC2-B766-8B34F13C2F5E}"/>
-          </ac:spMkLst>
-        </pc:spChg>
-        <pc:spChg chg="add del">
-          <ac:chgData name="Karthika Vellingiri" userId="2f791443-b2b6-40db-8581-89f0c0794d11" providerId="ADAL" clId="{272279B0-242C-4D01-9A5D-29699CA56103}" dt="2025-08-10T14:21:19.589" v="148" actId="26606"/>
-          <ac:spMkLst>
-            <pc:docMk/>
-            <pc:sldMk cId="2970176506" sldId="265"/>
-            <ac:spMk id="13" creationId="{0815E34B-5D02-4E01-A936-E8E1C0AB6F12}"/>
-          </ac:spMkLst>
-        </pc:spChg>
-        <pc:spChg chg="add del">
-          <ac:chgData name="Karthika Vellingiri" userId="2f791443-b2b6-40db-8581-89f0c0794d11" providerId="ADAL" clId="{272279B0-242C-4D01-9A5D-29699CA56103}" dt="2025-08-10T14:12:04.045" v="38" actId="26606"/>
-          <ac:spMkLst>
-            <pc:docMk/>
-            <pc:sldMk cId="2970176506" sldId="265"/>
-            <ac:spMk id="14" creationId="{10AE8D57-436A-4073-9A75-15BB5949F8B4}"/>
-          </ac:spMkLst>
-        </pc:spChg>
-        <pc:spChg chg="add del">
-          <ac:chgData name="Karthika Vellingiri" userId="2f791443-b2b6-40db-8581-89f0c0794d11" providerId="ADAL" clId="{272279B0-242C-4D01-9A5D-29699CA56103}" dt="2025-08-10T14:21:19.589" v="148" actId="26606"/>
-          <ac:spMkLst>
-            <pc:docMk/>
-            <pc:sldMk cId="2970176506" sldId="265"/>
-            <ac:spMk id="15" creationId="{7DE3414B-B032-4710-A468-D3285E38C5FF}"/>
-          </ac:spMkLst>
-        </pc:spChg>
-        <pc:spChg chg="add del">
-          <ac:chgData name="Karthika Vellingiri" userId="2f791443-b2b6-40db-8581-89f0c0794d11" providerId="ADAL" clId="{272279B0-242C-4D01-9A5D-29699CA56103}" dt="2025-08-10T14:12:04.045" v="38" actId="26606"/>
-          <ac:spMkLst>
-            <pc:docMk/>
-            <pc:sldMk cId="2970176506" sldId="265"/>
-            <ac:spMk id="16" creationId="{E2852671-8EB6-4EAF-8AF8-65CF3FD66456}"/>
-          </ac:spMkLst>
-        </pc:spChg>
-        <pc:spChg chg="add del">
-          <ac:chgData name="Karthika Vellingiri" userId="2f791443-b2b6-40db-8581-89f0c0794d11" providerId="ADAL" clId="{272279B0-242C-4D01-9A5D-29699CA56103}" dt="2025-08-10T14:22:33.108" v="165" actId="26606"/>
-          <ac:spMkLst>
-            <pc:docMk/>
-            <pc:sldMk cId="2970176506" sldId="265"/>
-            <ac:spMk id="17" creationId="{584FD149-94B6-4257-AB5B-C478E6038F9E}"/>
-          </ac:spMkLst>
-        </pc:spChg>
-        <pc:spChg chg="add del">
-          <ac:chgData name="Karthika Vellingiri" userId="2f791443-b2b6-40db-8581-89f0c0794d11" providerId="ADAL" clId="{272279B0-242C-4D01-9A5D-29699CA56103}" dt="2025-08-10T14:12:04.045" v="38" actId="26606"/>
-          <ac:spMkLst>
-            <pc:docMk/>
-            <pc:sldMk cId="2970176506" sldId="265"/>
-            <ac:spMk id="18" creationId="{963FC0CD-F19B-4D9C-9C47-EB7E9D16E444}"/>
-          </ac:spMkLst>
-        </pc:spChg>
-        <pc:spChg chg="add del">
-          <ac:chgData name="Karthika Vellingiri" userId="2f791443-b2b6-40db-8581-89f0c0794d11" providerId="ADAL" clId="{272279B0-242C-4D01-9A5D-29699CA56103}" dt="2025-08-10T14:22:33.108" v="165" actId="26606"/>
-          <ac:spMkLst>
-            <pc:docMk/>
-            <pc:sldMk cId="2970176506" sldId="265"/>
-            <ac:spMk id="19" creationId="{4743F4F4-276D-4A4D-930A-0530386F9820}"/>
-          </ac:spMkLst>
-        </pc:spChg>
-        <pc:spChg chg="add del">
-          <ac:chgData name="Karthika Vellingiri" userId="2f791443-b2b6-40db-8581-89f0c0794d11" providerId="ADAL" clId="{272279B0-242C-4D01-9A5D-29699CA56103}" dt="2025-08-10T14:12:04.045" v="38" actId="26606"/>
-          <ac:spMkLst>
-            <pc:docMk/>
-            <pc:sldMk cId="2970176506" sldId="265"/>
-            <ac:spMk id="20" creationId="{2E70159E-5269-4C18-AA0B-D50513DB3B3C}"/>
-          </ac:spMkLst>
-        </pc:spChg>
-        <pc:spChg chg="add del">
-          <ac:chgData name="Karthika Vellingiri" userId="2f791443-b2b6-40db-8581-89f0c0794d11" providerId="ADAL" clId="{272279B0-242C-4D01-9A5D-29699CA56103}" dt="2025-08-10T14:22:33.108" v="165" actId="26606"/>
-          <ac:spMkLst>
-            <pc:docMk/>
-            <pc:sldMk cId="2970176506" sldId="265"/>
-            <ac:spMk id="21" creationId="{AA1386B8-14BD-4682-B537-BC9027D6EDCB}"/>
-          </ac:spMkLst>
-        </pc:spChg>
-        <pc:spChg chg="add del">
-          <ac:chgData name="Karthika Vellingiri" userId="2f791443-b2b6-40db-8581-89f0c0794d11" providerId="ADAL" clId="{272279B0-242C-4D01-9A5D-29699CA56103}" dt="2025-08-10T14:12:04.045" v="38" actId="26606"/>
-          <ac:spMkLst>
-            <pc:docMk/>
-            <pc:sldMk cId="2970176506" sldId="265"/>
-            <ac:spMk id="22" creationId="{BBBE9C8C-98B2-41C2-B47B-9A396CBA2326}"/>
-          </ac:spMkLst>
-        </pc:spChg>
-        <pc:spChg chg="add del">
-          <ac:chgData name="Karthika Vellingiri" userId="2f791443-b2b6-40db-8581-89f0c0794d11" providerId="ADAL" clId="{272279B0-242C-4D01-9A5D-29699CA56103}" dt="2025-08-10T14:22:36.791" v="170"/>
-          <ac:spMkLst>
-            <pc:docMk/>
-            <pc:sldMk cId="2970176506" sldId="265"/>
-            <ac:spMk id="23" creationId="{E9D11FD5-487C-4A6B-836F-3831DC830FB7}"/>
-          </ac:spMkLst>
-        </pc:spChg>
-        <pc:spChg chg="add del">
-          <ac:chgData name="Karthika Vellingiri" userId="2f791443-b2b6-40db-8581-89f0c0794d11" providerId="ADAL" clId="{272279B0-242C-4D01-9A5D-29699CA56103}" dt="2025-08-10T14:12:04.045" v="38" actId="26606"/>
-          <ac:spMkLst>
-            <pc:docMk/>
-            <pc:sldMk cId="2970176506" sldId="265"/>
-            <ac:spMk id="24" creationId="{B2ECCA3D-5ECA-4A8B-B9D7-CE6DEB72B952}"/>
-          </ac:spMkLst>
-        </pc:spChg>
-        <pc:spChg chg="add del">
-          <ac:chgData name="Karthika Vellingiri" userId="2f791443-b2b6-40db-8581-89f0c0794d11" providerId="ADAL" clId="{272279B0-242C-4D01-9A5D-29699CA56103}" dt="2025-08-10T14:22:36.791" v="170"/>
-          <ac:spMkLst>
-            <pc:docMk/>
-            <pc:sldMk cId="2970176506" sldId="265"/>
-            <ac:spMk id="25" creationId="{99765169-F70D-4841-BE65-62E10CBED84D}"/>
-          </ac:spMkLst>
-        </pc:spChg>
-        <pc:spChg chg="add del">
-          <ac:chgData name="Karthika Vellingiri" userId="2f791443-b2b6-40db-8581-89f0c0794d11" providerId="ADAL" clId="{272279B0-242C-4D01-9A5D-29699CA56103}" dt="2025-08-10T14:12:15.440" v="40" actId="26606"/>
-          <ac:spMkLst>
-            <pc:docMk/>
-            <pc:sldMk cId="2970176506" sldId="265"/>
-            <ac:spMk id="26" creationId="{E9751CB9-7B25-4EB8-9A6F-82F822549F12}"/>
-          </ac:spMkLst>
-        </pc:spChg>
-        <pc:spChg chg="add del">
-          <ac:chgData name="Karthika Vellingiri" userId="2f791443-b2b6-40db-8581-89f0c0794d11" providerId="ADAL" clId="{272279B0-242C-4D01-9A5D-29699CA56103}" dt="2025-08-10T14:12:15.440" v="40" actId="26606"/>
-          <ac:spMkLst>
-            <pc:docMk/>
-            <pc:sldMk cId="2970176506" sldId="265"/>
-            <ac:spMk id="27" creationId="{E1317383-CF3B-4B02-9512-BECBEF6362A4}"/>
-          </ac:spMkLst>
-        </pc:spChg>
-        <pc:spChg chg="add del">
-          <ac:chgData name="Karthika Vellingiri" userId="2f791443-b2b6-40db-8581-89f0c0794d11" providerId="ADAL" clId="{272279B0-242C-4D01-9A5D-29699CA56103}" dt="2025-08-10T14:12:15.440" v="40" actId="26606"/>
-          <ac:spMkLst>
-            <pc:docMk/>
-            <pc:sldMk cId="2970176506" sldId="265"/>
-            <ac:spMk id="28" creationId="{B1D4C7A0-6DF2-4F2D-A45D-F111582974C7}"/>
-          </ac:spMkLst>
-        </pc:spChg>
-        <pc:spChg chg="add del">
-          <ac:chgData name="Karthika Vellingiri" userId="2f791443-b2b6-40db-8581-89f0c0794d11" providerId="ADAL" clId="{272279B0-242C-4D01-9A5D-29699CA56103}" dt="2025-08-10T14:12:15.440" v="40" actId="26606"/>
-          <ac:spMkLst>
-            <pc:docMk/>
-            <pc:sldMk cId="2970176506" sldId="265"/>
-            <ac:spMk id="29" creationId="{DBF3943D-BCB6-4B31-809D-A005686483B4}"/>
-          </ac:spMkLst>
-        </pc:spChg>
-        <pc:spChg chg="add del">
-          <ac:chgData name="Karthika Vellingiri" userId="2f791443-b2b6-40db-8581-89f0c0794d11" providerId="ADAL" clId="{272279B0-242C-4D01-9A5D-29699CA56103}" dt="2025-08-10T14:12:15.440" v="40" actId="26606"/>
-          <ac:spMkLst>
-            <pc:docMk/>
-            <pc:sldMk cId="2970176506" sldId="265"/>
-            <ac:spMk id="30" creationId="{39373A6F-2E1F-4613-8E1D-D68057D29F31}"/>
-          </ac:spMkLst>
-        </pc:spChg>
-        <pc:spChg chg="add del">
-          <ac:chgData name="Karthika Vellingiri" userId="2f791443-b2b6-40db-8581-89f0c0794d11" providerId="ADAL" clId="{272279B0-242C-4D01-9A5D-29699CA56103}" dt="2025-08-10T14:22:36.791" v="170"/>
-          <ac:spMkLst>
-            <pc:docMk/>
-            <pc:sldMk cId="2970176506" sldId="265"/>
-            <ac:spMk id="31" creationId="{2A2CC818-8106-45C0-93D5-7051F99F2C81}"/>
-          </ac:spMkLst>
-        </pc:spChg>
-        <pc:spChg chg="add del">
-          <ac:chgData name="Karthika Vellingiri" userId="2f791443-b2b6-40db-8581-89f0c0794d11" providerId="ADAL" clId="{272279B0-242C-4D01-9A5D-29699CA56103}" dt="2025-08-10T14:14:47.974" v="53" actId="26606"/>
-          <ac:spMkLst>
-            <pc:docMk/>
-            <pc:sldMk cId="2970176506" sldId="265"/>
-            <ac:spMk id="32" creationId="{F875149D-F692-45DA-8324-D5E0193D5FC4}"/>
-          </ac:spMkLst>
-        </pc:spChg>
-        <pc:spChg chg="add del">
-          <ac:chgData name="Karthika Vellingiri" userId="2f791443-b2b6-40db-8581-89f0c0794d11" providerId="ADAL" clId="{272279B0-242C-4D01-9A5D-29699CA56103}" dt="2025-08-10T14:14:47.974" v="53" actId="26606"/>
-          <ac:spMkLst>
-            <pc:docMk/>
-            <pc:sldMk cId="2970176506" sldId="265"/>
-            <ac:spMk id="33" creationId="{C0B19935-C760-4698-9DD1-973C8A428D26}"/>
-          </ac:spMkLst>
-        </pc:spChg>
-        <pc:spChg chg="add del">
-          <ac:chgData name="Karthika Vellingiri" userId="2f791443-b2b6-40db-8581-89f0c0794d11" providerId="ADAL" clId="{272279B0-242C-4D01-9A5D-29699CA56103}" dt="2025-08-10T14:14:47.974" v="53" actId="26606"/>
-          <ac:spMkLst>
-            <pc:docMk/>
-            <pc:sldMk cId="2970176506" sldId="265"/>
-            <ac:spMk id="34" creationId="{08990612-E008-4F02-AEBB-B140BE753558}"/>
-          </ac:spMkLst>
-        </pc:spChg>
-        <pc:spChg chg="add del">
-          <ac:chgData name="Karthika Vellingiri" userId="2f791443-b2b6-40db-8581-89f0c0794d11" providerId="ADAL" clId="{272279B0-242C-4D01-9A5D-29699CA56103}" dt="2025-08-10T14:14:47.974" v="53" actId="26606"/>
-          <ac:spMkLst>
-            <pc:docMk/>
-            <pc:sldMk cId="2970176506" sldId="265"/>
-            <ac:spMk id="35" creationId="{A310A41F-3A14-4150-B6CF-0A577DDDEAD2}"/>
-          </ac:spMkLst>
-        </pc:spChg>
-        <pc:spChg chg="add del">
-          <ac:chgData name="Karthika Vellingiri" userId="2f791443-b2b6-40db-8581-89f0c0794d11" providerId="ADAL" clId="{272279B0-242C-4D01-9A5D-29699CA56103}" dt="2025-08-10T14:14:47.974" v="53" actId="26606"/>
-          <ac:spMkLst>
-            <pc:docMk/>
-            <pc:sldMk cId="2970176506" sldId="265"/>
-            <ac:spMk id="36" creationId="{7B89EEFD-93BC-4ACF-962C-E6279E72B00B}"/>
-          </ac:spMkLst>
-        </pc:spChg>
-        <pc:spChg chg="add del mod">
-          <ac:chgData name="Karthika Vellingiri" userId="2f791443-b2b6-40db-8581-89f0c0794d11" providerId="ADAL" clId="{272279B0-242C-4D01-9A5D-29699CA56103}" dt="2025-08-10T14:14:45.260" v="52"/>
-          <ac:spMkLst>
-            <pc:docMk/>
-            <pc:sldMk cId="2970176506" sldId="265"/>
-            <ac:spMk id="37" creationId="{6F715677-7B56-C618-58CC-90140716BFA5}"/>
-          </ac:spMkLst>
-        </pc:spChg>
-        <pc:spChg chg="add del">
-          <ac:chgData name="Karthika Vellingiri" userId="2f791443-b2b6-40db-8581-89f0c0794d11" providerId="ADAL" clId="{272279B0-242C-4D01-9A5D-29699CA56103}" dt="2025-08-10T14:50:09.402" v="312"/>
-          <ac:spMkLst>
-            <pc:docMk/>
-            <pc:sldMk cId="2970176506" sldId="265"/>
-            <ac:spMk id="38" creationId="{3F4C104D-5F30-4811-9376-566B26E4719A}"/>
-          </ac:spMkLst>
-        </pc:spChg>
-        <pc:spChg chg="add del">
-          <ac:chgData name="Karthika Vellingiri" userId="2f791443-b2b6-40db-8581-89f0c0794d11" providerId="ADAL" clId="{272279B0-242C-4D01-9A5D-29699CA56103}" dt="2025-08-10T14:50:09.402" v="312"/>
-          <ac:spMkLst>
-            <pc:docMk/>
-            <pc:sldMk cId="2970176506" sldId="265"/>
-            <ac:spMk id="39" creationId="{0815E34B-5D02-4E01-A936-E8E1C0AB6F12}"/>
-          </ac:spMkLst>
-        </pc:spChg>
-        <pc:spChg chg="del">
-          <ac:chgData name="Karthika Vellingiri" userId="2f791443-b2b6-40db-8581-89f0c0794d11" providerId="ADAL" clId="{272279B0-242C-4D01-9A5D-29699CA56103}" dt="2025-08-10T14:14:58.995" v="55" actId="26606"/>
-          <ac:spMkLst>
-            <pc:docMk/>
-            <pc:sldMk cId="2970176506" sldId="265"/>
-            <ac:spMk id="41" creationId="{F875149D-F692-45DA-8324-D5E0193D5FC4}"/>
-          </ac:spMkLst>
-        </pc:spChg>
-        <pc:spChg chg="add del">
-          <ac:chgData name="Karthika Vellingiri" userId="2f791443-b2b6-40db-8581-89f0c0794d11" providerId="ADAL" clId="{272279B0-242C-4D01-9A5D-29699CA56103}" dt="2025-08-10T14:50:09.402" v="312"/>
-          <ac:spMkLst>
-            <pc:docMk/>
-            <pc:sldMk cId="2970176506" sldId="265"/>
-            <ac:spMk id="42" creationId="{7DE3414B-B032-4710-A468-D3285E38C5FF}"/>
-          </ac:spMkLst>
-        </pc:spChg>
-        <pc:spChg chg="add del">
-          <ac:chgData name="Karthika Vellingiri" userId="2f791443-b2b6-40db-8581-89f0c0794d11" providerId="ADAL" clId="{272279B0-242C-4D01-9A5D-29699CA56103}" dt="2025-08-10T14:14:58.995" v="55" actId="26606"/>
-          <ac:spMkLst>
-            <pc:docMk/>
-            <pc:sldMk cId="2970176506" sldId="265"/>
-            <ac:spMk id="43" creationId="{C0B19935-C760-4698-9DD1-973C8A428D26}"/>
-          </ac:spMkLst>
-        </pc:spChg>
-        <pc:spChg chg="add del">
-          <ac:chgData name="Karthika Vellingiri" userId="2f791443-b2b6-40db-8581-89f0c0794d11" providerId="ADAL" clId="{272279B0-242C-4D01-9A5D-29699CA56103}" dt="2025-08-10T14:23:40.364" v="188" actId="26606"/>
-          <ac:spMkLst>
-            <pc:docMk/>
-            <pc:sldMk cId="2970176506" sldId="265"/>
-            <ac:spMk id="44" creationId="{1EDD21E1-BAF0-4314-AB31-82ECB8AC9EA9}"/>
-          </ac:spMkLst>
-        </pc:spChg>
-        <pc:spChg chg="add del">
-          <ac:chgData name="Karthika Vellingiri" userId="2f791443-b2b6-40db-8581-89f0c0794d11" providerId="ADAL" clId="{272279B0-242C-4D01-9A5D-29699CA56103}" dt="2025-08-10T14:14:58.995" v="55" actId="26606"/>
-          <ac:spMkLst>
-            <pc:docMk/>
-            <pc:sldMk cId="2970176506" sldId="265"/>
-            <ac:spMk id="45" creationId="{08990612-E008-4F02-AEBB-B140BE753558}"/>
-          </ac:spMkLst>
-        </pc:spChg>
-        <pc:spChg chg="add del">
-          <ac:chgData name="Karthika Vellingiri" userId="2f791443-b2b6-40db-8581-89f0c0794d11" providerId="ADAL" clId="{272279B0-242C-4D01-9A5D-29699CA56103}" dt="2025-08-10T14:23:40.364" v="188" actId="26606"/>
-          <ac:spMkLst>
-            <pc:docMk/>
-            <pc:sldMk cId="2970176506" sldId="265"/>
-            <ac:spMk id="46" creationId="{FDC8619C-F25D-468E-95FA-2A2151D7DDD2}"/>
-          </ac:spMkLst>
-        </pc:spChg>
-        <pc:spChg chg="add del">
-          <ac:chgData name="Karthika Vellingiri" userId="2f791443-b2b6-40db-8581-89f0c0794d11" providerId="ADAL" clId="{272279B0-242C-4D01-9A5D-29699CA56103}" dt="2025-08-10T14:14:58.995" v="55" actId="26606"/>
-          <ac:spMkLst>
-            <pc:docMk/>
-            <pc:sldMk cId="2970176506" sldId="265"/>
-            <ac:spMk id="47" creationId="{A310A41F-3A14-4150-B6CF-0A577DDDEAD2}"/>
-          </ac:spMkLst>
-        </pc:spChg>
-        <pc:spChg chg="add">
-          <ac:chgData name="Karthika Vellingiri" userId="2f791443-b2b6-40db-8581-89f0c0794d11" providerId="ADAL" clId="{272279B0-242C-4D01-9A5D-29699CA56103}" dt="2025-08-10T14:52:39.527" v="355" actId="26606"/>
-          <ac:spMkLst>
-            <pc:docMk/>
-            <pc:sldMk cId="2970176506" sldId="265"/>
-            <ac:spMk id="48" creationId="{44CC594A-A820-450F-B363-C19201FCFEC6}"/>
-          </ac:spMkLst>
-        </pc:spChg>
-        <pc:spChg chg="add del">
-          <ac:chgData name="Karthika Vellingiri" userId="2f791443-b2b6-40db-8581-89f0c0794d11" providerId="ADAL" clId="{272279B0-242C-4D01-9A5D-29699CA56103}" dt="2025-08-10T14:14:58.995" v="55" actId="26606"/>
-          <ac:spMkLst>
-            <pc:docMk/>
-            <pc:sldMk cId="2970176506" sldId="265"/>
-            <ac:spMk id="49" creationId="{7B89EEFD-93BC-4ACF-962C-E6279E72B00B}"/>
-          </ac:spMkLst>
-        </pc:spChg>
-        <pc:spChg chg="add">
-          <ac:chgData name="Karthika Vellingiri" userId="2f791443-b2b6-40db-8581-89f0c0794d11" providerId="ADAL" clId="{272279B0-242C-4D01-9A5D-29699CA56103}" dt="2025-08-10T14:52:39.527" v="355" actId="26606"/>
-          <ac:spMkLst>
-            <pc:docMk/>
-            <pc:sldMk cId="2970176506" sldId="265"/>
-            <ac:spMk id="50" creationId="{59FAB3DA-E9ED-4574-ABCC-378BC0FF1BBC}"/>
-          </ac:spMkLst>
-        </pc:spChg>
-        <pc:spChg chg="add del">
-          <ac:chgData name="Karthika Vellingiri" userId="2f791443-b2b6-40db-8581-89f0c0794d11" providerId="ADAL" clId="{272279B0-242C-4D01-9A5D-29699CA56103}" dt="2025-08-10T14:23:40.364" v="188" actId="26606"/>
-          <ac:spMkLst>
-            <pc:docMk/>
-            <pc:sldMk cId="2970176506" sldId="265"/>
-            <ac:spMk id="51" creationId="{7D9439D6-DEAD-4CEB-A61B-BE3D64D1B598}"/>
-          </ac:spMkLst>
-        </pc:spChg>
-        <pc:spChg chg="add">
-          <ac:chgData name="Karthika Vellingiri" userId="2f791443-b2b6-40db-8581-89f0c0794d11" providerId="ADAL" clId="{272279B0-242C-4D01-9A5D-29699CA56103}" dt="2025-08-10T14:52:39.527" v="355" actId="26606"/>
-          <ac:spMkLst>
-            <pc:docMk/>
-            <pc:sldMk cId="2970176506" sldId="265"/>
-            <ac:spMk id="52" creationId="{53B8D6B0-55D6-48DC-86D8-FD95D5F118AB}"/>
-          </ac:spMkLst>
-        </pc:spChg>
-        <pc:spChg chg="add del">
-          <ac:chgData name="Karthika Vellingiri" userId="2f791443-b2b6-40db-8581-89f0c0794d11" providerId="ADAL" clId="{272279B0-242C-4D01-9A5D-29699CA56103}" dt="2025-08-10T14:19:22.757" v="110"/>
-          <ac:spMkLst>
-            <pc:docMk/>
-            <pc:sldMk cId="2970176506" sldId="265"/>
-            <ac:spMk id="54" creationId="{00401440-1DC9-4C9E-A3BA-4DECEEB46503}"/>
-          </ac:spMkLst>
-        </pc:spChg>
-        <pc:spChg chg="add del">
-          <ac:chgData name="Karthika Vellingiri" userId="2f791443-b2b6-40db-8581-89f0c0794d11" providerId="ADAL" clId="{272279B0-242C-4D01-9A5D-29699CA56103}" dt="2025-08-10T14:23:52.885" v="190" actId="26606"/>
-          <ac:spMkLst>
-            <pc:docMk/>
-            <pc:sldMk cId="2970176506" sldId="265"/>
-            <ac:spMk id="55" creationId="{3F4C104D-5F30-4811-9376-566B26E4719A}"/>
-          </ac:spMkLst>
-        </pc:spChg>
-        <pc:spChg chg="add del">
-          <ac:chgData name="Karthika Vellingiri" userId="2f791443-b2b6-40db-8581-89f0c0794d11" providerId="ADAL" clId="{272279B0-242C-4D01-9A5D-29699CA56103}" dt="2025-08-10T14:19:22.757" v="110"/>
-          <ac:spMkLst>
-            <pc:docMk/>
-            <pc:sldMk cId="2970176506" sldId="265"/>
-            <ac:spMk id="56" creationId="{36B822CC-7DA9-4417-AA94-64CEB676F0B8}"/>
-          </ac:spMkLst>
-        </pc:spChg>
-        <pc:spChg chg="add del">
-          <ac:chgData name="Karthika Vellingiri" userId="2f791443-b2b6-40db-8581-89f0c0794d11" providerId="ADAL" clId="{272279B0-242C-4D01-9A5D-29699CA56103}" dt="2025-08-10T14:23:52.885" v="190" actId="26606"/>
-          <ac:spMkLst>
-            <pc:docMk/>
-            <pc:sldMk cId="2970176506" sldId="265"/>
-            <ac:spMk id="57" creationId="{0815E34B-5D02-4E01-A936-E8E1C0AB6F12}"/>
-          </ac:spMkLst>
-        </pc:spChg>
-        <pc:spChg chg="add del">
-          <ac:chgData name="Karthika Vellingiri" userId="2f791443-b2b6-40db-8581-89f0c0794d11" providerId="ADAL" clId="{272279B0-242C-4D01-9A5D-29699CA56103}" dt="2025-08-10T14:19:22.757" v="110"/>
-          <ac:spMkLst>
-            <pc:docMk/>
-            <pc:sldMk cId="2970176506" sldId="265"/>
-            <ac:spMk id="58" creationId="{AFA01E88-71CC-4FF3-9E81-51E0C32B45E4}"/>
-          </ac:spMkLst>
-        </pc:spChg>
-        <pc:spChg chg="add del">
-          <ac:chgData name="Karthika Vellingiri" userId="2f791443-b2b6-40db-8581-89f0c0794d11" providerId="ADAL" clId="{272279B0-242C-4D01-9A5D-29699CA56103}" dt="2025-08-10T14:23:52.885" v="190" actId="26606"/>
-          <ac:spMkLst>
-            <pc:docMk/>
-            <pc:sldMk cId="2970176506" sldId="265"/>
-            <ac:spMk id="60" creationId="{7DE3414B-B032-4710-A468-D3285E38C5FF}"/>
-          </ac:spMkLst>
-        </pc:spChg>
-        <pc:spChg chg="add del">
-          <ac:chgData name="Karthika Vellingiri" userId="2f791443-b2b6-40db-8581-89f0c0794d11" providerId="ADAL" clId="{272279B0-242C-4D01-9A5D-29699CA56103}" dt="2025-08-10T14:22:27.298" v="161" actId="26606"/>
-          <ac:spMkLst>
-            <pc:docMk/>
-            <pc:sldMk cId="2970176506" sldId="265"/>
-            <ac:spMk id="66" creationId="{685D77DF-610F-4D0F-A3D2-4FBBC96640E4}"/>
-          </ac:spMkLst>
-        </pc:spChg>
-        <pc:spChg chg="add del">
-          <ac:chgData name="Karthika Vellingiri" userId="2f791443-b2b6-40db-8581-89f0c0794d11" providerId="ADAL" clId="{272279B0-242C-4D01-9A5D-29699CA56103}" dt="2025-08-10T14:22:27.298" v="161" actId="26606"/>
-          <ac:spMkLst>
-            <pc:docMk/>
-            <pc:sldMk cId="2970176506" sldId="265"/>
-            <ac:spMk id="67" creationId="{2513384B-399F-47B1-9ABD-172607AA4E6E}"/>
-          </ac:spMkLst>
-        </pc:spChg>
-        <pc:spChg chg="add del mod ord">
-          <ac:chgData name="Karthika Vellingiri" userId="2f791443-b2b6-40db-8581-89f0c0794d11" providerId="ADAL" clId="{272279B0-242C-4D01-9A5D-29699CA56103}" dt="2025-08-10T14:28:15.729" v="232" actId="700"/>
-          <ac:spMkLst>
-            <pc:docMk/>
-            <pc:sldMk cId="2970176506" sldId="265"/>
-            <ac:spMk id="68" creationId="{7E93B52B-11F4-B7FE-C4F2-7CD96FB6A80E}"/>
-          </ac:spMkLst>
-        </pc:spChg>
-        <pc:spChg chg="add">
-          <ac:chgData name="Karthika Vellingiri" userId="2f791443-b2b6-40db-8581-89f0c0794d11" providerId="ADAL" clId="{272279B0-242C-4D01-9A5D-29699CA56103}" dt="2025-08-10T15:02:53.192" v="450"/>
-          <ac:spMkLst>
-            <pc:docMk/>
-            <pc:sldMk cId="2970176506" sldId="265"/>
-            <ac:spMk id="71" creationId="{B529951A-9B82-9600-6EBF-F67B0C386D2C}"/>
-          </ac:spMkLst>
-        </pc:spChg>
-        <pc:spChg chg="add">
-          <ac:chgData name="Karthika Vellingiri" userId="2f791443-b2b6-40db-8581-89f0c0794d11" providerId="ADAL" clId="{272279B0-242C-4D01-9A5D-29699CA56103}" dt="2025-08-10T15:02:55.672" v="451"/>
-          <ac:spMkLst>
-            <pc:docMk/>
-            <pc:sldMk cId="2970176506" sldId="265"/>
-            <ac:spMk id="72" creationId="{6997774F-3CD5-2344-FE86-22FA7669BB62}"/>
-          </ac:spMkLst>
-        </pc:spChg>
-        <pc:spChg chg="add mod">
-          <ac:chgData name="Karthika Vellingiri" userId="2f791443-b2b6-40db-8581-89f0c0794d11" providerId="ADAL" clId="{272279B0-242C-4D01-9A5D-29699CA56103}" dt="2025-08-10T15:03:05.292" v="456"/>
-          <ac:spMkLst>
-            <pc:docMk/>
-            <pc:sldMk cId="2970176506" sldId="265"/>
-            <ac:spMk id="73" creationId="{AF587E2F-544A-2EA9-B22C-ACDC1C640CD2}"/>
-          </ac:spMkLst>
-        </pc:spChg>
-        <pc:spChg chg="add del">
-          <ac:chgData name="Karthika Vellingiri" userId="2f791443-b2b6-40db-8581-89f0c0794d11" providerId="ADAL" clId="{272279B0-242C-4D01-9A5D-29699CA56103}" dt="2025-08-10T14:28:06.633" v="223" actId="26606"/>
-          <ac:spMkLst>
-            <pc:docMk/>
-            <pc:sldMk cId="2970176506" sldId="265"/>
-            <ac:spMk id="103" creationId="{1996130F-9AB5-4DE9-8574-3AF891C5C172}"/>
-          </ac:spMkLst>
-        </pc:spChg>
-        <pc:spChg chg="add del">
-          <ac:chgData name="Karthika Vellingiri" userId="2f791443-b2b6-40db-8581-89f0c0794d11" providerId="ADAL" clId="{272279B0-242C-4D01-9A5D-29699CA56103}" dt="2025-08-10T14:28:06.633" v="223" actId="26606"/>
-          <ac:spMkLst>
-            <pc:docMk/>
-            <pc:sldMk cId="2970176506" sldId="265"/>
-            <ac:spMk id="105" creationId="{7326F4E6-9131-42DA-97B2-0BA8D1E258AD}"/>
-          </ac:spMkLst>
-        </pc:spChg>
-        <pc:spChg chg="add del">
-          <ac:chgData name="Karthika Vellingiri" userId="2f791443-b2b6-40db-8581-89f0c0794d11" providerId="ADAL" clId="{272279B0-242C-4D01-9A5D-29699CA56103}" dt="2025-08-10T14:28:06.633" v="223" actId="26606"/>
-          <ac:spMkLst>
-            <pc:docMk/>
-            <pc:sldMk cId="2970176506" sldId="265"/>
-            <ac:spMk id="107" creationId="{1EDD21E1-BAF0-4314-AB31-82ECB8AC9EA9}"/>
-          </ac:spMkLst>
-        </pc:spChg>
-        <pc:spChg chg="add del">
-          <ac:chgData name="Karthika Vellingiri" userId="2f791443-b2b6-40db-8581-89f0c0794d11" providerId="ADAL" clId="{272279B0-242C-4D01-9A5D-29699CA56103}" dt="2025-08-10T14:28:06.633" v="223" actId="26606"/>
-          <ac:spMkLst>
-            <pc:docMk/>
-            <pc:sldMk cId="2970176506" sldId="265"/>
-            <ac:spMk id="109" creationId="{FDC8619C-F25D-468E-95FA-2A2151D7DDD2}"/>
-          </ac:spMkLst>
-        </pc:spChg>
-        <pc:spChg chg="add del">
-          <ac:chgData name="Karthika Vellingiri" userId="2f791443-b2b6-40db-8581-89f0c0794d11" providerId="ADAL" clId="{272279B0-242C-4D01-9A5D-29699CA56103}" dt="2025-08-10T14:28:06.633" v="223" actId="26606"/>
-          <ac:spMkLst>
-            <pc:docMk/>
-            <pc:sldMk cId="2970176506" sldId="265"/>
-            <ac:spMk id="111" creationId="{7D9439D6-DEAD-4CEB-A61B-BE3D64D1B598}"/>
-          </ac:spMkLst>
-        </pc:spChg>
-        <pc:spChg chg="add del">
-          <ac:chgData name="Karthika Vellingiri" userId="2f791443-b2b6-40db-8581-89f0c0794d11" providerId="ADAL" clId="{272279B0-242C-4D01-9A5D-29699CA56103}" dt="2025-08-10T14:28:07.907" v="225" actId="26606"/>
-          <ac:spMkLst>
-            <pc:docMk/>
-            <pc:sldMk cId="2970176506" sldId="265"/>
-            <ac:spMk id="139" creationId="{1996130F-9AB5-4DE9-8574-3AF891C5C172}"/>
-          </ac:spMkLst>
-        </pc:spChg>
-        <pc:spChg chg="add del">
-          <ac:chgData name="Karthika Vellingiri" userId="2f791443-b2b6-40db-8581-89f0c0794d11" providerId="ADAL" clId="{272279B0-242C-4D01-9A5D-29699CA56103}" dt="2025-08-10T14:28:07.907" v="225" actId="26606"/>
-          <ac:spMkLst>
-            <pc:docMk/>
-            <pc:sldMk cId="2970176506" sldId="265"/>
-            <ac:spMk id="140" creationId="{7326F4E6-9131-42DA-97B2-0BA8D1E258AD}"/>
-          </ac:spMkLst>
-        </pc:spChg>
-        <pc:spChg chg="add del">
-          <ac:chgData name="Karthika Vellingiri" userId="2f791443-b2b6-40db-8581-89f0c0794d11" providerId="ADAL" clId="{272279B0-242C-4D01-9A5D-29699CA56103}" dt="2025-08-10T14:28:07.907" v="225" actId="26606"/>
-          <ac:spMkLst>
-            <pc:docMk/>
-            <pc:sldMk cId="2970176506" sldId="265"/>
-            <ac:spMk id="141" creationId="{763516C8-F227-4B77-9AA7-61B9A0B78253}"/>
-          </ac:spMkLst>
-        </pc:spChg>
-        <pc:spChg chg="add del">
-          <ac:chgData name="Karthika Vellingiri" userId="2f791443-b2b6-40db-8581-89f0c0794d11" providerId="ADAL" clId="{272279B0-242C-4D01-9A5D-29699CA56103}" dt="2025-08-10T14:28:07.907" v="225" actId="26606"/>
-          <ac:spMkLst>
-            <pc:docMk/>
-            <pc:sldMk cId="2970176506" sldId="265"/>
-            <ac:spMk id="142" creationId="{D91B420C-C4C8-44DF-96B2-FBD1014646FE}"/>
-          </ac:spMkLst>
-        </pc:spChg>
-        <pc:spChg chg="add del">
-          <ac:chgData name="Karthika Vellingiri" userId="2f791443-b2b6-40db-8581-89f0c0794d11" providerId="ADAL" clId="{272279B0-242C-4D01-9A5D-29699CA56103}" dt="2025-08-10T14:28:07.907" v="225" actId="26606"/>
-          <ac:spMkLst>
-            <pc:docMk/>
-            <pc:sldMk cId="2970176506" sldId="265"/>
-            <ac:spMk id="143" creationId="{070928B1-3E69-44AC-A1EE-B4E4270A7A51}"/>
-          </ac:spMkLst>
-        </pc:spChg>
-        <pc:spChg chg="add del">
-          <ac:chgData name="Karthika Vellingiri" userId="2f791443-b2b6-40db-8581-89f0c0794d11" providerId="ADAL" clId="{272279B0-242C-4D01-9A5D-29699CA56103}" dt="2025-08-10T14:28:13.761" v="227" actId="26606"/>
-          <ac:spMkLst>
-            <pc:docMk/>
-            <pc:sldMk cId="2970176506" sldId="265"/>
-            <ac:spMk id="147" creationId="{1996130F-9AB5-4DE9-8574-3AF891C5C172}"/>
-          </ac:spMkLst>
-        </pc:spChg>
-        <pc:spChg chg="add del">
-          <ac:chgData name="Karthika Vellingiri" userId="2f791443-b2b6-40db-8581-89f0c0794d11" providerId="ADAL" clId="{272279B0-242C-4D01-9A5D-29699CA56103}" dt="2025-08-10T14:28:13.761" v="227" actId="26606"/>
-          <ac:spMkLst>
-            <pc:docMk/>
-            <pc:sldMk cId="2970176506" sldId="265"/>
-            <ac:spMk id="148" creationId="{7326F4E6-9131-42DA-97B2-0BA8D1E258AD}"/>
-          </ac:spMkLst>
-        </pc:spChg>
-        <pc:spChg chg="add del">
-          <ac:chgData name="Karthika Vellingiri" userId="2f791443-b2b6-40db-8581-89f0c0794d11" providerId="ADAL" clId="{272279B0-242C-4D01-9A5D-29699CA56103}" dt="2025-08-10T14:28:13.761" v="227" actId="26606"/>
-          <ac:spMkLst>
-            <pc:docMk/>
-            <pc:sldMk cId="2970176506" sldId="265"/>
-            <ac:spMk id="149" creationId="{3F4C104D-5F30-4811-9376-566B26E4719A}"/>
-          </ac:spMkLst>
-        </pc:spChg>
-        <pc:spChg chg="add del">
-          <ac:chgData name="Karthika Vellingiri" userId="2f791443-b2b6-40db-8581-89f0c0794d11" providerId="ADAL" clId="{272279B0-242C-4D01-9A5D-29699CA56103}" dt="2025-08-10T14:28:13.761" v="227" actId="26606"/>
-          <ac:spMkLst>
-            <pc:docMk/>
-            <pc:sldMk cId="2970176506" sldId="265"/>
-            <ac:spMk id="150" creationId="{0815E34B-5D02-4E01-A936-E8E1C0AB6F12}"/>
-          </ac:spMkLst>
-        </pc:spChg>
-        <pc:spChg chg="add del">
-          <ac:chgData name="Karthika Vellingiri" userId="2f791443-b2b6-40db-8581-89f0c0794d11" providerId="ADAL" clId="{272279B0-242C-4D01-9A5D-29699CA56103}" dt="2025-08-10T14:28:13.761" v="227" actId="26606"/>
-          <ac:spMkLst>
-            <pc:docMk/>
-            <pc:sldMk cId="2970176506" sldId="265"/>
-            <ac:spMk id="151" creationId="{7DE3414B-B032-4710-A468-D3285E38C5FF}"/>
-          </ac:spMkLst>
-        </pc:spChg>
-        <pc:grpChg chg="add del">
-          <ac:chgData name="Karthika Vellingiri" userId="2f791443-b2b6-40db-8581-89f0c0794d11" providerId="ADAL" clId="{272279B0-242C-4D01-9A5D-29699CA56103}" dt="2025-08-10T14:22:27.298" v="161" actId="26606"/>
-          <ac:grpSpMkLst>
-            <pc:docMk/>
-            <pc:sldMk cId="2970176506" sldId="265"/>
-            <ac:grpSpMk id="40" creationId="{AAD68EE7-6E6F-4168-83FE-BCDDC20F569D}"/>
-          </ac:grpSpMkLst>
-        </pc:grpChg>
-        <pc:grpChg chg="add del">
-          <ac:chgData name="Karthika Vellingiri" userId="2f791443-b2b6-40db-8581-89f0c0794d11" providerId="ADAL" clId="{272279B0-242C-4D01-9A5D-29699CA56103}" dt="2025-08-10T14:22:27.298" v="161" actId="26606"/>
-          <ac:grpSpMkLst>
-            <pc:docMk/>
-            <pc:sldMk cId="2970176506" sldId="265"/>
-            <ac:grpSpMk id="53" creationId="{4D8D5B2B-7539-4692-96C7-956FDD481D65}"/>
-          </ac:grpSpMkLst>
-        </pc:grpChg>
-        <pc:grpChg chg="add del">
-          <ac:chgData name="Karthika Vellingiri" userId="2f791443-b2b6-40db-8581-89f0c0794d11" providerId="ADAL" clId="{272279B0-242C-4D01-9A5D-29699CA56103}" dt="2025-08-10T14:28:06.633" v="223" actId="26606"/>
-          <ac:grpSpMkLst>
-            <pc:docMk/>
-            <pc:sldMk cId="2970176506" sldId="265"/>
-            <ac:grpSpMk id="75" creationId="{166BF9EE-F7AC-4FA5-AC7E-001B3A642F75}"/>
-          </ac:grpSpMkLst>
-        </pc:grpChg>
-        <pc:grpChg chg="add del">
-          <ac:chgData name="Karthika Vellingiri" userId="2f791443-b2b6-40db-8581-89f0c0794d11" providerId="ADAL" clId="{272279B0-242C-4D01-9A5D-29699CA56103}" dt="2025-08-10T14:28:06.633" v="223" actId="26606"/>
-          <ac:grpSpMkLst>
-            <pc:docMk/>
-            <pc:sldMk cId="2970176506" sldId="265"/>
-            <ac:grpSpMk id="89" creationId="{E312DBA5-56D8-42B2-BA94-28168C2A6703}"/>
-          </ac:grpSpMkLst>
-        </pc:grpChg>
-        <pc:grpChg chg="add del">
-          <ac:chgData name="Karthika Vellingiri" userId="2f791443-b2b6-40db-8581-89f0c0794d11" providerId="ADAL" clId="{272279B0-242C-4D01-9A5D-29699CA56103}" dt="2025-08-10T14:28:07.907" v="225" actId="26606"/>
-          <ac:grpSpMkLst>
-            <pc:docMk/>
-            <pc:sldMk cId="2970176506" sldId="265"/>
-            <ac:grpSpMk id="113" creationId="{166BF9EE-F7AC-4FA5-AC7E-001B3A642F75}"/>
-          </ac:grpSpMkLst>
-        </pc:grpChg>
-        <pc:grpChg chg="add del">
-          <ac:chgData name="Karthika Vellingiri" userId="2f791443-b2b6-40db-8581-89f0c0794d11" providerId="ADAL" clId="{272279B0-242C-4D01-9A5D-29699CA56103}" dt="2025-08-10T14:28:07.907" v="225" actId="26606"/>
-          <ac:grpSpMkLst>
-            <pc:docMk/>
-            <pc:sldMk cId="2970176506" sldId="265"/>
-            <ac:grpSpMk id="126" creationId="{E312DBA5-56D8-42B2-BA94-28168C2A6703}"/>
-          </ac:grpSpMkLst>
-        </pc:grpChg>
-        <pc:grpChg chg="add del">
-          <ac:chgData name="Karthika Vellingiri" userId="2f791443-b2b6-40db-8581-89f0c0794d11" providerId="ADAL" clId="{272279B0-242C-4D01-9A5D-29699CA56103}" dt="2025-08-10T14:28:13.761" v="227" actId="26606"/>
-          <ac:grpSpMkLst>
-            <pc:docMk/>
-            <pc:sldMk cId="2970176506" sldId="265"/>
-            <ac:grpSpMk id="145" creationId="{166BF9EE-F7AC-4FA5-AC7E-001B3A642F75}"/>
-          </ac:grpSpMkLst>
-        </pc:grpChg>
-        <pc:grpChg chg="add del">
-          <ac:chgData name="Karthika Vellingiri" userId="2f791443-b2b6-40db-8581-89f0c0794d11" providerId="ADAL" clId="{272279B0-242C-4D01-9A5D-29699CA56103}" dt="2025-08-10T14:28:13.761" v="227" actId="26606"/>
-          <ac:grpSpMkLst>
-            <pc:docMk/>
-            <pc:sldMk cId="2970176506" sldId="265"/>
-            <ac:grpSpMk id="146" creationId="{E312DBA5-56D8-42B2-BA94-28168C2A6703}"/>
-          </ac:grpSpMkLst>
-        </pc:grpChg>
-        <pc:graphicFrameChg chg="add mod">
-          <ac:chgData name="Karthika Vellingiri" userId="2f791443-b2b6-40db-8581-89f0c0794d11" providerId="ADAL" clId="{272279B0-242C-4D01-9A5D-29699CA56103}" dt="2025-08-10T14:24:11.716" v="193" actId="12084"/>
-          <ac:graphicFrameMkLst>
-            <pc:docMk/>
-            <pc:sldMk cId="2970176506" sldId="265"/>
-            <ac:graphicFrameMk id="7" creationId="{4F13A18C-F61F-6660-A6C8-80EABC17A1A7}"/>
-          </ac:graphicFrameMkLst>
-        </pc:graphicFrameChg>
-        <pc:graphicFrameChg chg="add del">
-          <ac:chgData name="Karthika Vellingiri" userId="2f791443-b2b6-40db-8581-89f0c0794d11" providerId="ADAL" clId="{272279B0-242C-4D01-9A5D-29699CA56103}" dt="2025-08-10T14:23:52.885" v="190" actId="26606"/>
-          <ac:graphicFrameMkLst>
-            <pc:docMk/>
-            <pc:sldMk cId="2970176506" sldId="265"/>
-            <ac:graphicFrameMk id="59" creationId="{DBD87C1F-4CF9-3348-A9D1-7D28B58CEE42}"/>
-          </ac:graphicFrameMkLst>
-        </pc:graphicFrameChg>
-        <pc:picChg chg="add del mod ord">
-          <ac:chgData name="Karthika Vellingiri" userId="2f791443-b2b6-40db-8581-89f0c0794d11" providerId="ADAL" clId="{272279B0-242C-4D01-9A5D-29699CA56103}" dt="2025-08-10T14:52:39.527" v="355" actId="26606"/>
-          <ac:picMkLst>
-            <pc:docMk/>
-            <pc:sldMk cId="2970176506" sldId="265"/>
-            <ac:picMk id="5" creationId="{320FB0FF-8518-4BC2-20DC-51F403994AFF}"/>
-          </ac:picMkLst>
-        </pc:picChg>
-        <pc:picChg chg="add mod">
-          <ac:chgData name="Karthika Vellingiri" userId="2f791443-b2b6-40db-8581-89f0c0794d11" providerId="ADAL" clId="{272279B0-242C-4D01-9A5D-29699CA56103}" dt="2025-08-10T14:28:14.221" v="229" actId="931"/>
-          <ac:picMkLst>
-            <pc:docMk/>
-            <pc:sldMk cId="2970176506" sldId="265"/>
-            <ac:picMk id="70" creationId="{8AF8D9EA-CDF0-7E01-4558-24B340E67F5D}"/>
-          </ac:picMkLst>
-        </pc:picChg>
-      </pc:sldChg>
-      <pc:sldChg chg="addSp delSp modSp new mod setBg modClrScheme addAnim delAnim setClrOvrMap delDesignElem chgLayout modNotesTx">
-        <pc:chgData name="Karthika Vellingiri" userId="2f791443-b2b6-40db-8581-89f0c0794d11" providerId="ADAL" clId="{272279B0-242C-4D01-9A5D-29699CA56103}" dt="2025-08-10T15:24:25.150" v="629" actId="6549"/>
-        <pc:sldMkLst>
-          <pc:docMk/>
-          <pc:sldMk cId="2321883962" sldId="266"/>
-        </pc:sldMkLst>
-        <pc:spChg chg="mod ord">
-          <ac:chgData name="Karthika Vellingiri" userId="2f791443-b2b6-40db-8581-89f0c0794d11" providerId="ADAL" clId="{272279B0-242C-4D01-9A5D-29699CA56103}" dt="2025-08-10T15:00:24.984" v="449" actId="26606"/>
-          <ac:spMkLst>
-            <pc:docMk/>
-            <pc:sldMk cId="2321883962" sldId="266"/>
-            <ac:spMk id="2" creationId="{00398F28-36E6-F2A6-717A-368A6E69FF13}"/>
-          </ac:spMkLst>
-        </pc:spChg>
-        <pc:spChg chg="del mod ord">
-          <ac:chgData name="Karthika Vellingiri" userId="2f791443-b2b6-40db-8581-89f0c0794d11" providerId="ADAL" clId="{272279B0-242C-4D01-9A5D-29699CA56103}" dt="2025-08-10T14:29:50.501" v="269"/>
-          <ac:spMkLst>
-            <pc:docMk/>
-            <pc:sldMk cId="2321883962" sldId="266"/>
-            <ac:spMk id="3" creationId="{A54AEC8E-EE6E-9EE4-13F1-11E7DD6BAF3F}"/>
-          </ac:spMkLst>
-        </pc:spChg>
-        <pc:spChg chg="add del mod ord">
-          <ac:chgData name="Karthika Vellingiri" userId="2f791443-b2b6-40db-8581-89f0c0794d11" providerId="ADAL" clId="{272279B0-242C-4D01-9A5D-29699CA56103}" dt="2025-08-10T14:29:25.379" v="260" actId="931"/>
-          <ac:spMkLst>
-            <pc:docMk/>
-            <pc:sldMk cId="2321883962" sldId="266"/>
-            <ac:spMk id="4" creationId="{DEBFA906-6DF9-FE89-C8B2-69C7F0F8201C}"/>
-          </ac:spMkLst>
-        </pc:spChg>
-        <pc:spChg chg="add">
-          <ac:chgData name="Karthika Vellingiri" userId="2f791443-b2b6-40db-8581-89f0c0794d11" providerId="ADAL" clId="{272279B0-242C-4D01-9A5D-29699CA56103}" dt="2025-08-10T14:29:14.738" v="250"/>
-          <ac:spMkLst>
-            <pc:docMk/>
-            <pc:sldMk cId="2321883962" sldId="266"/>
-            <ac:spMk id="7" creationId="{AA1E9A43-9ADE-CDEB-6FDC-33888C9B8838}"/>
-          </ac:spMkLst>
-        </pc:spChg>
-        <pc:spChg chg="add mod">
-          <ac:chgData name="Karthika Vellingiri" userId="2f791443-b2b6-40db-8581-89f0c0794d11" providerId="ADAL" clId="{272279B0-242C-4D01-9A5D-29699CA56103}" dt="2025-08-10T14:29:21.080" v="253"/>
-          <ac:spMkLst>
-            <pc:docMk/>
-            <pc:sldMk cId="2321883962" sldId="266"/>
-            <ac:spMk id="8" creationId="{ACFD6B2C-AD35-A6F1-A8AA-EAF991FDFC5D}"/>
-          </ac:spMkLst>
-        </pc:spChg>
-        <pc:spChg chg="add">
-          <ac:chgData name="Karthika Vellingiri" userId="2f791443-b2b6-40db-8581-89f0c0794d11" providerId="ADAL" clId="{272279B0-242C-4D01-9A5D-29699CA56103}" dt="2025-08-10T14:29:27.872" v="262"/>
-          <ac:spMkLst>
-            <pc:docMk/>
-            <pc:sldMk cId="2321883962" sldId="266"/>
-            <ac:spMk id="9" creationId="{4D2F6C29-6C50-A542-DD48-2B19497CFE6A}"/>
-          </ac:spMkLst>
-        </pc:spChg>
-        <pc:spChg chg="add mod">
-          <ac:chgData name="Karthika Vellingiri" userId="2f791443-b2b6-40db-8581-89f0c0794d11" providerId="ADAL" clId="{272279B0-242C-4D01-9A5D-29699CA56103}" dt="2025-08-10T14:29:35.899" v="265"/>
-          <ac:spMkLst>
-            <pc:docMk/>
-            <pc:sldMk cId="2321883962" sldId="266"/>
-            <ac:spMk id="10" creationId="{76F6B392-000B-73A6-1C62-97357026BC53}"/>
-          </ac:spMkLst>
-        </pc:spChg>
-        <pc:spChg chg="add">
-          <ac:chgData name="Karthika Vellingiri" userId="2f791443-b2b6-40db-8581-89f0c0794d11" providerId="ADAL" clId="{272279B0-242C-4D01-9A5D-29699CA56103}" dt="2025-08-10T14:29:43.491" v="267"/>
-          <ac:spMkLst>
-            <pc:docMk/>
-            <pc:sldMk cId="2321883962" sldId="266"/>
-            <ac:spMk id="24" creationId="{68667BE7-EB5D-7FB6-9F46-AE0ACF3F654B}"/>
-          </ac:spMkLst>
-        </pc:spChg>
-        <pc:spChg chg="add del mod ord">
-          <ac:chgData name="Karthika Vellingiri" userId="2f791443-b2b6-40db-8581-89f0c0794d11" providerId="ADAL" clId="{272279B0-242C-4D01-9A5D-29699CA56103}" dt="2025-08-10T15:00:24.984" v="449" actId="26606"/>
-          <ac:spMkLst>
-            <pc:docMk/>
-            <pc:sldMk cId="2321883962" sldId="266"/>
-            <ac:spMk id="38" creationId="{950C10E1-DFD5-2AC6-C579-7F5DD2B5A6EC}"/>
-          </ac:spMkLst>
-        </pc:spChg>
-        <pc:spChg chg="add del">
-          <ac:chgData name="Karthika Vellingiri" userId="2f791443-b2b6-40db-8581-89f0c0794d11" providerId="ADAL" clId="{272279B0-242C-4D01-9A5D-29699CA56103}" dt="2025-08-10T14:28:47.007" v="240" actId="26606"/>
-          <ac:spMkLst>
-            <pc:docMk/>
-            <pc:sldMk cId="2321883962" sldId="266"/>
-            <ac:spMk id="39" creationId="{1996130F-9AB5-4DE9-8574-3AF891C5C172}"/>
-          </ac:spMkLst>
-        </pc:spChg>
-        <pc:spChg chg="add del">
-          <ac:chgData name="Karthika Vellingiri" userId="2f791443-b2b6-40db-8581-89f0c0794d11" providerId="ADAL" clId="{272279B0-242C-4D01-9A5D-29699CA56103}" dt="2025-08-10T14:28:47.007" v="240" actId="26606"/>
-          <ac:spMkLst>
-            <pc:docMk/>
-            <pc:sldMk cId="2321883962" sldId="266"/>
-            <ac:spMk id="41" creationId="{3623DEAC-F39C-45D6-86DC-1033F6429528}"/>
-          </ac:spMkLst>
-        </pc:spChg>
-        <pc:spChg chg="add del">
-          <ac:chgData name="Karthika Vellingiri" userId="2f791443-b2b6-40db-8581-89f0c0794d11" providerId="ADAL" clId="{272279B0-242C-4D01-9A5D-29699CA56103}" dt="2025-08-10T15:00:24.970" v="448" actId="26606"/>
-          <ac:spMkLst>
-            <pc:docMk/>
-            <pc:sldMk cId="2321883962" sldId="266"/>
-            <ac:spMk id="42" creationId="{7D379150-F6B4-45C8-BE10-6B278AD400EB}"/>
-          </ac:spMkLst>
-        </pc:spChg>
-        <pc:spChg chg="add del">
-          <ac:chgData name="Karthika Vellingiri" userId="2f791443-b2b6-40db-8581-89f0c0794d11" providerId="ADAL" clId="{272279B0-242C-4D01-9A5D-29699CA56103}" dt="2025-08-10T14:28:47.007" v="240" actId="26606"/>
-          <ac:spMkLst>
-            <pc:docMk/>
-            <pc:sldMk cId="2321883962" sldId="266"/>
-            <ac:spMk id="43" creationId="{A692209D-B607-46C3-8560-07AF72291659}"/>
-          </ac:spMkLst>
-        </pc:spChg>
-        <pc:spChg chg="add del">
-          <ac:chgData name="Karthika Vellingiri" userId="2f791443-b2b6-40db-8581-89f0c0794d11" providerId="ADAL" clId="{272279B0-242C-4D01-9A5D-29699CA56103}" dt="2025-08-10T15:00:24.970" v="448" actId="26606"/>
-          <ac:spMkLst>
-            <pc:docMk/>
-            <pc:sldMk cId="2321883962" sldId="266"/>
-            <ac:spMk id="44" creationId="{5FFCF544-A370-4A5D-A95F-CA6E0E7191E6}"/>
-          </ac:spMkLst>
-        </pc:spChg>
-        <pc:spChg chg="add del">
-          <ac:chgData name="Karthika Vellingiri" userId="2f791443-b2b6-40db-8581-89f0c0794d11" providerId="ADAL" clId="{272279B0-242C-4D01-9A5D-29699CA56103}" dt="2025-08-10T14:28:47.007" v="240" actId="26606"/>
-          <ac:spMkLst>
-            <pc:docMk/>
-            <pc:sldMk cId="2321883962" sldId="266"/>
-            <ac:spMk id="45" creationId="{94874638-CF15-4908-BC4B-4908744D0BAF}"/>
-          </ac:spMkLst>
-        </pc:spChg>
-        <pc:spChg chg="add del">
-          <ac:chgData name="Karthika Vellingiri" userId="2f791443-b2b6-40db-8581-89f0c0794d11" providerId="ADAL" clId="{272279B0-242C-4D01-9A5D-29699CA56103}" dt="2025-08-10T14:28:47.007" v="240" actId="26606"/>
-          <ac:spMkLst>
-            <pc:docMk/>
-            <pc:sldMk cId="2321883962" sldId="266"/>
-            <ac:spMk id="47" creationId="{5F1B8348-CD6E-4561-A704-C232D9A2676D}"/>
-          </ac:spMkLst>
-        </pc:spChg>
-        <pc:spChg chg="add del">
-          <ac:chgData name="Karthika Vellingiri" userId="2f791443-b2b6-40db-8581-89f0c0794d11" providerId="ADAL" clId="{272279B0-242C-4D01-9A5D-29699CA56103}" dt="2025-08-10T15:00:24.970" v="448" actId="26606"/>
-          <ac:spMkLst>
-            <pc:docMk/>
-            <pc:sldMk cId="2321883962" sldId="266"/>
-            <ac:spMk id="49" creationId="{284B70D5-875B-433D-BDBD-1522A85D6C1D}"/>
-          </ac:spMkLst>
-        </pc:spChg>
-        <pc:spChg chg="add del">
-          <ac:chgData name="Karthika Vellingiri" userId="2f791443-b2b6-40db-8581-89f0c0794d11" providerId="ADAL" clId="{272279B0-242C-4D01-9A5D-29699CA56103}" dt="2025-08-10T15:00:24.970" v="448" actId="26606"/>
-          <ac:spMkLst>
-            <pc:docMk/>
-            <pc:sldMk cId="2321883962" sldId="266"/>
-            <ac:spMk id="53" creationId="{1E299956-A9E7-4FC1-A0B1-D590CA9730E8}"/>
-          </ac:spMkLst>
-        </pc:spChg>
-        <pc:spChg chg="add del">
-          <ac:chgData name="Karthika Vellingiri" userId="2f791443-b2b6-40db-8581-89f0c0794d11" providerId="ADAL" clId="{272279B0-242C-4D01-9A5D-29699CA56103}" dt="2025-08-10T15:00:24.970" v="448" actId="26606"/>
-          <ac:spMkLst>
-            <pc:docMk/>
-            <pc:sldMk cId="2321883962" sldId="266"/>
-            <ac:spMk id="55" creationId="{17FC539C-B783-4B03-9F9E-D13430F3F64F}"/>
-          </ac:spMkLst>
-        </pc:spChg>
-        <pc:spChg chg="add">
-          <ac:chgData name="Karthika Vellingiri" userId="2f791443-b2b6-40db-8581-89f0c0794d11" providerId="ADAL" clId="{272279B0-242C-4D01-9A5D-29699CA56103}" dt="2025-08-10T15:00:24.984" v="449" actId="26606"/>
-          <ac:spMkLst>
-            <pc:docMk/>
-            <pc:sldMk cId="2321883962" sldId="266"/>
-            <ac:spMk id="60" creationId="{7D379150-F6B4-45C8-BE10-6B278AD400EB}"/>
-          </ac:spMkLst>
-        </pc:spChg>
-        <pc:spChg chg="add">
-          <ac:chgData name="Karthika Vellingiri" userId="2f791443-b2b6-40db-8581-89f0c0794d11" providerId="ADAL" clId="{272279B0-242C-4D01-9A5D-29699CA56103}" dt="2025-08-10T15:00:24.984" v="449" actId="26606"/>
-          <ac:spMkLst>
-            <pc:docMk/>
-            <pc:sldMk cId="2321883962" sldId="266"/>
-            <ac:spMk id="61" creationId="{5FFCF544-A370-4A5D-A95F-CA6E0E7191E6}"/>
-          </ac:spMkLst>
-        </pc:spChg>
-        <pc:spChg chg="add">
-          <ac:chgData name="Karthika Vellingiri" userId="2f791443-b2b6-40db-8581-89f0c0794d11" providerId="ADAL" clId="{272279B0-242C-4D01-9A5D-29699CA56103}" dt="2025-08-10T15:00:24.984" v="449" actId="26606"/>
-          <ac:spMkLst>
-            <pc:docMk/>
-            <pc:sldMk cId="2321883962" sldId="266"/>
-            <ac:spMk id="63" creationId="{52ABB703-2B0E-4C3B-B4A2-F3973548E561}"/>
-          </ac:spMkLst>
-        </pc:spChg>
-        <pc:spChg chg="add">
-          <ac:chgData name="Karthika Vellingiri" userId="2f791443-b2b6-40db-8581-89f0c0794d11" providerId="ADAL" clId="{272279B0-242C-4D01-9A5D-29699CA56103}" dt="2025-08-10T15:00:24.984" v="449" actId="26606"/>
-          <ac:spMkLst>
-            <pc:docMk/>
-            <pc:sldMk cId="2321883962" sldId="266"/>
-            <ac:spMk id="65" creationId="{E95DA498-D9A2-4DA9-B9DA-B3776E08CF7E}"/>
-          </ac:spMkLst>
-        </pc:spChg>
-        <pc:spChg chg="add">
-          <ac:chgData name="Karthika Vellingiri" userId="2f791443-b2b6-40db-8581-89f0c0794d11" providerId="ADAL" clId="{272279B0-242C-4D01-9A5D-29699CA56103}" dt="2025-08-10T15:00:24.984" v="449" actId="26606"/>
-          <ac:spMkLst>
-            <pc:docMk/>
-            <pc:sldMk cId="2321883962" sldId="266"/>
-            <ac:spMk id="66" creationId="{82A73093-4B9D-420D-B17E-52293703A1D4}"/>
-          </ac:spMkLst>
-        </pc:spChg>
-        <pc:spChg chg="add del">
-          <ac:chgData name="Karthika Vellingiri" userId="2f791443-b2b6-40db-8581-89f0c0794d11" providerId="ADAL" clId="{272279B0-242C-4D01-9A5D-29699CA56103}" dt="2025-08-10T14:50:09.402" v="312"/>
-          <ac:spMkLst>
-            <pc:docMk/>
-            <pc:sldMk cId="2321883962" sldId="266"/>
-            <ac:spMk id="71" creationId="{1996130F-9AB5-4DE9-8574-3AF891C5C172}"/>
-          </ac:spMkLst>
-        </pc:spChg>
-        <pc:spChg chg="add del">
-          <ac:chgData name="Karthika Vellingiri" userId="2f791443-b2b6-40db-8581-89f0c0794d11" providerId="ADAL" clId="{272279B0-242C-4D01-9A5D-29699CA56103}" dt="2025-08-10T14:28:51.301" v="242" actId="26606"/>
-          <ac:spMkLst>
-            <pc:docMk/>
-            <pc:sldMk cId="2321883962" sldId="266"/>
-            <ac:spMk id="73" creationId="{46FA917F-43A3-4FA3-A085-59D0DC397EFA}"/>
-          </ac:spMkLst>
-        </pc:spChg>
-        <pc:spChg chg="add del">
-          <ac:chgData name="Karthika Vellingiri" userId="2f791443-b2b6-40db-8581-89f0c0794d11" providerId="ADAL" clId="{272279B0-242C-4D01-9A5D-29699CA56103}" dt="2025-08-10T14:28:51.301" v="242" actId="26606"/>
-          <ac:spMkLst>
-            <pc:docMk/>
-            <pc:sldMk cId="2321883962" sldId="266"/>
-            <ac:spMk id="74" creationId="{1996130F-9AB5-4DE9-8574-3AF891C5C172}"/>
-          </ac:spMkLst>
-        </pc:spChg>
-        <pc:spChg chg="add del">
-          <ac:chgData name="Karthika Vellingiri" userId="2f791443-b2b6-40db-8581-89f0c0794d11" providerId="ADAL" clId="{272279B0-242C-4D01-9A5D-29699CA56103}" dt="2025-08-10T14:28:51.301" v="242" actId="26606"/>
-          <ac:spMkLst>
-            <pc:docMk/>
-            <pc:sldMk cId="2321883962" sldId="266"/>
-            <ac:spMk id="75" creationId="{9CBF007B-8C8C-4F79-B037-9F4C61F9F954}"/>
-          </ac:spMkLst>
-        </pc:spChg>
-        <pc:spChg chg="add del">
-          <ac:chgData name="Karthika Vellingiri" userId="2f791443-b2b6-40db-8581-89f0c0794d11" providerId="ADAL" clId="{272279B0-242C-4D01-9A5D-29699CA56103}" dt="2025-08-10T14:28:51.301" v="242" actId="26606"/>
-          <ac:spMkLst>
-            <pc:docMk/>
-            <pc:sldMk cId="2321883962" sldId="266"/>
-            <ac:spMk id="76" creationId="{3623DEAC-F39C-45D6-86DC-1033F6429528}"/>
-          </ac:spMkLst>
-        </pc:spChg>
-        <pc:spChg chg="add del">
-          <ac:chgData name="Karthika Vellingiri" userId="2f791443-b2b6-40db-8581-89f0c0794d11" providerId="ADAL" clId="{272279B0-242C-4D01-9A5D-29699CA56103}" dt="2025-08-10T14:28:51.301" v="242" actId="26606"/>
-          <ac:spMkLst>
-            <pc:docMk/>
-            <pc:sldMk cId="2321883962" sldId="266"/>
-            <ac:spMk id="77" creationId="{CADF4631-3C8F-45EE-8D19-4D3E8426B34A}"/>
-          </ac:spMkLst>
-        </pc:spChg>
-        <pc:spChg chg="add del">
-          <ac:chgData name="Karthika Vellingiri" userId="2f791443-b2b6-40db-8581-89f0c0794d11" providerId="ADAL" clId="{272279B0-242C-4D01-9A5D-29699CA56103}" dt="2025-08-10T14:50:09.402" v="312"/>
-          <ac:spMkLst>
-            <pc:docMk/>
-            <pc:sldMk cId="2321883962" sldId="266"/>
-            <ac:spMk id="79" creationId="{7DE3414B-B032-4710-A468-D3285E38C5FF}"/>
-          </ac:spMkLst>
-        </pc:spChg>
-        <pc:spChg chg="add del">
-          <ac:chgData name="Karthika Vellingiri" userId="2f791443-b2b6-40db-8581-89f0c0794d11" providerId="ADAL" clId="{272279B0-242C-4D01-9A5D-29699CA56103}" dt="2025-08-10T14:50:09.402" v="312"/>
-          <ac:spMkLst>
-            <pc:docMk/>
-            <pc:sldMk cId="2321883962" sldId="266"/>
-            <ac:spMk id="82" creationId="{7326F4E6-9131-42DA-97B2-0BA8D1E258AD}"/>
-          </ac:spMkLst>
-        </pc:spChg>
-        <pc:spChg chg="add del">
-          <ac:chgData name="Karthika Vellingiri" userId="2f791443-b2b6-40db-8581-89f0c0794d11" providerId="ADAL" clId="{272279B0-242C-4D01-9A5D-29699CA56103}" dt="2025-08-10T14:50:09.402" v="312"/>
-          <ac:spMkLst>
-            <pc:docMk/>
-            <pc:sldMk cId="2321883962" sldId="266"/>
-            <ac:spMk id="83" creationId="{3F4C104D-5F30-4811-9376-566B26E4719A}"/>
-          </ac:spMkLst>
-        </pc:spChg>
-        <pc:spChg chg="add del">
-          <ac:chgData name="Karthika Vellingiri" userId="2f791443-b2b6-40db-8581-89f0c0794d11" providerId="ADAL" clId="{272279B0-242C-4D01-9A5D-29699CA56103}" dt="2025-08-10T14:50:09.402" v="312"/>
-          <ac:spMkLst>
-            <pc:docMk/>
-            <pc:sldMk cId="2321883962" sldId="266"/>
-            <ac:spMk id="84" creationId="{0815E34B-5D02-4E01-A936-E8E1C0AB6F12}"/>
-          </ac:spMkLst>
-        </pc:spChg>
-        <pc:spChg chg="add del">
-          <ac:chgData name="Karthika Vellingiri" userId="2f791443-b2b6-40db-8581-89f0c0794d11" providerId="ADAL" clId="{272279B0-242C-4D01-9A5D-29699CA56103}" dt="2025-08-10T14:28:57.523" v="245" actId="26606"/>
-          <ac:spMkLst>
-            <pc:docMk/>
-            <pc:sldMk cId="2321883962" sldId="266"/>
-            <ac:spMk id="107" creationId="{DE91395A-2D18-4AF6-A0AC-AAA7189FED11}"/>
-          </ac:spMkLst>
-        </pc:spChg>
-        <pc:spChg chg="add del">
-          <ac:chgData name="Karthika Vellingiri" userId="2f791443-b2b6-40db-8581-89f0c0794d11" providerId="ADAL" clId="{272279B0-242C-4D01-9A5D-29699CA56103}" dt="2025-08-10T14:28:57.523" v="245" actId="26606"/>
-          <ac:spMkLst>
-            <pc:docMk/>
-            <pc:sldMk cId="2321883962" sldId="266"/>
-            <ac:spMk id="108" creationId="{7BD08880-457D-4C62-A3B5-6A9B0878C7E9}"/>
-          </ac:spMkLst>
-        </pc:spChg>
-        <pc:spChg chg="add del">
-          <ac:chgData name="Karthika Vellingiri" userId="2f791443-b2b6-40db-8581-89f0c0794d11" providerId="ADAL" clId="{272279B0-242C-4D01-9A5D-29699CA56103}" dt="2025-08-10T14:28:57.523" v="245" actId="26606"/>
-          <ac:spMkLst>
-            <pc:docMk/>
-            <pc:sldMk cId="2321883962" sldId="266"/>
-            <ac:spMk id="109" creationId="{FA94DED7-0A28-4AD9-8747-E94113225016}"/>
-          </ac:spMkLst>
-        </pc:spChg>
-        <pc:spChg chg="add del">
-          <ac:chgData name="Karthika Vellingiri" userId="2f791443-b2b6-40db-8581-89f0c0794d11" providerId="ADAL" clId="{272279B0-242C-4D01-9A5D-29699CA56103}" dt="2025-08-10T14:28:57.523" v="245" actId="26606"/>
-          <ac:spMkLst>
-            <pc:docMk/>
-            <pc:sldMk cId="2321883962" sldId="266"/>
-            <ac:spMk id="110" creationId="{6F175609-91A3-416E-BC3D-7548FDE02910}"/>
-          </ac:spMkLst>
-        </pc:spChg>
-        <pc:spChg chg="add del">
-          <ac:chgData name="Karthika Vellingiri" userId="2f791443-b2b6-40db-8581-89f0c0794d11" providerId="ADAL" clId="{272279B0-242C-4D01-9A5D-29699CA56103}" dt="2025-08-10T14:28:57.523" v="245" actId="26606"/>
-          <ac:spMkLst>
-            <pc:docMk/>
-            <pc:sldMk cId="2321883962" sldId="266"/>
-            <ac:spMk id="111" creationId="{9A3B0D54-9DF0-4FF8-A0AA-B4234DF358EF}"/>
-          </ac:spMkLst>
-        </pc:spChg>
-        <pc:spChg chg="add del">
-          <ac:chgData name="Karthika Vellingiri" userId="2f791443-b2b6-40db-8581-89f0c0794d11" providerId="ADAL" clId="{272279B0-242C-4D01-9A5D-29699CA56103}" dt="2025-08-10T14:28:57.523" v="245" actId="26606"/>
-          <ac:spMkLst>
-            <pc:docMk/>
-            <pc:sldMk cId="2321883962" sldId="266"/>
-            <ac:spMk id="112" creationId="{64D236DE-BD07-488F-B236-DDEEFFF720FF}"/>
-          </ac:spMkLst>
-        </pc:spChg>
-        <pc:spChg chg="add del">
-          <ac:chgData name="Karthika Vellingiri" userId="2f791443-b2b6-40db-8581-89f0c0794d11" providerId="ADAL" clId="{272279B0-242C-4D01-9A5D-29699CA56103}" dt="2025-08-10T14:28:58.339" v="247" actId="26606"/>
-          <ac:spMkLst>
-            <pc:docMk/>
-            <pc:sldMk cId="2321883962" sldId="266"/>
-            <ac:spMk id="116" creationId="{DE91395A-2D18-4AF6-A0AC-AAA7189FED11}"/>
-          </ac:spMkLst>
-        </pc:spChg>
-        <pc:spChg chg="add del">
-          <ac:chgData name="Karthika Vellingiri" userId="2f791443-b2b6-40db-8581-89f0c0794d11" providerId="ADAL" clId="{272279B0-242C-4D01-9A5D-29699CA56103}" dt="2025-08-10T14:28:58.339" v="247" actId="26606"/>
-          <ac:spMkLst>
-            <pc:docMk/>
-            <pc:sldMk cId="2321883962" sldId="266"/>
-            <ac:spMk id="117" creationId="{7BD08880-457D-4C62-A3B5-6A9B0878C7E9}"/>
-          </ac:spMkLst>
-        </pc:spChg>
-        <pc:spChg chg="add del">
-          <ac:chgData name="Karthika Vellingiri" userId="2f791443-b2b6-40db-8581-89f0c0794d11" providerId="ADAL" clId="{272279B0-242C-4D01-9A5D-29699CA56103}" dt="2025-08-10T14:28:58.339" v="247" actId="26606"/>
-          <ac:spMkLst>
-            <pc:docMk/>
-            <pc:sldMk cId="2321883962" sldId="266"/>
-            <ac:spMk id="118" creationId="{95FFA5E0-4C70-431D-A19D-18415F6C4009}"/>
-          </ac:spMkLst>
-        </pc:spChg>
-        <pc:spChg chg="add del">
-          <ac:chgData name="Karthika Vellingiri" userId="2f791443-b2b6-40db-8581-89f0c0794d11" providerId="ADAL" clId="{272279B0-242C-4D01-9A5D-29699CA56103}" dt="2025-08-10T14:28:58.339" v="247" actId="26606"/>
-          <ac:spMkLst>
-            <pc:docMk/>
-            <pc:sldMk cId="2321883962" sldId="266"/>
-            <ac:spMk id="119" creationId="{BBE55C11-4C41-45E4-A00F-83DEE6BB51A8}"/>
-          </ac:spMkLst>
-        </pc:spChg>
-        <pc:spChg chg="add del">
-          <ac:chgData name="Karthika Vellingiri" userId="2f791443-b2b6-40db-8581-89f0c0794d11" providerId="ADAL" clId="{272279B0-242C-4D01-9A5D-29699CA56103}" dt="2025-08-10T14:29:21.916" v="256" actId="26606"/>
-          <ac:spMkLst>
-            <pc:docMk/>
-            <pc:sldMk cId="2321883962" sldId="266"/>
-            <ac:spMk id="123" creationId="{DE91395A-2D18-4AF6-A0AC-AAA7189FED11}"/>
-          </ac:spMkLst>
-        </pc:spChg>
-        <pc:spChg chg="add del">
-          <ac:chgData name="Karthika Vellingiri" userId="2f791443-b2b6-40db-8581-89f0c0794d11" providerId="ADAL" clId="{272279B0-242C-4D01-9A5D-29699CA56103}" dt="2025-08-10T14:29:21.916" v="256" actId="26606"/>
-          <ac:spMkLst>
-            <pc:docMk/>
-            <pc:sldMk cId="2321883962" sldId="266"/>
-            <ac:spMk id="124" creationId="{7BD08880-457D-4C62-A3B5-6A9B0878C7E9}"/>
-          </ac:spMkLst>
-        </pc:spChg>
-        <pc:spChg chg="add del">
-          <ac:chgData name="Karthika Vellingiri" userId="2f791443-b2b6-40db-8581-89f0c0794d11" providerId="ADAL" clId="{272279B0-242C-4D01-9A5D-29699CA56103}" dt="2025-08-10T14:29:21.916" v="256" actId="26606"/>
-          <ac:spMkLst>
-            <pc:docMk/>
-            <pc:sldMk cId="2321883962" sldId="266"/>
-            <ac:spMk id="125" creationId="{FA94DED7-0A28-4AD9-8747-E94113225016}"/>
-          </ac:spMkLst>
-        </pc:spChg>
-        <pc:spChg chg="add del">
-          <ac:chgData name="Karthika Vellingiri" userId="2f791443-b2b6-40db-8581-89f0c0794d11" providerId="ADAL" clId="{272279B0-242C-4D01-9A5D-29699CA56103}" dt="2025-08-10T14:29:21.916" v="256" actId="26606"/>
-          <ac:spMkLst>
-            <pc:docMk/>
-            <pc:sldMk cId="2321883962" sldId="266"/>
-            <ac:spMk id="126" creationId="{6F175609-91A3-416E-BC3D-7548FDE02910}"/>
-          </ac:spMkLst>
-        </pc:spChg>
-        <pc:spChg chg="add del">
-          <ac:chgData name="Karthika Vellingiri" userId="2f791443-b2b6-40db-8581-89f0c0794d11" providerId="ADAL" clId="{272279B0-242C-4D01-9A5D-29699CA56103}" dt="2025-08-10T14:29:21.916" v="256" actId="26606"/>
-          <ac:spMkLst>
-            <pc:docMk/>
-            <pc:sldMk cId="2321883962" sldId="266"/>
-            <ac:spMk id="127" creationId="{9A3B0D54-9DF0-4FF8-A0AA-B4234DF358EF}"/>
-          </ac:spMkLst>
-        </pc:spChg>
-        <pc:grpChg chg="add del">
-          <ac:chgData name="Karthika Vellingiri" userId="2f791443-b2b6-40db-8581-89f0c0794d11" providerId="ADAL" clId="{272279B0-242C-4D01-9A5D-29699CA56103}" dt="2025-08-10T14:28:47.007" v="240" actId="26606"/>
-          <ac:grpSpMkLst>
-            <pc:docMk/>
-            <pc:sldMk cId="2321883962" sldId="266"/>
-            <ac:grpSpMk id="11" creationId="{166BF9EE-F7AC-4FA5-AC7E-001B3A642F75}"/>
-          </ac:grpSpMkLst>
-        </pc:grpChg>
-        <pc:grpChg chg="add del">
-          <ac:chgData name="Karthika Vellingiri" userId="2f791443-b2b6-40db-8581-89f0c0794d11" providerId="ADAL" clId="{272279B0-242C-4D01-9A5D-29699CA56103}" dt="2025-08-10T14:28:47.007" v="240" actId="26606"/>
-          <ac:grpSpMkLst>
-            <pc:docMk/>
-            <pc:sldMk cId="2321883962" sldId="266"/>
-            <ac:grpSpMk id="25" creationId="{E312DBA5-56D8-42B2-BA94-28168C2A6703}"/>
-          </ac:grpSpMkLst>
-        </pc:grpChg>
-        <pc:grpChg chg="add del">
-          <ac:chgData name="Karthika Vellingiri" userId="2f791443-b2b6-40db-8581-89f0c0794d11" providerId="ADAL" clId="{272279B0-242C-4D01-9A5D-29699CA56103}" dt="2025-08-10T14:50:09.402" v="312"/>
-          <ac:grpSpMkLst>
-            <pc:docMk/>
-            <pc:sldMk cId="2321883962" sldId="266"/>
-            <ac:grpSpMk id="40" creationId="{166BF9EE-F7AC-4FA5-AC7E-001B3A642F75}"/>
-          </ac:grpSpMkLst>
-        </pc:grpChg>
-        <pc:grpChg chg="add del">
-          <ac:chgData name="Karthika Vellingiri" userId="2f791443-b2b6-40db-8581-89f0c0794d11" providerId="ADAL" clId="{272279B0-242C-4D01-9A5D-29699CA56103}" dt="2025-08-10T14:50:09.402" v="312"/>
-          <ac:grpSpMkLst>
-            <pc:docMk/>
-            <pc:sldMk cId="2321883962" sldId="266"/>
-            <ac:grpSpMk id="57" creationId="{E312DBA5-56D8-42B2-BA94-28168C2A6703}"/>
-          </ac:grpSpMkLst>
-        </pc:grpChg>
-        <pc:grpChg chg="add del">
-          <ac:chgData name="Karthika Vellingiri" userId="2f791443-b2b6-40db-8581-89f0c0794d11" providerId="ADAL" clId="{272279B0-242C-4D01-9A5D-29699CA56103}" dt="2025-08-10T14:28:51.301" v="242" actId="26606"/>
-          <ac:grpSpMkLst>
-            <pc:docMk/>
-            <pc:sldMk cId="2321883962" sldId="266"/>
-            <ac:grpSpMk id="58" creationId="{166BF9EE-F7AC-4FA5-AC7E-001B3A642F75}"/>
-          </ac:grpSpMkLst>
-        </pc:grpChg>
-        <pc:grpChg chg="add del">
-          <ac:chgData name="Karthika Vellingiri" userId="2f791443-b2b6-40db-8581-89f0c0794d11" providerId="ADAL" clId="{272279B0-242C-4D01-9A5D-29699CA56103}" dt="2025-08-10T14:28:51.301" v="242" actId="26606"/>
-          <ac:grpSpMkLst>
-            <pc:docMk/>
-            <pc:sldMk cId="2321883962" sldId="266"/>
-            <ac:grpSpMk id="59" creationId="{6A54B62D-FC5C-4E1A-8D8B-279576FE5379}"/>
-          </ac:grpSpMkLst>
-        </pc:grpChg>
-        <pc:grpChg chg="add del">
-          <ac:chgData name="Karthika Vellingiri" userId="2f791443-b2b6-40db-8581-89f0c0794d11" providerId="ADAL" clId="{272279B0-242C-4D01-9A5D-29699CA56103}" dt="2025-08-10T14:28:57.523" v="245" actId="26606"/>
-          <ac:grpSpMkLst>
-            <pc:docMk/>
-            <pc:sldMk cId="2321883962" sldId="266"/>
-            <ac:grpSpMk id="94" creationId="{520234FB-542E-4550-9C2F-1B56FD41A1CA}"/>
-          </ac:grpSpMkLst>
-        </pc:grpChg>
-        <pc:grpChg chg="add del">
-          <ac:chgData name="Karthika Vellingiri" userId="2f791443-b2b6-40db-8581-89f0c0794d11" providerId="ADAL" clId="{272279B0-242C-4D01-9A5D-29699CA56103}" dt="2025-08-10T14:28:58.339" v="247" actId="26606"/>
-          <ac:grpSpMkLst>
-            <pc:docMk/>
-            <pc:sldMk cId="2321883962" sldId="266"/>
-            <ac:grpSpMk id="114" creationId="{7398C59F-5A18-487B-91D6-B955AACF2E50}"/>
-          </ac:grpSpMkLst>
-        </pc:grpChg>
-        <pc:grpChg chg="add del">
-          <ac:chgData name="Karthika Vellingiri" userId="2f791443-b2b6-40db-8581-89f0c0794d11" providerId="ADAL" clId="{272279B0-242C-4D01-9A5D-29699CA56103}" dt="2025-08-10T14:28:58.339" v="247" actId="26606"/>
-          <ac:grpSpMkLst>
-            <pc:docMk/>
-            <pc:sldMk cId="2321883962" sldId="266"/>
-            <ac:grpSpMk id="115" creationId="{520234FB-542E-4550-9C2F-1B56FD41A1CA}"/>
-          </ac:grpSpMkLst>
-        </pc:grpChg>
-        <pc:grpChg chg="add del">
-          <ac:chgData name="Karthika Vellingiri" userId="2f791443-b2b6-40db-8581-89f0c0794d11" providerId="ADAL" clId="{272279B0-242C-4D01-9A5D-29699CA56103}" dt="2025-08-10T14:29:21.916" v="256" actId="26606"/>
-          <ac:grpSpMkLst>
-            <pc:docMk/>
-            <pc:sldMk cId="2321883962" sldId="266"/>
-            <ac:grpSpMk id="121" creationId="{7398C59F-5A18-487B-91D6-B955AACF2E50}"/>
-          </ac:grpSpMkLst>
-        </pc:grpChg>
-        <pc:grpChg chg="add del">
-          <ac:chgData name="Karthika Vellingiri" userId="2f791443-b2b6-40db-8581-89f0c0794d11" providerId="ADAL" clId="{272279B0-242C-4D01-9A5D-29699CA56103}" dt="2025-08-10T14:29:21.916" v="256" actId="26606"/>
-          <ac:grpSpMkLst>
-            <pc:docMk/>
-            <pc:sldMk cId="2321883962" sldId="266"/>
-            <ac:grpSpMk id="122" creationId="{520234FB-542E-4550-9C2F-1B56FD41A1CA}"/>
-          </ac:grpSpMkLst>
-        </pc:grpChg>
-        <pc:graphicFrameChg chg="add mod">
-          <ac:chgData name="Karthika Vellingiri" userId="2f791443-b2b6-40db-8581-89f0c0794d11" providerId="ADAL" clId="{272279B0-242C-4D01-9A5D-29699CA56103}" dt="2025-08-10T14:53:55.173" v="369" actId="12084"/>
-          <ac:graphicFrameMkLst>
-            <pc:docMk/>
-            <pc:sldMk cId="2321883962" sldId="266"/>
-            <ac:graphicFrameMk id="113" creationId="{00298DAC-9313-C413-5917-357EDCE17B6A}"/>
-          </ac:graphicFrameMkLst>
-        </pc:graphicFrameChg>
-        <pc:picChg chg="add mod ord">
-          <ac:chgData name="Karthika Vellingiri" userId="2f791443-b2b6-40db-8581-89f0c0794d11" providerId="ADAL" clId="{272279B0-242C-4D01-9A5D-29699CA56103}" dt="2025-08-10T15:00:24.984" v="449" actId="26606"/>
-          <ac:picMkLst>
-            <pc:docMk/>
-            <pc:sldMk cId="2321883962" sldId="266"/>
-            <ac:picMk id="6" creationId="{66737468-E859-7A9C-444A-1278E384A673}"/>
-          </ac:picMkLst>
-        </pc:picChg>
-        <pc:cxnChg chg="add del">
-          <ac:chgData name="Karthika Vellingiri" userId="2f791443-b2b6-40db-8581-89f0c0794d11" providerId="ADAL" clId="{272279B0-242C-4D01-9A5D-29699CA56103}" dt="2025-08-10T15:00:24.970" v="448" actId="26606"/>
-          <ac:cxnSpMkLst>
-            <pc:docMk/>
-            <pc:sldMk cId="2321883962" sldId="266"/>
-            <ac:cxnSpMk id="46" creationId="{6EEB3B97-A638-498B-8083-54191CE71E01}"/>
-          </ac:cxnSpMkLst>
-        </pc:cxnChg>
-        <pc:cxnChg chg="add del">
-          <ac:chgData name="Karthika Vellingiri" userId="2f791443-b2b6-40db-8581-89f0c0794d11" providerId="ADAL" clId="{272279B0-242C-4D01-9A5D-29699CA56103}" dt="2025-08-10T15:00:24.970" v="448" actId="26606"/>
-          <ac:cxnSpMkLst>
-            <pc:docMk/>
-            <pc:sldMk cId="2321883962" sldId="266"/>
-            <ac:cxnSpMk id="51" creationId="{C947DF4A-614C-4B4C-8B80-E5B9D8E8CFED}"/>
-          </ac:cxnSpMkLst>
-        </pc:cxnChg>
-        <pc:cxnChg chg="add">
-          <ac:chgData name="Karthika Vellingiri" userId="2f791443-b2b6-40db-8581-89f0c0794d11" providerId="ADAL" clId="{272279B0-242C-4D01-9A5D-29699CA56103}" dt="2025-08-10T15:00:24.984" v="449" actId="26606"/>
-          <ac:cxnSpMkLst>
-            <pc:docMk/>
-            <pc:sldMk cId="2321883962" sldId="266"/>
-            <ac:cxnSpMk id="62" creationId="{6EEB3B97-A638-498B-8083-54191CE71E01}"/>
-          </ac:cxnSpMkLst>
-        </pc:cxnChg>
-        <pc:cxnChg chg="add">
-          <ac:chgData name="Karthika Vellingiri" userId="2f791443-b2b6-40db-8581-89f0c0794d11" providerId="ADAL" clId="{272279B0-242C-4D01-9A5D-29699CA56103}" dt="2025-08-10T15:00:24.984" v="449" actId="26606"/>
-          <ac:cxnSpMkLst>
-            <pc:docMk/>
-            <pc:sldMk cId="2321883962" sldId="266"/>
-            <ac:cxnSpMk id="64" creationId="{9C21570E-E159-49A6-9891-FA397B7A92D3}"/>
-          </ac:cxnSpMkLst>
-        </pc:cxnChg>
-      </pc:sldChg>
-      <pc:sldChg chg="addSp delSp modSp new mod setBg delDesignElem modNotesTx">
-        <pc:chgData name="Karthika Vellingiri" userId="2f791443-b2b6-40db-8581-89f0c0794d11" providerId="ADAL" clId="{272279B0-242C-4D01-9A5D-29699CA56103}" dt="2025-08-10T15:24:11.292" v="617" actId="20577"/>
-        <pc:sldMkLst>
-          <pc:docMk/>
-          <pc:sldMk cId="4041497984" sldId="267"/>
-        </pc:sldMkLst>
-        <pc:spChg chg="mod">
-          <ac:chgData name="Karthika Vellingiri" userId="2f791443-b2b6-40db-8581-89f0c0794d11" providerId="ADAL" clId="{272279B0-242C-4D01-9A5D-29699CA56103}" dt="2025-08-10T15:00:17.480" v="446" actId="113"/>
-          <ac:spMkLst>
-            <pc:docMk/>
-            <pc:sldMk cId="4041497984" sldId="267"/>
-            <ac:spMk id="2" creationId="{41E918CD-FBC4-38E6-11A1-684A135E5A8E}"/>
-          </ac:spMkLst>
-        </pc:spChg>
-        <pc:spChg chg="del">
-          <ac:chgData name="Karthika Vellingiri" userId="2f791443-b2b6-40db-8581-89f0c0794d11" providerId="ADAL" clId="{272279B0-242C-4D01-9A5D-29699CA56103}" dt="2025-08-10T14:36:58.134" v="275" actId="931"/>
-          <ac:spMkLst>
-            <pc:docMk/>
-            <pc:sldMk cId="4041497984" sldId="267"/>
-            <ac:spMk id="3" creationId="{7CD26B34-2A54-54A1-69AC-F8279702F67F}"/>
-          </ac:spMkLst>
-        </pc:spChg>
-        <pc:spChg chg="del mod">
-          <ac:chgData name="Karthika Vellingiri" userId="2f791443-b2b6-40db-8581-89f0c0794d11" providerId="ADAL" clId="{272279B0-242C-4D01-9A5D-29699CA56103}" dt="2025-08-10T14:49:07.028" v="288"/>
-          <ac:spMkLst>
-            <pc:docMk/>
-            <pc:sldMk cId="4041497984" sldId="267"/>
-            <ac:spMk id="4" creationId="{FED0AF70-21BE-5D7B-5490-951C37FB6CF5}"/>
-          </ac:spMkLst>
-        </pc:spChg>
-        <pc:spChg chg="add mod">
-          <ac:chgData name="Karthika Vellingiri" userId="2f791443-b2b6-40db-8581-89f0c0794d11" providerId="ADAL" clId="{272279B0-242C-4D01-9A5D-29699CA56103}" dt="2025-08-10T15:00:09.891" v="444" actId="26606"/>
-          <ac:spMkLst>
-            <pc:docMk/>
-            <pc:sldMk cId="4041497984" sldId="267"/>
-            <ac:spMk id="7" creationId="{F4E9133B-944E-808D-67D8-84EE679EBB38}"/>
-          </ac:spMkLst>
-        </pc:spChg>
-        <pc:spChg chg="add del">
-          <ac:chgData name="Karthika Vellingiri" userId="2f791443-b2b6-40db-8581-89f0c0794d11" providerId="ADAL" clId="{272279B0-242C-4D01-9A5D-29699CA56103}" dt="2025-08-10T14:49:48.010" v="303" actId="26606"/>
-          <ac:spMkLst>
-            <pc:docMk/>
-            <pc:sldMk cId="4041497984" sldId="267"/>
-            <ac:spMk id="11" creationId="{1996130F-9AB5-4DE9-8574-3AF891C5C172}"/>
-          </ac:spMkLst>
-        </pc:spChg>
-        <pc:spChg chg="add del">
-          <ac:chgData name="Karthika Vellingiri" userId="2f791443-b2b6-40db-8581-89f0c0794d11" providerId="ADAL" clId="{272279B0-242C-4D01-9A5D-29699CA56103}" dt="2025-08-10T15:00:09.891" v="444" actId="26606"/>
-          <ac:spMkLst>
-            <pc:docMk/>
-            <pc:sldMk cId="4041497984" sldId="267"/>
-            <ac:spMk id="13" creationId="{7D379150-F6B4-45C8-BE10-6B278AD400EB}"/>
-          </ac:spMkLst>
-        </pc:spChg>
-        <pc:spChg chg="add del">
-          <ac:chgData name="Karthika Vellingiri" userId="2f791443-b2b6-40db-8581-89f0c0794d11" providerId="ADAL" clId="{272279B0-242C-4D01-9A5D-29699CA56103}" dt="2025-08-10T15:00:09.891" v="444" actId="26606"/>
-          <ac:spMkLst>
-            <pc:docMk/>
-            <pc:sldMk cId="4041497984" sldId="267"/>
-            <ac:spMk id="14" creationId="{5FFCF544-A370-4A5D-A95F-CA6E0E7191E6}"/>
-          </ac:spMkLst>
-        </pc:spChg>
-        <pc:spChg chg="add del">
-          <ac:chgData name="Karthika Vellingiri" userId="2f791443-b2b6-40db-8581-89f0c0794d11" providerId="ADAL" clId="{272279B0-242C-4D01-9A5D-29699CA56103}" dt="2025-08-10T15:00:09.891" v="444" actId="26606"/>
-          <ac:spMkLst>
-            <pc:docMk/>
-            <pc:sldMk cId="4041497984" sldId="267"/>
-            <ac:spMk id="18" creationId="{284B70D5-875B-433D-BDBD-1522A85D6C1D}"/>
-          </ac:spMkLst>
-        </pc:spChg>
-        <pc:spChg chg="add del">
-          <ac:chgData name="Karthika Vellingiri" userId="2f791443-b2b6-40db-8581-89f0c0794d11" providerId="ADAL" clId="{272279B0-242C-4D01-9A5D-29699CA56103}" dt="2025-08-10T15:00:09.891" v="444" actId="26606"/>
-          <ac:spMkLst>
-            <pc:docMk/>
-            <pc:sldMk cId="4041497984" sldId="267"/>
-            <ac:spMk id="22" creationId="{1E299956-A9E7-4FC1-A0B1-D590CA9730E8}"/>
-          </ac:spMkLst>
-        </pc:spChg>
-        <pc:spChg chg="add del">
-          <ac:chgData name="Karthika Vellingiri" userId="2f791443-b2b6-40db-8581-89f0c0794d11" providerId="ADAL" clId="{272279B0-242C-4D01-9A5D-29699CA56103}" dt="2025-08-10T15:00:09.891" v="444" actId="26606"/>
-          <ac:spMkLst>
-            <pc:docMk/>
-            <pc:sldMk cId="4041497984" sldId="267"/>
-            <ac:spMk id="24" creationId="{17FC539C-B783-4B03-9F9E-D13430F3F64F}"/>
-          </ac:spMkLst>
-        </pc:spChg>
-        <pc:spChg chg="add del">
-          <ac:chgData name="Karthika Vellingiri" userId="2f791443-b2b6-40db-8581-89f0c0794d11" providerId="ADAL" clId="{272279B0-242C-4D01-9A5D-29699CA56103}" dt="2025-08-10T14:49:48.010" v="303" actId="26606"/>
-          <ac:spMkLst>
-            <pc:docMk/>
-            <pc:sldMk cId="4041497984" sldId="267"/>
-            <ac:spMk id="25" creationId="{7326F4E6-9131-42DA-97B2-0BA8D1E258AD}"/>
-          </ac:spMkLst>
-        </pc:spChg>
-        <pc:spChg chg="add del">
-          <ac:chgData name="Karthika Vellingiri" userId="2f791443-b2b6-40db-8581-89f0c0794d11" providerId="ADAL" clId="{272279B0-242C-4D01-9A5D-29699CA56103}" dt="2025-08-10T15:00:09.032" v="442" actId="26606"/>
-          <ac:spMkLst>
-            <pc:docMk/>
-            <pc:sldMk cId="4041497984" sldId="267"/>
-            <ac:spMk id="27" creationId="{53B8D6B0-55D6-48DC-86D8-FD95D5F118AB}"/>
-          </ac:spMkLst>
-        </pc:spChg>
-        <pc:spChg chg="add del">
-          <ac:chgData name="Karthika Vellingiri" userId="2f791443-b2b6-40db-8581-89f0c0794d11" providerId="ADAL" clId="{272279B0-242C-4D01-9A5D-29699CA56103}" dt="2025-08-10T15:00:09.032" v="442" actId="26606"/>
-          <ac:spMkLst>
-            <pc:docMk/>
-            <pc:sldMk cId="4041497984" sldId="267"/>
-            <ac:spMk id="31" creationId="{5FFCF544-A370-4A5D-A95F-CA6E0E7191E6}"/>
-          </ac:spMkLst>
-        </pc:spChg>
-        <pc:spChg chg="add del">
-          <ac:chgData name="Karthika Vellingiri" userId="2f791443-b2b6-40db-8581-89f0c0794d11" providerId="ADAL" clId="{272279B0-242C-4D01-9A5D-29699CA56103}" dt="2025-08-10T15:00:09.032" v="442" actId="26606"/>
-          <ac:spMkLst>
-            <pc:docMk/>
-            <pc:sldMk cId="4041497984" sldId="267"/>
-            <ac:spMk id="35" creationId="{44CC594A-A820-450F-B363-C19201FCFEC6}"/>
-          </ac:spMkLst>
-        </pc:spChg>
-        <pc:spChg chg="add del">
-          <ac:chgData name="Karthika Vellingiri" userId="2f791443-b2b6-40db-8581-89f0c0794d11" providerId="ADAL" clId="{272279B0-242C-4D01-9A5D-29699CA56103}" dt="2025-08-10T14:49:48.010" v="303" actId="26606"/>
-          <ac:spMkLst>
-            <pc:docMk/>
-            <pc:sldMk cId="4041497984" sldId="267"/>
-            <ac:spMk id="39" creationId="{763516C8-F227-4B77-9AA7-61B9A0B78253}"/>
-          </ac:spMkLst>
-        </pc:spChg>
-        <pc:spChg chg="add del">
-          <ac:chgData name="Karthika Vellingiri" userId="2f791443-b2b6-40db-8581-89f0c0794d11" providerId="ADAL" clId="{272279B0-242C-4D01-9A5D-29699CA56103}" dt="2025-08-10T14:49:22.642" v="291" actId="26606"/>
-          <ac:spMkLst>
-            <pc:docMk/>
-            <pc:sldMk cId="4041497984" sldId="267"/>
-            <ac:spMk id="40" creationId="{1996130F-9AB5-4DE9-8574-3AF891C5C172}"/>
-          </ac:spMkLst>
-        </pc:spChg>
-        <pc:spChg chg="add del">
-          <ac:chgData name="Karthika Vellingiri" userId="2f791443-b2b6-40db-8581-89f0c0794d11" providerId="ADAL" clId="{272279B0-242C-4D01-9A5D-29699CA56103}" dt="2025-08-10T14:49:48.010" v="303" actId="26606"/>
-          <ac:spMkLst>
-            <pc:docMk/>
-            <pc:sldMk cId="4041497984" sldId="267"/>
-            <ac:spMk id="41" creationId="{D91B420C-C4C8-44DF-96B2-FBD1014646FE}"/>
-          </ac:spMkLst>
-        </pc:spChg>
-        <pc:spChg chg="add del">
-          <ac:chgData name="Karthika Vellingiri" userId="2f791443-b2b6-40db-8581-89f0c0794d11" providerId="ADAL" clId="{272279B0-242C-4D01-9A5D-29699CA56103}" dt="2025-08-10T14:49:22.642" v="291" actId="26606"/>
-          <ac:spMkLst>
-            <pc:docMk/>
-            <pc:sldMk cId="4041497984" sldId="267"/>
-            <ac:spMk id="42" creationId="{7326F4E6-9131-42DA-97B2-0BA8D1E258AD}"/>
-          </ac:spMkLst>
-        </pc:spChg>
-        <pc:spChg chg="add del">
-          <ac:chgData name="Karthika Vellingiri" userId="2f791443-b2b6-40db-8581-89f0c0794d11" providerId="ADAL" clId="{272279B0-242C-4D01-9A5D-29699CA56103}" dt="2025-08-10T14:49:48.010" v="303" actId="26606"/>
-          <ac:spMkLst>
-            <pc:docMk/>
-            <pc:sldMk cId="4041497984" sldId="267"/>
-            <ac:spMk id="43" creationId="{070928B1-3E69-44AC-A1EE-B4E4270A7A51}"/>
-          </ac:spMkLst>
-        </pc:spChg>
-        <pc:spChg chg="add del">
-          <ac:chgData name="Karthika Vellingiri" userId="2f791443-b2b6-40db-8581-89f0c0794d11" providerId="ADAL" clId="{272279B0-242C-4D01-9A5D-29699CA56103}" dt="2025-08-10T14:49:22.642" v="291" actId="26606"/>
-          <ac:spMkLst>
-            <pc:docMk/>
-            <pc:sldMk cId="4041497984" sldId="267"/>
-            <ac:spMk id="44" creationId="{3F4C104D-5F30-4811-9376-566B26E4719A}"/>
-          </ac:spMkLst>
-        </pc:spChg>
-        <pc:spChg chg="add del">
-          <ac:chgData name="Karthika Vellingiri" userId="2f791443-b2b6-40db-8581-89f0c0794d11" providerId="ADAL" clId="{272279B0-242C-4D01-9A5D-29699CA56103}" dt="2025-08-10T14:49:22.642" v="291" actId="26606"/>
-          <ac:spMkLst>
-            <pc:docMk/>
-            <pc:sldMk cId="4041497984" sldId="267"/>
-            <ac:spMk id="46" creationId="{0815E34B-5D02-4E01-A936-E8E1C0AB6F12}"/>
-          </ac:spMkLst>
-        </pc:spChg>
-        <pc:spChg chg="add del">
-          <ac:chgData name="Karthika Vellingiri" userId="2f791443-b2b6-40db-8581-89f0c0794d11" providerId="ADAL" clId="{272279B0-242C-4D01-9A5D-29699CA56103}" dt="2025-08-10T14:49:22.642" v="291" actId="26606"/>
-          <ac:spMkLst>
-            <pc:docMk/>
-            <pc:sldMk cId="4041497984" sldId="267"/>
-            <ac:spMk id="48" creationId="{7DE3414B-B032-4710-A468-D3285E38C5FF}"/>
-          </ac:spMkLst>
-        </pc:spChg>
-        <pc:spChg chg="add del">
-          <ac:chgData name="Karthika Vellingiri" userId="2f791443-b2b6-40db-8581-89f0c0794d11" providerId="ADAL" clId="{272279B0-242C-4D01-9A5D-29699CA56103}" dt="2025-08-10T14:49:52.695" v="305" actId="26606"/>
-          <ac:spMkLst>
-            <pc:docMk/>
-            <pc:sldMk cId="4041497984" sldId="267"/>
-            <ac:spMk id="75" creationId="{1996130F-9AB5-4DE9-8574-3AF891C5C172}"/>
-          </ac:spMkLst>
-        </pc:spChg>
-        <pc:spChg chg="add del">
-          <ac:chgData name="Karthika Vellingiri" userId="2f791443-b2b6-40db-8581-89f0c0794d11" providerId="ADAL" clId="{272279B0-242C-4D01-9A5D-29699CA56103}" dt="2025-08-10T14:49:25.603" v="293" actId="26606"/>
-          <ac:spMkLst>
-            <pc:docMk/>
-            <pc:sldMk cId="4041497984" sldId="267"/>
-            <ac:spMk id="76" creationId="{1996130F-9AB5-4DE9-8574-3AF891C5C172}"/>
-          </ac:spMkLst>
-        </pc:spChg>
-        <pc:spChg chg="add del">
-          <ac:chgData name="Karthika Vellingiri" userId="2f791443-b2b6-40db-8581-89f0c0794d11" providerId="ADAL" clId="{272279B0-242C-4D01-9A5D-29699CA56103}" dt="2025-08-10T14:49:25.603" v="293" actId="26606"/>
-          <ac:spMkLst>
-            <pc:docMk/>
-            <pc:sldMk cId="4041497984" sldId="267"/>
-            <ac:spMk id="77" creationId="{7326F4E6-9131-42DA-97B2-0BA8D1E258AD}"/>
-          </ac:spMkLst>
-        </pc:spChg>
-        <pc:spChg chg="add del">
-          <ac:chgData name="Karthika Vellingiri" userId="2f791443-b2b6-40db-8581-89f0c0794d11" providerId="ADAL" clId="{272279B0-242C-4D01-9A5D-29699CA56103}" dt="2025-08-10T14:49:52.695" v="305" actId="26606"/>
-          <ac:spMkLst>
-            <pc:docMk/>
-            <pc:sldMk cId="4041497984" sldId="267"/>
-            <ac:spMk id="78" creationId="{7326F4E6-9131-42DA-97B2-0BA8D1E258AD}"/>
-          </ac:spMkLst>
-        </pc:spChg>
-        <pc:spChg chg="add del">
-          <ac:chgData name="Karthika Vellingiri" userId="2f791443-b2b6-40db-8581-89f0c0794d11" providerId="ADAL" clId="{272279B0-242C-4D01-9A5D-29699CA56103}" dt="2025-08-10T14:49:27.837" v="295" actId="26606"/>
-          <ac:spMkLst>
-            <pc:docMk/>
-            <pc:sldMk cId="4041497984" sldId="267"/>
-            <ac:spMk id="81" creationId="{DE91395A-2D18-4AF6-A0AC-AAA7189FED11}"/>
-          </ac:spMkLst>
-        </pc:spChg>
-        <pc:spChg chg="add del">
-          <ac:chgData name="Karthika Vellingiri" userId="2f791443-b2b6-40db-8581-89f0c0794d11" providerId="ADAL" clId="{272279B0-242C-4D01-9A5D-29699CA56103}" dt="2025-08-10T14:49:27.837" v="295" actId="26606"/>
-          <ac:spMkLst>
-            <pc:docMk/>
-            <pc:sldMk cId="4041497984" sldId="267"/>
-            <ac:spMk id="82" creationId="{A57352BE-A213-4040-BE8E-D4A925AD9DF8}"/>
-          </ac:spMkLst>
-        </pc:spChg>
-        <pc:spChg chg="add del">
-          <ac:chgData name="Karthika Vellingiri" userId="2f791443-b2b6-40db-8581-89f0c0794d11" providerId="ADAL" clId="{272279B0-242C-4D01-9A5D-29699CA56103}" dt="2025-08-10T14:49:27.837" v="295" actId="26606"/>
-          <ac:spMkLst>
-            <pc:docMk/>
-            <pc:sldMk cId="4041497984" sldId="267"/>
-            <ac:spMk id="83" creationId="{B2EC7880-C5D9-40A8-A6B0-3198AD07AD1B}"/>
-          </ac:spMkLst>
-        </pc:spChg>
-        <pc:spChg chg="add del">
-          <ac:chgData name="Karthika Vellingiri" userId="2f791443-b2b6-40db-8581-89f0c0794d11" providerId="ADAL" clId="{272279B0-242C-4D01-9A5D-29699CA56103}" dt="2025-08-10T14:49:27.837" v="295" actId="26606"/>
-          <ac:spMkLst>
-            <pc:docMk/>
-            <pc:sldMk cId="4041497984" sldId="267"/>
-            <ac:spMk id="84" creationId="{94543A62-A2AB-454A-878E-D3D9190D5FC7}"/>
-          </ac:spMkLst>
-        </pc:spChg>
-        <pc:spChg chg="add del">
-          <ac:chgData name="Karthika Vellingiri" userId="2f791443-b2b6-40db-8581-89f0c0794d11" providerId="ADAL" clId="{272279B0-242C-4D01-9A5D-29699CA56103}" dt="2025-08-10T14:49:27.837" v="295" actId="26606"/>
-          <ac:spMkLst>
-            <pc:docMk/>
-            <pc:sldMk cId="4041497984" sldId="267"/>
-            <ac:spMk id="85" creationId="{50553464-41F1-4160-9D02-7C5EC7013BDA}"/>
-          </ac:spMkLst>
-        </pc:spChg>
-        <pc:spChg chg="add del">
-          <ac:chgData name="Karthika Vellingiri" userId="2f791443-b2b6-40db-8581-89f0c0794d11" providerId="ADAL" clId="{272279B0-242C-4D01-9A5D-29699CA56103}" dt="2025-08-10T14:50:09.402" v="312"/>
-          <ac:spMkLst>
-            <pc:docMk/>
-            <pc:sldMk cId="4041497984" sldId="267"/>
-            <ac:spMk id="89" creationId="{1996130F-9AB5-4DE9-8574-3AF891C5C172}"/>
-          </ac:spMkLst>
-        </pc:spChg>
-        <pc:spChg chg="add del">
-          <ac:chgData name="Karthika Vellingiri" userId="2f791443-b2b6-40db-8581-89f0c0794d11" providerId="ADAL" clId="{272279B0-242C-4D01-9A5D-29699CA56103}" dt="2025-08-10T14:50:09.402" v="312"/>
-          <ac:spMkLst>
-            <pc:docMk/>
-            <pc:sldMk cId="4041497984" sldId="267"/>
-            <ac:spMk id="90" creationId="{7326F4E6-9131-42DA-97B2-0BA8D1E258AD}"/>
-          </ac:spMkLst>
-        </pc:spChg>
-        <pc:spChg chg="add del">
-          <ac:chgData name="Karthika Vellingiri" userId="2f791443-b2b6-40db-8581-89f0c0794d11" providerId="ADAL" clId="{272279B0-242C-4D01-9A5D-29699CA56103}" dt="2025-08-10T14:50:09.402" v="312"/>
-          <ac:spMkLst>
-            <pc:docMk/>
-            <pc:sldMk cId="4041497984" sldId="267"/>
-            <ac:spMk id="91" creationId="{3F4C104D-5F30-4811-9376-566B26E4719A}"/>
-          </ac:spMkLst>
-        </pc:spChg>
-        <pc:spChg chg="add del">
-          <ac:chgData name="Karthika Vellingiri" userId="2f791443-b2b6-40db-8581-89f0c0794d11" providerId="ADAL" clId="{272279B0-242C-4D01-9A5D-29699CA56103}" dt="2025-08-10T14:50:09.402" v="312"/>
-          <ac:spMkLst>
-            <pc:docMk/>
-            <pc:sldMk cId="4041497984" sldId="267"/>
-            <ac:spMk id="92" creationId="{0815E34B-5D02-4E01-A936-E8E1C0AB6F12}"/>
-          </ac:spMkLst>
-        </pc:spChg>
-        <pc:spChg chg="add del">
-          <ac:chgData name="Karthika Vellingiri" userId="2f791443-b2b6-40db-8581-89f0c0794d11" providerId="ADAL" clId="{272279B0-242C-4D01-9A5D-29699CA56103}" dt="2025-08-10T14:50:09.402" v="312"/>
-          <ac:spMkLst>
-            <pc:docMk/>
-            <pc:sldMk cId="4041497984" sldId="267"/>
-            <ac:spMk id="93" creationId="{7DE3414B-B032-4710-A468-D3285E38C5FF}"/>
-          </ac:spMkLst>
-        </pc:spChg>
-        <pc:spChg chg="add del">
-          <ac:chgData name="Karthika Vellingiri" userId="2f791443-b2b6-40db-8581-89f0c0794d11" providerId="ADAL" clId="{272279B0-242C-4D01-9A5D-29699CA56103}" dt="2025-08-10T14:49:31.183" v="297" actId="26606"/>
-          <ac:spMkLst>
-            <pc:docMk/>
-            <pc:sldMk cId="4041497984" sldId="267"/>
-            <ac:spMk id="113" creationId="{1996130F-9AB5-4DE9-8574-3AF891C5C172}"/>
-          </ac:spMkLst>
-        </pc:spChg>
-        <pc:spChg chg="add del">
-          <ac:chgData name="Karthika Vellingiri" userId="2f791443-b2b6-40db-8581-89f0c0794d11" providerId="ADAL" clId="{272279B0-242C-4D01-9A5D-29699CA56103}" dt="2025-08-10T14:49:31.183" v="297" actId="26606"/>
-          <ac:spMkLst>
-            <pc:docMk/>
-            <pc:sldMk cId="4041497984" sldId="267"/>
-            <ac:spMk id="114" creationId="{7326F4E6-9131-42DA-97B2-0BA8D1E258AD}"/>
-          </ac:spMkLst>
-        </pc:spChg>
-        <pc:grpChg chg="add del">
-          <ac:chgData name="Karthika Vellingiri" userId="2f791443-b2b6-40db-8581-89f0c0794d11" providerId="ADAL" clId="{272279B0-242C-4D01-9A5D-29699CA56103}" dt="2025-08-10T14:49:48.010" v="303" actId="26606"/>
-          <ac:grpSpMkLst>
-            <pc:docMk/>
-            <pc:sldMk cId="4041497984" sldId="267"/>
-            <ac:grpSpMk id="9" creationId="{166BF9EE-F7AC-4FA5-AC7E-001B3A642F75}"/>
-          </ac:grpSpMkLst>
-        </pc:grpChg>
-        <pc:grpChg chg="add del">
-          <ac:chgData name="Karthika Vellingiri" userId="2f791443-b2b6-40db-8581-89f0c0794d11" providerId="ADAL" clId="{272279B0-242C-4D01-9A5D-29699CA56103}" dt="2025-08-10T14:49:48.010" v="303" actId="26606"/>
-          <ac:grpSpMkLst>
-            <pc:docMk/>
-            <pc:sldMk cId="4041497984" sldId="267"/>
-            <ac:grpSpMk id="10" creationId="{E312DBA5-56D8-42B2-BA94-28168C2A6703}"/>
-          </ac:grpSpMkLst>
-        </pc:grpChg>
-        <pc:grpChg chg="add del">
-          <ac:chgData name="Karthika Vellingiri" userId="2f791443-b2b6-40db-8581-89f0c0794d11" providerId="ADAL" clId="{272279B0-242C-4D01-9A5D-29699CA56103}" dt="2025-08-10T14:49:22.642" v="291" actId="26606"/>
-          <ac:grpSpMkLst>
-            <pc:docMk/>
-            <pc:sldMk cId="4041497984" sldId="267"/>
-            <ac:grpSpMk id="12" creationId="{166BF9EE-F7AC-4FA5-AC7E-001B3A642F75}"/>
-          </ac:grpSpMkLst>
-        </pc:grpChg>
-        <pc:grpChg chg="add del">
-          <ac:chgData name="Karthika Vellingiri" userId="2f791443-b2b6-40db-8581-89f0c0794d11" providerId="ADAL" clId="{272279B0-242C-4D01-9A5D-29699CA56103}" dt="2025-08-10T14:49:22.642" v="291" actId="26606"/>
-          <ac:grpSpMkLst>
-            <pc:docMk/>
-            <pc:sldMk cId="4041497984" sldId="267"/>
-            <ac:grpSpMk id="26" creationId="{E312DBA5-56D8-42B2-BA94-28168C2A6703}"/>
-          </ac:grpSpMkLst>
-        </pc:grpChg>
-        <pc:grpChg chg="add del">
-          <ac:chgData name="Karthika Vellingiri" userId="2f791443-b2b6-40db-8581-89f0c0794d11" providerId="ADAL" clId="{272279B0-242C-4D01-9A5D-29699CA56103}" dt="2025-08-10T14:49:52.695" v="305" actId="26606"/>
-          <ac:grpSpMkLst>
-            <pc:docMk/>
-            <pc:sldMk cId="4041497984" sldId="267"/>
-            <ac:grpSpMk id="45" creationId="{166BF9EE-F7AC-4FA5-AC7E-001B3A642F75}"/>
-          </ac:grpSpMkLst>
-        </pc:grpChg>
-        <pc:grpChg chg="add del">
-          <ac:chgData name="Karthika Vellingiri" userId="2f791443-b2b6-40db-8581-89f0c0794d11" providerId="ADAL" clId="{272279B0-242C-4D01-9A5D-29699CA56103}" dt="2025-08-10T14:49:25.603" v="293" actId="26606"/>
-          <ac:grpSpMkLst>
-            <pc:docMk/>
-            <pc:sldMk cId="4041497984" sldId="267"/>
-            <ac:grpSpMk id="50" creationId="{166BF9EE-F7AC-4FA5-AC7E-001B3A642F75}"/>
-          </ac:grpSpMkLst>
-        </pc:grpChg>
-        <pc:grpChg chg="add del">
-          <ac:chgData name="Karthika Vellingiri" userId="2f791443-b2b6-40db-8581-89f0c0794d11" providerId="ADAL" clId="{272279B0-242C-4D01-9A5D-29699CA56103}" dt="2025-08-10T14:49:52.695" v="305" actId="26606"/>
-          <ac:grpSpMkLst>
-            <pc:docMk/>
-            <pc:sldMk cId="4041497984" sldId="267"/>
-            <ac:grpSpMk id="61" creationId="{E312DBA5-56D8-42B2-BA94-28168C2A6703}"/>
-          </ac:grpSpMkLst>
-        </pc:grpChg>
-        <pc:grpChg chg="add del">
-          <ac:chgData name="Karthika Vellingiri" userId="2f791443-b2b6-40db-8581-89f0c0794d11" providerId="ADAL" clId="{272279B0-242C-4D01-9A5D-29699CA56103}" dt="2025-08-10T14:49:25.603" v="293" actId="26606"/>
-          <ac:grpSpMkLst>
-            <pc:docMk/>
-            <pc:sldMk cId="4041497984" sldId="267"/>
-            <ac:grpSpMk id="63" creationId="{E312DBA5-56D8-42B2-BA94-28168C2A6703}"/>
-          </ac:grpSpMkLst>
-        </pc:grpChg>
-        <pc:grpChg chg="add del">
-          <ac:chgData name="Karthika Vellingiri" userId="2f791443-b2b6-40db-8581-89f0c0794d11" providerId="ADAL" clId="{272279B0-242C-4D01-9A5D-29699CA56103}" dt="2025-08-10T14:49:27.837" v="295" actId="26606"/>
-          <ac:grpSpMkLst>
-            <pc:docMk/>
-            <pc:sldMk cId="4041497984" sldId="267"/>
-            <ac:grpSpMk id="79" creationId="{7398C59F-5A18-487B-91D6-B955AACF2E50}"/>
-          </ac:grpSpMkLst>
-        </pc:grpChg>
-        <pc:grpChg chg="add del">
-          <ac:chgData name="Karthika Vellingiri" userId="2f791443-b2b6-40db-8581-89f0c0794d11" providerId="ADAL" clId="{272279B0-242C-4D01-9A5D-29699CA56103}" dt="2025-08-10T14:49:27.837" v="295" actId="26606"/>
-          <ac:grpSpMkLst>
-            <pc:docMk/>
-            <pc:sldMk cId="4041497984" sldId="267"/>
-            <ac:grpSpMk id="80" creationId="{520234FB-542E-4550-9C2F-1B56FD41A1CA}"/>
-          </ac:grpSpMkLst>
-        </pc:grpChg>
-        <pc:grpChg chg="add del">
-          <ac:chgData name="Karthika Vellingiri" userId="2f791443-b2b6-40db-8581-89f0c0794d11" providerId="ADAL" clId="{272279B0-242C-4D01-9A5D-29699CA56103}" dt="2025-08-10T14:50:09.402" v="312"/>
-          <ac:grpSpMkLst>
-            <pc:docMk/>
-            <pc:sldMk cId="4041497984" sldId="267"/>
-            <ac:grpSpMk id="86" creationId="{166BF9EE-F7AC-4FA5-AC7E-001B3A642F75}"/>
-          </ac:grpSpMkLst>
-        </pc:grpChg>
-        <pc:grpChg chg="add del">
-          <ac:chgData name="Karthika Vellingiri" userId="2f791443-b2b6-40db-8581-89f0c0794d11" providerId="ADAL" clId="{272279B0-242C-4D01-9A5D-29699CA56103}" dt="2025-08-10T14:49:31.183" v="297" actId="26606"/>
-          <ac:grpSpMkLst>
-            <pc:docMk/>
-            <pc:sldMk cId="4041497984" sldId="267"/>
-            <ac:grpSpMk id="87" creationId="{166BF9EE-F7AC-4FA5-AC7E-001B3A642F75}"/>
-          </ac:grpSpMkLst>
-        </pc:grpChg>
-        <pc:grpChg chg="add del">
-          <ac:chgData name="Karthika Vellingiri" userId="2f791443-b2b6-40db-8581-89f0c0794d11" providerId="ADAL" clId="{272279B0-242C-4D01-9A5D-29699CA56103}" dt="2025-08-10T14:50:09.402" v="312"/>
-          <ac:grpSpMkLst>
-            <pc:docMk/>
-            <pc:sldMk cId="4041497984" sldId="267"/>
-            <ac:grpSpMk id="88" creationId="{E312DBA5-56D8-42B2-BA94-28168C2A6703}"/>
-          </ac:grpSpMkLst>
-        </pc:grpChg>
-        <pc:grpChg chg="add del">
-          <ac:chgData name="Karthika Vellingiri" userId="2f791443-b2b6-40db-8581-89f0c0794d11" providerId="ADAL" clId="{272279B0-242C-4D01-9A5D-29699CA56103}" dt="2025-08-10T14:49:31.183" v="297" actId="26606"/>
-          <ac:grpSpMkLst>
-            <pc:docMk/>
-            <pc:sldMk cId="4041497984" sldId="267"/>
-            <ac:grpSpMk id="100" creationId="{E312DBA5-56D8-42B2-BA94-28168C2A6703}"/>
-          </ac:grpSpMkLst>
-        </pc:grpChg>
-        <pc:picChg chg="add mod ord">
-          <ac:chgData name="Karthika Vellingiri" userId="2f791443-b2b6-40db-8581-89f0c0794d11" providerId="ADAL" clId="{272279B0-242C-4D01-9A5D-29699CA56103}" dt="2025-08-10T15:00:09.891" v="444" actId="26606"/>
-          <ac:picMkLst>
-            <pc:docMk/>
-            <pc:sldMk cId="4041497984" sldId="267"/>
-            <ac:picMk id="6" creationId="{937BC9F6-2596-0AD3-9F39-9686F9D21D19}"/>
-          </ac:picMkLst>
-        </pc:picChg>
-        <pc:cxnChg chg="add del">
-          <ac:chgData name="Karthika Vellingiri" userId="2f791443-b2b6-40db-8581-89f0c0794d11" providerId="ADAL" clId="{272279B0-242C-4D01-9A5D-29699CA56103}" dt="2025-08-10T15:00:09.891" v="444" actId="26606"/>
-          <ac:cxnSpMkLst>
-            <pc:docMk/>
-            <pc:sldMk cId="4041497984" sldId="267"/>
-            <ac:cxnSpMk id="16" creationId="{6EEB3B97-A638-498B-8083-54191CE71E01}"/>
-          </ac:cxnSpMkLst>
-        </pc:cxnChg>
-        <pc:cxnChg chg="add del">
-          <ac:chgData name="Karthika Vellingiri" userId="2f791443-b2b6-40db-8581-89f0c0794d11" providerId="ADAL" clId="{272279B0-242C-4D01-9A5D-29699CA56103}" dt="2025-08-10T15:00:09.891" v="444" actId="26606"/>
-          <ac:cxnSpMkLst>
-            <pc:docMk/>
-            <pc:sldMk cId="4041497984" sldId="267"/>
-            <ac:cxnSpMk id="20" creationId="{C947DF4A-614C-4B4C-8B80-E5B9D8E8CFED}"/>
-          </ac:cxnSpMkLst>
-        </pc:cxnChg>
-      </pc:sldChg>
-      <pc:sldChg chg="addSp delSp modSp new mod setBg modNotesTx">
-        <pc:chgData name="Karthika Vellingiri" userId="2f791443-b2b6-40db-8581-89f0c0794d11" providerId="ADAL" clId="{272279B0-242C-4D01-9A5D-29699CA56103}" dt="2025-08-10T15:25:20.532" v="660" actId="6549"/>
-        <pc:sldMkLst>
-          <pc:docMk/>
-          <pc:sldMk cId="2721965878" sldId="268"/>
-        </pc:sldMkLst>
-        <pc:spChg chg="mod">
-          <ac:chgData name="Karthika Vellingiri" userId="2f791443-b2b6-40db-8581-89f0c0794d11" providerId="ADAL" clId="{272279B0-242C-4D01-9A5D-29699CA56103}" dt="2025-08-10T14:59:08.784" v="431" actId="1076"/>
-          <ac:spMkLst>
-            <pc:docMk/>
-            <pc:sldMk cId="2721965878" sldId="268"/>
-            <ac:spMk id="2" creationId="{79F65D6C-7464-6BA5-7826-11E4BE96A1A7}"/>
-          </ac:spMkLst>
-        </pc:spChg>
-        <pc:spChg chg="del">
-          <ac:chgData name="Karthika Vellingiri" userId="2f791443-b2b6-40db-8581-89f0c0794d11" providerId="ADAL" clId="{272279B0-242C-4D01-9A5D-29699CA56103}" dt="2025-08-10T14:54:44.180" v="371" actId="931"/>
-          <ac:spMkLst>
-            <pc:docMk/>
-            <pc:sldMk cId="2721965878" sldId="268"/>
-            <ac:spMk id="3" creationId="{C1A55E78-6D74-A11A-AAA7-5DE662819DE1}"/>
-          </ac:spMkLst>
-        </pc:spChg>
-        <pc:spChg chg="del mod">
-          <ac:chgData name="Karthika Vellingiri" userId="2f791443-b2b6-40db-8581-89f0c0794d11" providerId="ADAL" clId="{272279B0-242C-4D01-9A5D-29699CA56103}" dt="2025-08-10T14:56:55.310" v="392"/>
-          <ac:spMkLst>
-            <pc:docMk/>
-            <pc:sldMk cId="2721965878" sldId="268"/>
-            <ac:spMk id="4" creationId="{0865C0BE-D5F2-4E23-6F03-3CDEF41EC105}"/>
-          </ac:spMkLst>
-        </pc:spChg>
-        <pc:spChg chg="add mod">
-          <ac:chgData name="Karthika Vellingiri" userId="2f791443-b2b6-40db-8581-89f0c0794d11" providerId="ADAL" clId="{272279B0-242C-4D01-9A5D-29699CA56103}" dt="2025-08-10T14:57:00.542" v="395" actId="26606"/>
-          <ac:spMkLst>
-            <pc:docMk/>
-            <pc:sldMk cId="2721965878" sldId="268"/>
-            <ac:spMk id="7" creationId="{F1F2E367-9E40-D141-77B7-529D164B38CC}"/>
-          </ac:spMkLst>
-        </pc:spChg>
-        <pc:spChg chg="add del">
-          <ac:chgData name="Karthika Vellingiri" userId="2f791443-b2b6-40db-8581-89f0c0794d11" providerId="ADAL" clId="{272279B0-242C-4D01-9A5D-29699CA56103}" dt="2025-08-10T14:57:00.542" v="395" actId="26606"/>
-          <ac:spMkLst>
-            <pc:docMk/>
-            <pc:sldMk cId="2721965878" sldId="268"/>
-            <ac:spMk id="8" creationId="{7D379150-F6B4-45C8-BE10-6B278AD400EB}"/>
-          </ac:spMkLst>
-        </pc:spChg>
-        <pc:spChg chg="add del">
-          <ac:chgData name="Karthika Vellingiri" userId="2f791443-b2b6-40db-8581-89f0c0794d11" providerId="ADAL" clId="{272279B0-242C-4D01-9A5D-29699CA56103}" dt="2025-08-10T14:57:00.530" v="394" actId="26606"/>
-          <ac:spMkLst>
-            <pc:docMk/>
-            <pc:sldMk cId="2721965878" sldId="268"/>
-            <ac:spMk id="9" creationId="{5FFCF544-A370-4A5D-A95F-CA6E0E7191E6}"/>
-          </ac:spMkLst>
-        </pc:spChg>
-        <pc:spChg chg="add del">
-          <ac:chgData name="Karthika Vellingiri" userId="2f791443-b2b6-40db-8581-89f0c0794d11" providerId="ADAL" clId="{272279B0-242C-4D01-9A5D-29699CA56103}" dt="2025-08-10T14:55:07.418" v="379" actId="26606"/>
-          <ac:spMkLst>
-            <pc:docMk/>
-            <pc:sldMk cId="2721965878" sldId="268"/>
-            <ac:spMk id="11" creationId="{7D379150-F6B4-45C8-BE10-6B278AD400EB}"/>
-          </ac:spMkLst>
-        </pc:spChg>
-        <pc:spChg chg="add del">
-          <ac:chgData name="Karthika Vellingiri" userId="2f791443-b2b6-40db-8581-89f0c0794d11" providerId="ADAL" clId="{272279B0-242C-4D01-9A5D-29699CA56103}" dt="2025-08-10T14:57:00.542" v="395" actId="26606"/>
-          <ac:spMkLst>
-            <pc:docMk/>
-            <pc:sldMk cId="2721965878" sldId="268"/>
-            <ac:spMk id="12" creationId="{44CC594A-A820-450F-B363-C19201FCFEC6}"/>
-          </ac:spMkLst>
-        </pc:spChg>
-        <pc:spChg chg="add del">
-          <ac:chgData name="Karthika Vellingiri" userId="2f791443-b2b6-40db-8581-89f0c0794d11" providerId="ADAL" clId="{272279B0-242C-4D01-9A5D-29699CA56103}" dt="2025-08-10T14:55:07.418" v="379" actId="26606"/>
-          <ac:spMkLst>
-            <pc:docMk/>
-            <pc:sldMk cId="2721965878" sldId="268"/>
-            <ac:spMk id="13" creationId="{5FFCF544-A370-4A5D-A95F-CA6E0E7191E6}"/>
-          </ac:spMkLst>
-        </pc:spChg>
-        <pc:spChg chg="add del">
-          <ac:chgData name="Karthika Vellingiri" userId="2f791443-b2b6-40db-8581-89f0c0794d11" providerId="ADAL" clId="{272279B0-242C-4D01-9A5D-29699CA56103}" dt="2025-08-10T14:57:00.530" v="394" actId="26606"/>
-          <ac:spMkLst>
-            <pc:docMk/>
-            <pc:sldMk cId="2721965878" sldId="268"/>
-            <ac:spMk id="14" creationId="{59FAB3DA-E9ED-4574-ABCC-378BC0FF1BBC}"/>
-          </ac:spMkLst>
-        </pc:spChg>
-        <pc:spChg chg="add del">
-          <ac:chgData name="Karthika Vellingiri" userId="2f791443-b2b6-40db-8581-89f0c0794d11" providerId="ADAL" clId="{272279B0-242C-4D01-9A5D-29699CA56103}" dt="2025-08-10T14:57:00.542" v="395" actId="26606"/>
-          <ac:spMkLst>
-            <pc:docMk/>
-            <pc:sldMk cId="2721965878" sldId="268"/>
-            <ac:spMk id="16" creationId="{53B8D6B0-55D6-48DC-86D8-FD95D5F118AB}"/>
-          </ac:spMkLst>
-        </pc:spChg>
-        <pc:spChg chg="add del">
-          <ac:chgData name="Karthika Vellingiri" userId="2f791443-b2b6-40db-8581-89f0c0794d11" providerId="ADAL" clId="{272279B0-242C-4D01-9A5D-29699CA56103}" dt="2025-08-10T14:55:07.418" v="379" actId="26606"/>
-          <ac:spMkLst>
-            <pc:docMk/>
-            <pc:sldMk cId="2721965878" sldId="268"/>
-            <ac:spMk id="17" creationId="{44CC594A-A820-450F-B363-C19201FCFEC6}"/>
-          </ac:spMkLst>
-        </pc:spChg>
-        <pc:spChg chg="add del">
-          <ac:chgData name="Karthika Vellingiri" userId="2f791443-b2b6-40db-8581-89f0c0794d11" providerId="ADAL" clId="{272279B0-242C-4D01-9A5D-29699CA56103}" dt="2025-08-10T14:57:00.530" v="394" actId="26606"/>
-          <ac:spMkLst>
-            <pc:docMk/>
-            <pc:sldMk cId="2721965878" sldId="268"/>
-            <ac:spMk id="18" creationId="{7D379150-F6B4-45C8-BE10-6B278AD400EB}"/>
-          </ac:spMkLst>
-        </pc:spChg>
-        <pc:spChg chg="add del">
-          <ac:chgData name="Karthika Vellingiri" userId="2f791443-b2b6-40db-8581-89f0c0794d11" providerId="ADAL" clId="{272279B0-242C-4D01-9A5D-29699CA56103}" dt="2025-08-10T14:55:07.418" v="379" actId="26606"/>
-          <ac:spMkLst>
-            <pc:docMk/>
-            <pc:sldMk cId="2721965878" sldId="268"/>
-            <ac:spMk id="19" creationId="{59FAB3DA-E9ED-4574-ABCC-378BC0FF1BBC}"/>
-          </ac:spMkLst>
-        </pc:spChg>
-        <pc:spChg chg="add del">
-          <ac:chgData name="Karthika Vellingiri" userId="2f791443-b2b6-40db-8581-89f0c0794d11" providerId="ADAL" clId="{272279B0-242C-4D01-9A5D-29699CA56103}" dt="2025-08-10T14:57:00.530" v="394" actId="26606"/>
-          <ac:spMkLst>
-            <pc:docMk/>
-            <pc:sldMk cId="2721965878" sldId="268"/>
-            <ac:spMk id="20" creationId="{5FFCF544-A370-4A5D-A95F-CA6E0E7191E6}"/>
-          </ac:spMkLst>
-        </pc:spChg>
-        <pc:spChg chg="add del">
-          <ac:chgData name="Karthika Vellingiri" userId="2f791443-b2b6-40db-8581-89f0c0794d11" providerId="ADAL" clId="{272279B0-242C-4D01-9A5D-29699CA56103}" dt="2025-08-10T14:55:07.418" v="379" actId="26606"/>
-          <ac:spMkLst>
-            <pc:docMk/>
-            <pc:sldMk cId="2721965878" sldId="268"/>
-            <ac:spMk id="21" creationId="{53B8D6B0-55D6-48DC-86D8-FD95D5F118AB}"/>
-          </ac:spMkLst>
-        </pc:spChg>
-        <pc:spChg chg="add del">
-          <ac:chgData name="Karthika Vellingiri" userId="2f791443-b2b6-40db-8581-89f0c0794d11" providerId="ADAL" clId="{272279B0-242C-4D01-9A5D-29699CA56103}" dt="2025-08-10T14:55:29.805" v="385" actId="26606"/>
-          <ac:spMkLst>
-            <pc:docMk/>
-            <pc:sldMk cId="2721965878" sldId="268"/>
-            <ac:spMk id="23" creationId="{600B5AE2-C5CC-499C-8F2D-249888BE22C2}"/>
-          </ac:spMkLst>
-        </pc:spChg>
-        <pc:spChg chg="add del">
-          <ac:chgData name="Karthika Vellingiri" userId="2f791443-b2b6-40db-8581-89f0c0794d11" providerId="ADAL" clId="{272279B0-242C-4D01-9A5D-29699CA56103}" dt="2025-08-10T14:55:29.805" v="385" actId="26606"/>
-          <ac:spMkLst>
-            <pc:docMk/>
-            <pc:sldMk cId="2721965878" sldId="268"/>
-            <ac:spMk id="24" creationId="{BA7A3698-B350-40E5-8475-9BCC41A089FC}"/>
-          </ac:spMkLst>
-        </pc:spChg>
-        <pc:spChg chg="add del">
-          <ac:chgData name="Karthika Vellingiri" userId="2f791443-b2b6-40db-8581-89f0c0794d11" providerId="ADAL" clId="{272279B0-242C-4D01-9A5D-29699CA56103}" dt="2025-08-10T14:55:29.805" v="385" actId="26606"/>
-          <ac:spMkLst>
-            <pc:docMk/>
-            <pc:sldMk cId="2721965878" sldId="268"/>
-            <ac:spMk id="26" creationId="{311973C2-EB8B-452A-A698-4A252FD3AE28}"/>
-          </ac:spMkLst>
-        </pc:spChg>
-        <pc:spChg chg="add del">
-          <ac:chgData name="Karthika Vellingiri" userId="2f791443-b2b6-40db-8581-89f0c0794d11" providerId="ADAL" clId="{272279B0-242C-4D01-9A5D-29699CA56103}" dt="2025-08-10T14:55:29.805" v="385" actId="26606"/>
-          <ac:spMkLst>
-            <pc:docMk/>
-            <pc:sldMk cId="2721965878" sldId="268"/>
-            <ac:spMk id="27" creationId="{10162E77-11AD-44A7-84EC-40C59EEFBD2E}"/>
-          </ac:spMkLst>
-        </pc:spChg>
-        <pc:spChg chg="add del">
-          <ac:chgData name="Karthika Vellingiri" userId="2f791443-b2b6-40db-8581-89f0c0794d11" providerId="ADAL" clId="{272279B0-242C-4D01-9A5D-29699CA56103}" dt="2025-08-10T14:57:00.530" v="394" actId="26606"/>
-          <ac:spMkLst>
-            <pc:docMk/>
-            <pc:sldMk cId="2721965878" sldId="268"/>
-            <ac:spMk id="30" creationId="{284B70D5-875B-433D-BDBD-1522A85D6C1D}"/>
-          </ac:spMkLst>
-        </pc:spChg>
-        <pc:spChg chg="add del">
-          <ac:chgData name="Karthika Vellingiri" userId="2f791443-b2b6-40db-8581-89f0c0794d11" providerId="ADAL" clId="{272279B0-242C-4D01-9A5D-29699CA56103}" dt="2025-08-10T14:57:00.530" v="394" actId="26606"/>
-          <ac:spMkLst>
-            <pc:docMk/>
-            <pc:sldMk cId="2721965878" sldId="268"/>
-            <ac:spMk id="31" creationId="{1E299956-A9E7-4FC1-A0B1-D590CA9730E8}"/>
-          </ac:spMkLst>
-        </pc:spChg>
-        <pc:spChg chg="add del">
-          <ac:chgData name="Karthika Vellingiri" userId="2f791443-b2b6-40db-8581-89f0c0794d11" providerId="ADAL" clId="{272279B0-242C-4D01-9A5D-29699CA56103}" dt="2025-08-10T14:57:00.530" v="394" actId="26606"/>
-          <ac:spMkLst>
-            <pc:docMk/>
-            <pc:sldMk cId="2721965878" sldId="268"/>
-            <ac:spMk id="32" creationId="{17FC539C-B783-4B03-9F9E-D13430F3F64F}"/>
-          </ac:spMkLst>
-        </pc:spChg>
-        <pc:spChg chg="add del">
-          <ac:chgData name="Karthika Vellingiri" userId="2f791443-b2b6-40db-8581-89f0c0794d11" providerId="ADAL" clId="{272279B0-242C-4D01-9A5D-29699CA56103}" dt="2025-08-10T14:55:29.324" v="384" actId="26606"/>
-          <ac:spMkLst>
-            <pc:docMk/>
-            <pc:sldMk cId="2721965878" sldId="268"/>
-            <ac:spMk id="33" creationId="{7D379150-F6B4-45C8-BE10-6B278AD400EB}"/>
-          </ac:spMkLst>
-        </pc:spChg>
-        <pc:spChg chg="add del">
-          <ac:chgData name="Karthika Vellingiri" userId="2f791443-b2b6-40db-8581-89f0c0794d11" providerId="ADAL" clId="{272279B0-242C-4D01-9A5D-29699CA56103}" dt="2025-08-10T14:58:03.308" v="419" actId="26606"/>
-          <ac:spMkLst>
-            <pc:docMk/>
-            <pc:sldMk cId="2721965878" sldId="268"/>
-            <ac:spMk id="34" creationId="{7D379150-F6B4-45C8-BE10-6B278AD400EB}"/>
-          </ac:spMkLst>
-        </pc:spChg>
-        <pc:spChg chg="add del">
-          <ac:chgData name="Karthika Vellingiri" userId="2f791443-b2b6-40db-8581-89f0c0794d11" providerId="ADAL" clId="{272279B0-242C-4D01-9A5D-29699CA56103}" dt="2025-08-10T14:55:29.324" v="384" actId="26606"/>
-          <ac:spMkLst>
-            <pc:docMk/>
-            <pc:sldMk cId="2721965878" sldId="268"/>
-            <ac:spMk id="35" creationId="{5FFCF544-A370-4A5D-A95F-CA6E0E7191E6}"/>
-          </ac:spMkLst>
-        </pc:spChg>
-        <pc:spChg chg="add del">
-          <ac:chgData name="Karthika Vellingiri" userId="2f791443-b2b6-40db-8581-89f0c0794d11" providerId="ADAL" clId="{272279B0-242C-4D01-9A5D-29699CA56103}" dt="2025-08-10T14:58:03.308" v="419" actId="26606"/>
-          <ac:spMkLst>
-            <pc:docMk/>
-            <pc:sldMk cId="2721965878" sldId="268"/>
-            <ac:spMk id="36" creationId="{5FFCF544-A370-4A5D-A95F-CA6E0E7191E6}"/>
-          </ac:spMkLst>
-        </pc:spChg>
-        <pc:spChg chg="add del">
-          <ac:chgData name="Karthika Vellingiri" userId="2f791443-b2b6-40db-8581-89f0c0794d11" providerId="ADAL" clId="{272279B0-242C-4D01-9A5D-29699CA56103}" dt="2025-08-10T14:55:29.324" v="384" actId="26606"/>
-          <ac:spMkLst>
-            <pc:docMk/>
-            <pc:sldMk cId="2721965878" sldId="268"/>
-            <ac:spMk id="39" creationId="{44CC594A-A820-450F-B363-C19201FCFEC6}"/>
-          </ac:spMkLst>
-        </pc:spChg>
-        <pc:spChg chg="add del">
-          <ac:chgData name="Karthika Vellingiri" userId="2f791443-b2b6-40db-8581-89f0c0794d11" providerId="ADAL" clId="{272279B0-242C-4D01-9A5D-29699CA56103}" dt="2025-08-10T14:58:03.308" v="419" actId="26606"/>
-          <ac:spMkLst>
-            <pc:docMk/>
-            <pc:sldMk cId="2721965878" sldId="268"/>
-            <ac:spMk id="40" creationId="{52ABB703-2B0E-4C3B-B4A2-F3973548E561}"/>
-          </ac:spMkLst>
-        </pc:spChg>
-        <pc:spChg chg="add del">
-          <ac:chgData name="Karthika Vellingiri" userId="2f791443-b2b6-40db-8581-89f0c0794d11" providerId="ADAL" clId="{272279B0-242C-4D01-9A5D-29699CA56103}" dt="2025-08-10T14:55:29.324" v="384" actId="26606"/>
-          <ac:spMkLst>
-            <pc:docMk/>
-            <pc:sldMk cId="2721965878" sldId="268"/>
-            <ac:spMk id="41" creationId="{59FAB3DA-E9ED-4574-ABCC-378BC0FF1BBC}"/>
-          </ac:spMkLst>
-        </pc:spChg>
-        <pc:spChg chg="add del">
-          <ac:chgData name="Karthika Vellingiri" userId="2f791443-b2b6-40db-8581-89f0c0794d11" providerId="ADAL" clId="{272279B0-242C-4D01-9A5D-29699CA56103}" dt="2025-08-10T14:55:29.324" v="384" actId="26606"/>
-          <ac:spMkLst>
-            <pc:docMk/>
-            <pc:sldMk cId="2721965878" sldId="268"/>
-            <ac:spMk id="43" creationId="{53B8D6B0-55D6-48DC-86D8-FD95D5F118AB}"/>
-          </ac:spMkLst>
-        </pc:spChg>
-        <pc:spChg chg="add del">
-          <ac:chgData name="Karthika Vellingiri" userId="2f791443-b2b6-40db-8581-89f0c0794d11" providerId="ADAL" clId="{272279B0-242C-4D01-9A5D-29699CA56103}" dt="2025-08-10T14:58:03.308" v="419" actId="26606"/>
-          <ac:spMkLst>
-            <pc:docMk/>
-            <pc:sldMk cId="2721965878" sldId="268"/>
-            <ac:spMk id="44" creationId="{E95DA498-D9A2-4DA9-B9DA-B3776E08CF7E}"/>
-          </ac:spMkLst>
-        </pc:spChg>
-        <pc:spChg chg="add del">
-          <ac:chgData name="Karthika Vellingiri" userId="2f791443-b2b6-40db-8581-89f0c0794d11" providerId="ADAL" clId="{272279B0-242C-4D01-9A5D-29699CA56103}" dt="2025-08-10T14:58:03.308" v="419" actId="26606"/>
-          <ac:spMkLst>
-            <pc:docMk/>
-            <pc:sldMk cId="2721965878" sldId="268"/>
-            <ac:spMk id="45" creationId="{82A73093-4B9D-420D-B17E-52293703A1D4}"/>
-          </ac:spMkLst>
-        </pc:spChg>
-        <pc:spChg chg="add del">
-          <ac:chgData name="Karthika Vellingiri" userId="2f791443-b2b6-40db-8581-89f0c0794d11" providerId="ADAL" clId="{272279B0-242C-4D01-9A5D-29699CA56103}" dt="2025-08-10T14:57:54.305" v="414" actId="26606"/>
-          <ac:spMkLst>
-            <pc:docMk/>
-            <pc:sldMk cId="2721965878" sldId="268"/>
-            <ac:spMk id="50" creationId="{7D379150-F6B4-45C8-BE10-6B278AD400EB}"/>
-          </ac:spMkLst>
-        </pc:spChg>
-        <pc:spChg chg="add del">
-          <ac:chgData name="Karthika Vellingiri" userId="2f791443-b2b6-40db-8581-89f0c0794d11" providerId="ADAL" clId="{272279B0-242C-4D01-9A5D-29699CA56103}" dt="2025-08-10T14:57:54.305" v="414" actId="26606"/>
-          <ac:spMkLst>
-            <pc:docMk/>
-            <pc:sldMk cId="2721965878" sldId="268"/>
-            <ac:spMk id="56" creationId="{52ABB703-2B0E-4C3B-B4A2-F3973548E561}"/>
-          </ac:spMkLst>
-        </pc:spChg>
-        <pc:spChg chg="add del">
-          <ac:chgData name="Karthika Vellingiri" userId="2f791443-b2b6-40db-8581-89f0c0794d11" providerId="ADAL" clId="{272279B0-242C-4D01-9A5D-29699CA56103}" dt="2025-08-10T14:57:54.305" v="414" actId="26606"/>
-          <ac:spMkLst>
-            <pc:docMk/>
-            <pc:sldMk cId="2721965878" sldId="268"/>
-            <ac:spMk id="60" creationId="{E95DA498-D9A2-4DA9-B9DA-B3776E08CF7E}"/>
-          </ac:spMkLst>
-        </pc:spChg>
-        <pc:spChg chg="add del">
-          <ac:chgData name="Karthika Vellingiri" userId="2f791443-b2b6-40db-8581-89f0c0794d11" providerId="ADAL" clId="{272279B0-242C-4D01-9A5D-29699CA56103}" dt="2025-08-10T14:57:54.305" v="414" actId="26606"/>
-          <ac:spMkLst>
-            <pc:docMk/>
-            <pc:sldMk cId="2721965878" sldId="268"/>
-            <ac:spMk id="62" creationId="{82A73093-4B9D-420D-B17E-52293703A1D4}"/>
-          </ac:spMkLst>
-        </pc:spChg>
-        <pc:spChg chg="add del">
-          <ac:chgData name="Karthika Vellingiri" userId="2f791443-b2b6-40db-8581-89f0c0794d11" providerId="ADAL" clId="{272279B0-242C-4D01-9A5D-29699CA56103}" dt="2025-08-10T14:57:59.940" v="416" actId="26606"/>
-          <ac:spMkLst>
-            <pc:docMk/>
-            <pc:sldMk cId="2721965878" sldId="268"/>
-            <ac:spMk id="64" creationId="{7D379150-F6B4-45C8-BE10-6B278AD400EB}"/>
-          </ac:spMkLst>
-        </pc:spChg>
-        <pc:spChg chg="add del">
-          <ac:chgData name="Karthika Vellingiri" userId="2f791443-b2b6-40db-8581-89f0c0794d11" providerId="ADAL" clId="{272279B0-242C-4D01-9A5D-29699CA56103}" dt="2025-08-10T14:57:59.940" v="416" actId="26606"/>
-          <ac:spMkLst>
-            <pc:docMk/>
-            <pc:sldMk cId="2721965878" sldId="268"/>
-            <ac:spMk id="65" creationId="{5FFCF544-A370-4A5D-A95F-CA6E0E7191E6}"/>
-          </ac:spMkLst>
-        </pc:spChg>
-        <pc:spChg chg="add del">
-          <ac:chgData name="Karthika Vellingiri" userId="2f791443-b2b6-40db-8581-89f0c0794d11" providerId="ADAL" clId="{272279B0-242C-4D01-9A5D-29699CA56103}" dt="2025-08-10T14:57:59.940" v="416" actId="26606"/>
-          <ac:spMkLst>
-            <pc:docMk/>
-            <pc:sldMk cId="2721965878" sldId="268"/>
-            <ac:spMk id="67" creationId="{44CC594A-A820-450F-B363-C19201FCFEC6}"/>
-          </ac:spMkLst>
-        </pc:spChg>
-        <pc:spChg chg="add del">
-          <ac:chgData name="Karthika Vellingiri" userId="2f791443-b2b6-40db-8581-89f0c0794d11" providerId="ADAL" clId="{272279B0-242C-4D01-9A5D-29699CA56103}" dt="2025-08-10T14:57:59.940" v="416" actId="26606"/>
-          <ac:spMkLst>
-            <pc:docMk/>
-            <pc:sldMk cId="2721965878" sldId="268"/>
-            <ac:spMk id="68" creationId="{59FAB3DA-E9ED-4574-ABCC-378BC0FF1BBC}"/>
-          </ac:spMkLst>
-        </pc:spChg>
-        <pc:spChg chg="del">
-          <ac:chgData name="Karthika Vellingiri" userId="2f791443-b2b6-40db-8581-89f0c0794d11" providerId="ADAL" clId="{272279B0-242C-4D01-9A5D-29699CA56103}" dt="2025-08-10T14:57:59.940" v="416" actId="26606"/>
-          <ac:spMkLst>
-            <pc:docMk/>
-            <pc:sldMk cId="2721965878" sldId="268"/>
-            <ac:spMk id="69" creationId="{53B8D6B0-55D6-48DC-86D8-FD95D5F118AB}"/>
-          </ac:spMkLst>
-        </pc:spChg>
-        <pc:spChg chg="add del">
-          <ac:chgData name="Karthika Vellingiri" userId="2f791443-b2b6-40db-8581-89f0c0794d11" providerId="ADAL" clId="{272279B0-242C-4D01-9A5D-29699CA56103}" dt="2025-08-10T14:58:03.294" v="418" actId="26606"/>
-          <ac:spMkLst>
-            <pc:docMk/>
-            <pc:sldMk cId="2721965878" sldId="268"/>
-            <ac:spMk id="71" creationId="{7D379150-F6B4-45C8-BE10-6B278AD400EB}"/>
-          </ac:spMkLst>
-        </pc:spChg>
-        <pc:spChg chg="add del">
-          <ac:chgData name="Karthika Vellingiri" userId="2f791443-b2b6-40db-8581-89f0c0794d11" providerId="ADAL" clId="{272279B0-242C-4D01-9A5D-29699CA56103}" dt="2025-08-10T14:58:03.294" v="418" actId="26606"/>
-          <ac:spMkLst>
-            <pc:docMk/>
-            <pc:sldMk cId="2721965878" sldId="268"/>
-            <ac:spMk id="72" creationId="{5FFCF544-A370-4A5D-A95F-CA6E0E7191E6}"/>
-          </ac:spMkLst>
-        </pc:spChg>
-        <pc:spChg chg="add del">
-          <ac:chgData name="Karthika Vellingiri" userId="2f791443-b2b6-40db-8581-89f0c0794d11" providerId="ADAL" clId="{272279B0-242C-4D01-9A5D-29699CA56103}" dt="2025-08-10T14:58:03.294" v="418" actId="26606"/>
-          <ac:spMkLst>
-            <pc:docMk/>
-            <pc:sldMk cId="2721965878" sldId="268"/>
-            <ac:spMk id="74" creationId="{C33BF9DD-8A45-4EEE-B231-0A14D322E5F9}"/>
-          </ac:spMkLst>
-        </pc:spChg>
-        <pc:spChg chg="add del">
-          <ac:chgData name="Karthika Vellingiri" userId="2f791443-b2b6-40db-8581-89f0c0794d11" providerId="ADAL" clId="{272279B0-242C-4D01-9A5D-29699CA56103}" dt="2025-08-10T14:58:03.294" v="418" actId="26606"/>
-          <ac:spMkLst>
-            <pc:docMk/>
-            <pc:sldMk cId="2721965878" sldId="268"/>
-            <ac:spMk id="76" creationId="{D5FBCAC9-BD8B-4F3B-AD74-EF37D4211349}"/>
-          </ac:spMkLst>
-        </pc:spChg>
-        <pc:spChg chg="add del">
-          <ac:chgData name="Karthika Vellingiri" userId="2f791443-b2b6-40db-8581-89f0c0794d11" providerId="ADAL" clId="{272279B0-242C-4D01-9A5D-29699CA56103}" dt="2025-08-10T14:58:03.294" v="418" actId="26606"/>
-          <ac:spMkLst>
-            <pc:docMk/>
-            <pc:sldMk cId="2721965878" sldId="268"/>
-            <ac:spMk id="77" creationId="{9556C5A8-AD7E-4CE7-87BE-9EA3B5E1786F}"/>
-          </ac:spMkLst>
-        </pc:spChg>
-        <pc:spChg chg="add">
-          <ac:chgData name="Karthika Vellingiri" userId="2f791443-b2b6-40db-8581-89f0c0794d11" providerId="ADAL" clId="{272279B0-242C-4D01-9A5D-29699CA56103}" dt="2025-08-10T14:58:03.308" v="419" actId="26606"/>
-          <ac:spMkLst>
-            <pc:docMk/>
-            <pc:sldMk cId="2721965878" sldId="268"/>
-            <ac:spMk id="79" creationId="{7D379150-F6B4-45C8-BE10-6B278AD400EB}"/>
-          </ac:spMkLst>
-        </pc:spChg>
-        <pc:spChg chg="add">
-          <ac:chgData name="Karthika Vellingiri" userId="2f791443-b2b6-40db-8581-89f0c0794d11" providerId="ADAL" clId="{272279B0-242C-4D01-9A5D-29699CA56103}" dt="2025-08-10T14:58:03.308" v="419" actId="26606"/>
-          <ac:spMkLst>
-            <pc:docMk/>
-            <pc:sldMk cId="2721965878" sldId="268"/>
-            <ac:spMk id="80" creationId="{5FFCF544-A370-4A5D-A95F-CA6E0E7191E6}"/>
-          </ac:spMkLst>
-        </pc:spChg>
-        <pc:spChg chg="add">
-          <ac:chgData name="Karthika Vellingiri" userId="2f791443-b2b6-40db-8581-89f0c0794d11" providerId="ADAL" clId="{272279B0-242C-4D01-9A5D-29699CA56103}" dt="2025-08-10T14:58:03.308" v="419" actId="26606"/>
-          <ac:spMkLst>
-            <pc:docMk/>
-            <pc:sldMk cId="2721965878" sldId="268"/>
-            <ac:spMk id="82" creationId="{52ABB703-2B0E-4C3B-B4A2-F3973548E561}"/>
-          </ac:spMkLst>
-        </pc:spChg>
-        <pc:spChg chg="add">
-          <ac:chgData name="Karthika Vellingiri" userId="2f791443-b2b6-40db-8581-89f0c0794d11" providerId="ADAL" clId="{272279B0-242C-4D01-9A5D-29699CA56103}" dt="2025-08-10T14:58:03.308" v="419" actId="26606"/>
-          <ac:spMkLst>
-            <pc:docMk/>
-            <pc:sldMk cId="2721965878" sldId="268"/>
-            <ac:spMk id="84" creationId="{E95DA498-D9A2-4DA9-B9DA-B3776E08CF7E}"/>
-          </ac:spMkLst>
-        </pc:spChg>
-        <pc:spChg chg="add">
-          <ac:chgData name="Karthika Vellingiri" userId="2f791443-b2b6-40db-8581-89f0c0794d11" providerId="ADAL" clId="{272279B0-242C-4D01-9A5D-29699CA56103}" dt="2025-08-10T14:58:03.308" v="419" actId="26606"/>
-          <ac:spMkLst>
-            <pc:docMk/>
-            <pc:sldMk cId="2721965878" sldId="268"/>
-            <ac:spMk id="85" creationId="{82A73093-4B9D-420D-B17E-52293703A1D4}"/>
-          </ac:spMkLst>
-        </pc:spChg>
-        <pc:graphicFrameChg chg="mod">
-          <ac:chgData name="Karthika Vellingiri" userId="2f791443-b2b6-40db-8581-89f0c0794d11" providerId="ADAL" clId="{272279B0-242C-4D01-9A5D-29699CA56103}" dt="2025-08-10T14:59:05.361" v="430" actId="1076"/>
-          <ac:graphicFrameMkLst>
-            <pc:docMk/>
-            <pc:sldMk cId="2721965878" sldId="268"/>
-            <ac:graphicFrameMk id="47" creationId="{31B52507-925C-467F-1D55-D15B69C7C4DB}"/>
-          </ac:graphicFrameMkLst>
-        </pc:graphicFrameChg>
-        <pc:picChg chg="add mod ord modCrop">
-          <ac:chgData name="Karthika Vellingiri" userId="2f791443-b2b6-40db-8581-89f0c0794d11" providerId="ADAL" clId="{272279B0-242C-4D01-9A5D-29699CA56103}" dt="2025-08-10T14:59:40.506" v="438" actId="208"/>
-          <ac:picMkLst>
-            <pc:docMk/>
-            <pc:sldMk cId="2721965878" sldId="268"/>
-            <ac:picMk id="6" creationId="{E2F40734-2385-BA83-B2DC-F4EACC3B133E}"/>
-          </ac:picMkLst>
-        </pc:picChg>
-        <pc:cxnChg chg="add">
-          <ac:chgData name="Karthika Vellingiri" userId="2f791443-b2b6-40db-8581-89f0c0794d11" providerId="ADAL" clId="{272279B0-242C-4D01-9A5D-29699CA56103}" dt="2025-08-10T14:56:39.823" v="391" actId="26606"/>
-          <ac:cxnSpMkLst>
-            <pc:docMk/>
-            <pc:sldMk cId="2721965878" sldId="268"/>
-            <ac:cxnSpMk id="10" creationId="{6EEB3B97-A638-498B-8083-54191CE71E01}"/>
-          </ac:cxnSpMkLst>
-        </pc:cxnChg>
-        <pc:cxnChg chg="add del">
-          <ac:chgData name="Karthika Vellingiri" userId="2f791443-b2b6-40db-8581-89f0c0794d11" providerId="ADAL" clId="{272279B0-242C-4D01-9A5D-29699CA56103}" dt="2025-08-10T14:55:07.418" v="379" actId="26606"/>
-          <ac:cxnSpMkLst>
-            <pc:docMk/>
-            <pc:sldMk cId="2721965878" sldId="268"/>
-            <ac:cxnSpMk id="15" creationId="{6EEB3B97-A638-498B-8083-54191CE71E01}"/>
-          </ac:cxnSpMkLst>
-        </pc:cxnChg>
-        <pc:cxnChg chg="add del">
-          <ac:chgData name="Karthika Vellingiri" userId="2f791443-b2b6-40db-8581-89f0c0794d11" providerId="ADAL" clId="{272279B0-242C-4D01-9A5D-29699CA56103}" dt="2025-08-10T14:55:29.805" v="385" actId="26606"/>
-          <ac:cxnSpMkLst>
-            <pc:docMk/>
-            <pc:sldMk cId="2721965878" sldId="268"/>
-            <ac:cxnSpMk id="25" creationId="{0AC655C7-EC94-4BE6-84C8-2F9EFBBB2789}"/>
-          </ac:cxnSpMkLst>
-        </pc:cxnChg>
-        <pc:cxnChg chg="add del">
-          <ac:chgData name="Karthika Vellingiri" userId="2f791443-b2b6-40db-8581-89f0c0794d11" providerId="ADAL" clId="{272279B0-242C-4D01-9A5D-29699CA56103}" dt="2025-08-10T14:55:29.805" v="385" actId="26606"/>
-          <ac:cxnSpMkLst>
-            <pc:docMk/>
-            <pc:sldMk cId="2721965878" sldId="268"/>
-            <ac:cxnSpMk id="28" creationId="{5AB158E9-1B40-4CD6-95F0-95CA11DF7B7A}"/>
-          </ac:cxnSpMkLst>
-        </pc:cxnChg>
-      </pc:sldChg>
-      <pc:sldMasterChg chg="modTransition modSldLayout">
-        <pc:chgData name="Karthika Vellingiri" userId="2f791443-b2b6-40db-8581-89f0c0794d11" providerId="ADAL" clId="{272279B0-242C-4D01-9A5D-29699CA56103}" dt="2025-08-10T14:17:04.657" v="70"/>
-        <pc:sldMasterMkLst>
-          <pc:docMk/>
-          <pc:sldMasterMk cId="2548964161" sldId="2147483765"/>
-        </pc:sldMasterMkLst>
-        <pc:sldLayoutChg chg="modTransition">
-          <pc:chgData name="Karthika Vellingiri" userId="2f791443-b2b6-40db-8581-89f0c0794d11" providerId="ADAL" clId="{272279B0-242C-4D01-9A5D-29699CA56103}" dt="2025-08-10T14:17:04.657" v="70"/>
-          <pc:sldLayoutMkLst>
-            <pc:docMk/>
-            <pc:sldMasterMk cId="2548964161" sldId="2147483765"/>
-            <pc:sldLayoutMk cId="3613008605" sldId="2147483771"/>
-          </pc:sldLayoutMkLst>
-        </pc:sldLayoutChg>
-        <pc:sldLayoutChg chg="modTransition">
-          <pc:chgData name="Karthika Vellingiri" userId="2f791443-b2b6-40db-8581-89f0c0794d11" providerId="ADAL" clId="{272279B0-242C-4D01-9A5D-29699CA56103}" dt="2025-08-10T14:17:04.657" v="70"/>
-          <pc:sldLayoutMkLst>
-            <pc:docMk/>
-            <pc:sldMasterMk cId="2548964161" sldId="2147483765"/>
-            <pc:sldLayoutMk cId="735844477" sldId="2147483772"/>
-          </pc:sldLayoutMkLst>
-        </pc:sldLayoutChg>
-      </pc:sldMasterChg>
-      <pc:sldMasterChg chg="modTransition modSldLayout">
-        <pc:chgData name="Karthika Vellingiri" userId="2f791443-b2b6-40db-8581-89f0c0794d11" providerId="ADAL" clId="{272279B0-242C-4D01-9A5D-29699CA56103}" dt="2025-08-10T14:17:04.065" v="69"/>
-        <pc:sldMasterMkLst>
-          <pc:docMk/>
-          <pc:sldMasterMk cId="3502248109" sldId="2147483784"/>
-        </pc:sldMasterMkLst>
-        <pc:sldLayoutChg chg="modTransition">
-          <pc:chgData name="Karthika Vellingiri" userId="2f791443-b2b6-40db-8581-89f0c0794d11" providerId="ADAL" clId="{272279B0-242C-4D01-9A5D-29699CA56103}" dt="2025-08-10T14:17:04.065" v="69"/>
-          <pc:sldLayoutMkLst>
-            <pc:docMk/>
-            <pc:sldMasterMk cId="3502248109" sldId="2147483784"/>
-            <pc:sldLayoutMk cId="3361904095" sldId="2147483790"/>
-          </pc:sldLayoutMkLst>
-        </pc:sldLayoutChg>
-        <pc:sldLayoutChg chg="modTransition">
-          <pc:chgData name="Karthika Vellingiri" userId="2f791443-b2b6-40db-8581-89f0c0794d11" providerId="ADAL" clId="{272279B0-242C-4D01-9A5D-29699CA56103}" dt="2025-08-10T14:17:04.065" v="69"/>
-          <pc:sldLayoutMkLst>
-            <pc:docMk/>
-            <pc:sldMasterMk cId="3502248109" sldId="2147483784"/>
-            <pc:sldLayoutMk cId="832771332" sldId="2147483791"/>
-          </pc:sldLayoutMkLst>
-        </pc:sldLayoutChg>
-      </pc:sldMasterChg>
     </pc:docChg>
   </pc:docChgLst>
 </pc:chgInfo>
@@ -12508,7 +9026,7 @@
           <a:p>
             <a:fld id="{BC31D444-E7FA-48E7-AA74-A2D8636EEC6B}" type="datetimeFigureOut">
               <a:rPr lang="en-IN" smtClean="0"/>
-              <a:t>10-08-2025</a:t>
+              <a:t>06-03-2026</a:t>
             </a:fld>
             <a:endParaRPr lang="en-IN"/>
           </a:p>
@@ -13642,6 +10160,13 @@
             <a:schemeClr val="lt1"/>
           </a:fontRef>
         </p:style>
+        <p:txBody>
+          <a:bodyPr/>
+          <a:lstStyle/>
+          <a:p>
+            <a:endParaRPr lang="en-IN"/>
+          </a:p>
+        </p:txBody>
       </p:sp>
       <p:sp>
         <p:nvSpPr>
@@ -13680,6 +10205,13 @@
             <a:schemeClr val="lt1"/>
           </a:fontRef>
         </p:style>
+        <p:txBody>
+          <a:bodyPr/>
+          <a:lstStyle/>
+          <a:p>
+            <a:endParaRPr lang="en-IN"/>
+          </a:p>
+        </p:txBody>
       </p:sp>
       <p:sp>
         <p:nvSpPr>
@@ -13814,7 +10346,7 @@
           <a:p>
             <a:fld id="{ED291B17-9318-49DB-B28B-6E5994AE9581}" type="datetime1">
               <a:rPr lang="en-US" smtClean="0"/>
-              <a:t>8/9/2025</a:t>
+              <a:t>3/6/2026</a:t>
             </a:fld>
             <a:endParaRPr lang="en-US" dirty="0"/>
           </a:p>
@@ -14022,7 +10554,7 @@
           <a:p>
             <a:fld id="{2CED4963-E985-44C4-B8C4-FDD613B7C2F8}" type="datetime1">
               <a:rPr lang="en-US" smtClean="0"/>
-              <a:t>8/9/2025</a:t>
+              <a:t>3/6/2026</a:t>
             </a:fld>
             <a:endParaRPr lang="en-US" dirty="0"/>
           </a:p>
@@ -14278,7 +10810,7 @@
           <a:p>
             <a:fld id="{ED291B17-9318-49DB-B28B-6E5994AE9581}" type="datetime1">
               <a:rPr lang="en-US" smtClean="0"/>
-              <a:t>8/9/2025</a:t>
+              <a:t>3/6/2026</a:t>
             </a:fld>
             <a:endParaRPr lang="en-US" dirty="0"/>
           </a:p>
@@ -14452,7 +10984,7 @@
           <a:p>
             <a:fld id="{78DD82B9-B8EE-4375-B6FF-88FA6ABB15D9}" type="datetime1">
               <a:rPr lang="en-US" smtClean="0"/>
-              <a:t>8/9/2025</a:t>
+              <a:t>3/6/2026</a:t>
             </a:fld>
             <a:endParaRPr lang="en-US" dirty="0"/>
           </a:p>
@@ -14795,7 +11327,7 @@
           <a:p>
             <a:fld id="{B2497495-0637-405E-AE64-5CC7506D51F5}" type="datetime1">
               <a:rPr lang="en-US" smtClean="0"/>
-              <a:t>8/9/2025</a:t>
+              <a:t>3/6/2026</a:t>
             </a:fld>
             <a:endParaRPr lang="en-US" dirty="0"/>
           </a:p>
@@ -15070,7 +11602,7 @@
           <a:p>
             <a:fld id="{7BFFD690-9426-415D-8B65-26881E07B2D4}" type="datetime1">
               <a:rPr lang="en-US" smtClean="0"/>
-              <a:t>8/9/2025</a:t>
+              <a:t>3/6/2026</a:t>
             </a:fld>
             <a:endParaRPr lang="en-US" dirty="0"/>
           </a:p>
@@ -15449,7 +11981,7 @@
           <a:p>
             <a:fld id="{04C4989A-474C-40DE-95B9-011C28B71673}" type="datetime1">
               <a:rPr lang="en-US" smtClean="0"/>
-              <a:t>8/9/2025</a:t>
+              <a:t>3/6/2026</a:t>
             </a:fld>
             <a:endParaRPr lang="en-US" dirty="0"/>
           </a:p>
@@ -15567,7 +12099,7 @@
           <a:p>
             <a:fld id="{5DB4ED54-5B5E-4A04-93D3-5772E3CE3818}" type="datetime1">
               <a:rPr lang="en-US" smtClean="0"/>
-              <a:t>8/9/2025</a:t>
+              <a:t>3/6/2026</a:t>
             </a:fld>
             <a:endParaRPr lang="en-US" dirty="0"/>
           </a:p>
@@ -15738,7 +12270,7 @@
           <a:p>
             <a:fld id="{4EDE50D6-574B-40AF-946F-D52A04ADE379}" type="datetime1">
               <a:rPr lang="en-US" smtClean="0"/>
-              <a:t>8/9/2025</a:t>
+              <a:t>3/6/2026</a:t>
             </a:fld>
             <a:endParaRPr lang="en-US" dirty="0"/>
           </a:p>
@@ -16092,7 +12624,7 @@
           <a:p>
             <a:fld id="{D82884F1-FFEA-405F-9602-3DCA865EDA4E}" type="datetime1">
               <a:rPr lang="en-US" smtClean="0"/>
-              <a:t>8/9/2025</a:t>
+              <a:t>3/6/2026</a:t>
             </a:fld>
             <a:endParaRPr lang="en-US" dirty="0"/>
           </a:p>
@@ -16475,7 +13007,7 @@
           <a:p>
             <a:fld id="{7E18DB4A-8810-4A10-AD5C-D5E2C667F5B3}" type="datetime1">
               <a:rPr lang="en-US" smtClean="0"/>
-              <a:t>8/9/2025</a:t>
+              <a:t>3/6/2026</a:t>
             </a:fld>
             <a:endParaRPr lang="en-US" dirty="0"/>
           </a:p>
@@ -16596,6 +13128,13 @@
             <a:schemeClr val="lt1"/>
           </a:fontRef>
         </p:style>
+        <p:txBody>
+          <a:bodyPr/>
+          <a:lstStyle/>
+          <a:p>
+            <a:endParaRPr lang="en-IN"/>
+          </a:p>
+        </p:txBody>
       </p:sp>
       <p:sp>
         <p:nvSpPr>
@@ -16634,6 +13173,13 @@
             <a:schemeClr val="lt1"/>
           </a:fontRef>
         </p:style>
+        <p:txBody>
+          <a:bodyPr/>
+          <a:lstStyle/>
+          <a:p>
+            <a:endParaRPr lang="en-IN"/>
+          </a:p>
+        </p:txBody>
       </p:sp>
       <p:sp>
         <p:nvSpPr>
@@ -16763,7 +13309,7 @@
           <a:p>
             <a:fld id="{ED291B17-9318-49DB-B28B-6E5994AE9581}" type="datetime1">
               <a:rPr lang="en-US" smtClean="0"/>
-              <a:t>8/9/2025</a:t>
+              <a:t>3/6/2026</a:t>
             </a:fld>
             <a:endParaRPr lang="en-US" dirty="0"/>
           </a:p>
@@ -17428,7 +13974,7 @@
           <a:lstStyle/>
           <a:p>
             <a:r>
-              <a:rPr lang="en-US" sz="1300" b="1">
+              <a:rPr lang="en-US" sz="1300" b="1" dirty="0">
                 <a:solidFill>
                   <a:schemeClr val="tx1">
                     <a:lumMod val="85000"/>
@@ -17439,43 +13985,6 @@
               </a:rPr>
               <a:t>Karthika Vellingiri</a:t>
             </a:r>
-          </a:p>
-          <a:p>
-            <a:r>
-              <a:rPr lang="en-US" sz="1300" b="1">
-                <a:solidFill>
-                  <a:schemeClr val="tx1">
-                    <a:lumMod val="85000"/>
-                    <a:lumOff val="15000"/>
-                  </a:schemeClr>
-                </a:solidFill>
-                <a:latin typeface="Quattrocento" pitchFamily="34" charset="0"/>
-              </a:rPr>
-              <a:t>Bellevue University</a:t>
-            </a:r>
-          </a:p>
-          <a:p>
-            <a:r>
-              <a:rPr lang="en-IN" sz="1300" b="1">
-                <a:solidFill>
-                  <a:schemeClr val="tx1">
-                    <a:lumMod val="85000"/>
-                    <a:lumOff val="15000"/>
-                  </a:schemeClr>
-                </a:solidFill>
-                <a:latin typeface="Quattrocento" pitchFamily="34" charset="0"/>
-              </a:rPr>
-              <a:t>DSC 640 – Data Presentation and Visualization</a:t>
-            </a:r>
-            <a:endParaRPr lang="en-US" sz="1300" b="1">
-              <a:solidFill>
-                <a:schemeClr val="tx1">
-                  <a:lumMod val="85000"/>
-                  <a:lumOff val="15000"/>
-                </a:schemeClr>
-              </a:solidFill>
-              <a:latin typeface="Quattrocento" pitchFamily="34" charset="0"/>
-            </a:endParaRPr>
           </a:p>
         </p:txBody>
       </p:sp>
